--- a/roadmap_2026Q3.pptx
+++ b/roadmap_2026Q3.pptx
@@ -7877,6 +7877,816 @@
         </p:nvCxnSpPr>
         <p:spPr>
           <a:xfrm>
+            <a:off x="3886200" y="1161288"/>
+            <a:ext cx="0" cy="932688"/>
+          </a:xfrm>
+          <a:prstGeom prst="line">
+            <a:avLst/>
+          </a:prstGeom>
+          <a:ln w="19050">
+            <a:solidFill>
+              <a:srgbClr val="2F5597"/>
+            </a:solidFill>
+          </a:ln>
+        </p:spPr>
+        <p:style>
+          <a:lnRef idx="2">
+            <a:schemeClr val="accent1"/>
+          </a:lnRef>
+          <a:fillRef idx="0">
+            <a:schemeClr val="accent1"/>
+          </a:fillRef>
+          <a:effectRef idx="1">
+            <a:schemeClr val="accent1"/>
+          </a:effectRef>
+          <a:fontRef idx="minor">
+            <a:schemeClr val="tx1"/>
+          </a:fontRef>
+        </p:style>
+      </p:cxnSp>
+      <p:sp>
+        <p:nvSpPr>
+          <p:cNvPr id="106" name="Pentagon 105"/>
+          <p:cNvSpPr/>
+          <p:nvPr/>
+        </p:nvSpPr>
+        <p:spPr>
+          <a:xfrm>
+            <a:off x="3886200" y="1161288"/>
+            <a:ext cx="146304" cy="137160"/>
+          </a:xfrm>
+          <a:prstGeom prst="homePlate">
+            <a:avLst/>
+          </a:prstGeom>
+          <a:solidFill>
+            <a:srgbClr val="4472C4"/>
+          </a:solidFill>
+          <a:ln w="12700">
+            <a:solidFill>
+              <a:srgbClr val="2F5597"/>
+            </a:solidFill>
+          </a:ln>
+          <a:effectLst/>
+        </p:spPr>
+        <p:style>
+          <a:lnRef idx="1">
+            <a:schemeClr val="accent1"/>
+          </a:lnRef>
+          <a:fillRef idx="3">
+            <a:schemeClr val="accent1"/>
+          </a:fillRef>
+          <a:effectRef idx="2">
+            <a:schemeClr val="accent1"/>
+          </a:effectRef>
+          <a:fontRef idx="minor">
+            <a:schemeClr val="lt1"/>
+          </a:fontRef>
+        </p:style>
+        <p:txBody>
+          <a:bodyPr rtlCol="0" anchor="ctr" wrap="square" lIns="18000" rIns="18000" tIns="9000" bIns="9000"/>
+          <a:lstStyle/>
+          <a:p>
+            <a:pPr algn="ctr"/>
+          </a:p>
+        </p:txBody>
+      </p:sp>
+      <p:cxnSp>
+        <p:nvCxnSpPr>
+          <p:cNvPr id="107" name="Connector 106"/>
+          <p:cNvCxnSpPr/>
+          <p:nvPr/>
+        </p:nvCxnSpPr>
+        <p:spPr>
+          <a:xfrm>
+            <a:off x="6040036" y="1161288"/>
+            <a:ext cx="0" cy="932688"/>
+          </a:xfrm>
+          <a:prstGeom prst="line">
+            <a:avLst/>
+          </a:prstGeom>
+          <a:ln w="19050">
+            <a:solidFill>
+              <a:srgbClr val="7F0000"/>
+            </a:solidFill>
+          </a:ln>
+        </p:spPr>
+        <p:style>
+          <a:lnRef idx="2">
+            <a:schemeClr val="accent1"/>
+          </a:lnRef>
+          <a:fillRef idx="0">
+            <a:schemeClr val="accent1"/>
+          </a:fillRef>
+          <a:effectRef idx="1">
+            <a:schemeClr val="accent1"/>
+          </a:effectRef>
+          <a:fontRef idx="minor">
+            <a:schemeClr val="tx1"/>
+          </a:fontRef>
+        </p:style>
+      </p:cxnSp>
+      <p:sp>
+        <p:nvSpPr>
+          <p:cNvPr id="108" name="Pentagon 107"/>
+          <p:cNvSpPr/>
+          <p:nvPr/>
+        </p:nvSpPr>
+        <p:spPr>
+          <a:xfrm rot="10800000">
+            <a:off x="5893732" y="1161288"/>
+            <a:ext cx="146304" cy="137160"/>
+          </a:xfrm>
+          <a:prstGeom prst="homePlate">
+            <a:avLst/>
+          </a:prstGeom>
+          <a:solidFill>
+            <a:srgbClr val="C00000"/>
+          </a:solidFill>
+          <a:ln w="12700">
+            <a:solidFill>
+              <a:srgbClr val="7F0000"/>
+            </a:solidFill>
+          </a:ln>
+          <a:effectLst/>
+        </p:spPr>
+        <p:style>
+          <a:lnRef idx="1">
+            <a:schemeClr val="accent1"/>
+          </a:lnRef>
+          <a:fillRef idx="3">
+            <a:schemeClr val="accent1"/>
+          </a:fillRef>
+          <a:effectRef idx="2">
+            <a:schemeClr val="accent1"/>
+          </a:effectRef>
+          <a:fontRef idx="minor">
+            <a:schemeClr val="lt1"/>
+          </a:fontRef>
+        </p:style>
+        <p:txBody>
+          <a:bodyPr rtlCol="0" anchor="ctr" wrap="square" lIns="18000" rIns="18000" tIns="9000" bIns="9000"/>
+          <a:lstStyle/>
+          <a:p>
+            <a:pPr algn="ctr"/>
+          </a:p>
+        </p:txBody>
+      </p:sp>
+      <p:cxnSp>
+        <p:nvCxnSpPr>
+          <p:cNvPr id="109" name="Connector 108"/>
+          <p:cNvCxnSpPr/>
+          <p:nvPr/>
+        </p:nvCxnSpPr>
+        <p:spPr>
+          <a:xfrm>
+            <a:off x="3886200" y="2093976"/>
+            <a:ext cx="0" cy="1243584"/>
+          </a:xfrm>
+          <a:prstGeom prst="line">
+            <a:avLst/>
+          </a:prstGeom>
+          <a:ln w="19050">
+            <a:solidFill>
+              <a:srgbClr val="2F5597"/>
+            </a:solidFill>
+          </a:ln>
+        </p:spPr>
+        <p:style>
+          <a:lnRef idx="2">
+            <a:schemeClr val="accent1"/>
+          </a:lnRef>
+          <a:fillRef idx="0">
+            <a:schemeClr val="accent1"/>
+          </a:fillRef>
+          <a:effectRef idx="1">
+            <a:schemeClr val="accent1"/>
+          </a:effectRef>
+          <a:fontRef idx="minor">
+            <a:schemeClr val="tx1"/>
+          </a:fontRef>
+        </p:style>
+      </p:cxnSp>
+      <p:sp>
+        <p:nvSpPr>
+          <p:cNvPr id="110" name="Pentagon 109"/>
+          <p:cNvSpPr/>
+          <p:nvPr/>
+        </p:nvSpPr>
+        <p:spPr>
+          <a:xfrm>
+            <a:off x="3886200" y="2093976"/>
+            <a:ext cx="146304" cy="137160"/>
+          </a:xfrm>
+          <a:prstGeom prst="homePlate">
+            <a:avLst/>
+          </a:prstGeom>
+          <a:solidFill>
+            <a:srgbClr val="4472C4"/>
+          </a:solidFill>
+          <a:ln w="12700">
+            <a:solidFill>
+              <a:srgbClr val="2F5597"/>
+            </a:solidFill>
+          </a:ln>
+          <a:effectLst/>
+        </p:spPr>
+        <p:style>
+          <a:lnRef idx="1">
+            <a:schemeClr val="accent1"/>
+          </a:lnRef>
+          <a:fillRef idx="3">
+            <a:schemeClr val="accent1"/>
+          </a:fillRef>
+          <a:effectRef idx="2">
+            <a:schemeClr val="accent1"/>
+          </a:effectRef>
+          <a:fontRef idx="minor">
+            <a:schemeClr val="lt1"/>
+          </a:fontRef>
+        </p:style>
+        <p:txBody>
+          <a:bodyPr rtlCol="0" anchor="ctr" wrap="square" lIns="18000" rIns="18000" tIns="9000" bIns="9000"/>
+          <a:lstStyle/>
+          <a:p>
+            <a:pPr algn="ctr"/>
+          </a:p>
+        </p:txBody>
+      </p:sp>
+      <p:cxnSp>
+        <p:nvCxnSpPr>
+          <p:cNvPr id="111" name="Connector 110"/>
+          <p:cNvCxnSpPr/>
+          <p:nvPr/>
+        </p:nvCxnSpPr>
+        <p:spPr>
+          <a:xfrm>
+            <a:off x="7655413" y="2093976"/>
+            <a:ext cx="0" cy="1243584"/>
+          </a:xfrm>
+          <a:prstGeom prst="line">
+            <a:avLst/>
+          </a:prstGeom>
+          <a:ln w="19050">
+            <a:solidFill>
+              <a:srgbClr val="7F0000"/>
+            </a:solidFill>
+          </a:ln>
+        </p:spPr>
+        <p:style>
+          <a:lnRef idx="2">
+            <a:schemeClr val="accent1"/>
+          </a:lnRef>
+          <a:fillRef idx="0">
+            <a:schemeClr val="accent1"/>
+          </a:fillRef>
+          <a:effectRef idx="1">
+            <a:schemeClr val="accent1"/>
+          </a:effectRef>
+          <a:fontRef idx="minor">
+            <a:schemeClr val="tx1"/>
+          </a:fontRef>
+        </p:style>
+      </p:cxnSp>
+      <p:sp>
+        <p:nvSpPr>
+          <p:cNvPr id="112" name="Pentagon 111"/>
+          <p:cNvSpPr/>
+          <p:nvPr/>
+        </p:nvSpPr>
+        <p:spPr>
+          <a:xfrm rot="10800000">
+            <a:off x="7509109" y="2093976"/>
+            <a:ext cx="146304" cy="137160"/>
+          </a:xfrm>
+          <a:prstGeom prst="homePlate">
+            <a:avLst/>
+          </a:prstGeom>
+          <a:solidFill>
+            <a:srgbClr val="C00000"/>
+          </a:solidFill>
+          <a:ln w="12700">
+            <a:solidFill>
+              <a:srgbClr val="7F0000"/>
+            </a:solidFill>
+          </a:ln>
+          <a:effectLst/>
+        </p:spPr>
+        <p:style>
+          <a:lnRef idx="1">
+            <a:schemeClr val="accent1"/>
+          </a:lnRef>
+          <a:fillRef idx="3">
+            <a:schemeClr val="accent1"/>
+          </a:fillRef>
+          <a:effectRef idx="2">
+            <a:schemeClr val="accent1"/>
+          </a:effectRef>
+          <a:fontRef idx="minor">
+            <a:schemeClr val="lt1"/>
+          </a:fontRef>
+        </p:style>
+        <p:txBody>
+          <a:bodyPr rtlCol="0" anchor="ctr" wrap="square" lIns="18000" rIns="18000" tIns="9000" bIns="9000"/>
+          <a:lstStyle/>
+          <a:p>
+            <a:pPr algn="ctr"/>
+          </a:p>
+        </p:txBody>
+      </p:sp>
+      <p:cxnSp>
+        <p:nvCxnSpPr>
+          <p:cNvPr id="113" name="Connector 112"/>
+          <p:cNvCxnSpPr/>
+          <p:nvPr/>
+        </p:nvCxnSpPr>
+        <p:spPr>
+          <a:xfrm>
+            <a:off x="4424659" y="3337560"/>
+            <a:ext cx="0" cy="1554480"/>
+          </a:xfrm>
+          <a:prstGeom prst="line">
+            <a:avLst/>
+          </a:prstGeom>
+          <a:ln w="19050">
+            <a:solidFill>
+              <a:srgbClr val="2F5597"/>
+            </a:solidFill>
+          </a:ln>
+        </p:spPr>
+        <p:style>
+          <a:lnRef idx="2">
+            <a:schemeClr val="accent1"/>
+          </a:lnRef>
+          <a:fillRef idx="0">
+            <a:schemeClr val="accent1"/>
+          </a:fillRef>
+          <a:effectRef idx="1">
+            <a:schemeClr val="accent1"/>
+          </a:effectRef>
+          <a:fontRef idx="minor">
+            <a:schemeClr val="tx1"/>
+          </a:fontRef>
+        </p:style>
+      </p:cxnSp>
+      <p:sp>
+        <p:nvSpPr>
+          <p:cNvPr id="114" name="Pentagon 113"/>
+          <p:cNvSpPr/>
+          <p:nvPr/>
+        </p:nvSpPr>
+        <p:spPr>
+          <a:xfrm>
+            <a:off x="4424659" y="3337560"/>
+            <a:ext cx="146304" cy="137160"/>
+          </a:xfrm>
+          <a:prstGeom prst="homePlate">
+            <a:avLst/>
+          </a:prstGeom>
+          <a:solidFill>
+            <a:srgbClr val="4472C4"/>
+          </a:solidFill>
+          <a:ln w="12700">
+            <a:solidFill>
+              <a:srgbClr val="2F5597"/>
+            </a:solidFill>
+          </a:ln>
+          <a:effectLst/>
+        </p:spPr>
+        <p:style>
+          <a:lnRef idx="1">
+            <a:schemeClr val="accent1"/>
+          </a:lnRef>
+          <a:fillRef idx="3">
+            <a:schemeClr val="accent1"/>
+          </a:fillRef>
+          <a:effectRef idx="2">
+            <a:schemeClr val="accent1"/>
+          </a:effectRef>
+          <a:fontRef idx="minor">
+            <a:schemeClr val="lt1"/>
+          </a:fontRef>
+        </p:style>
+        <p:txBody>
+          <a:bodyPr rtlCol="0" anchor="ctr" wrap="square" lIns="18000" rIns="18000" tIns="9000" bIns="9000"/>
+          <a:lstStyle/>
+          <a:p>
+            <a:pPr algn="ctr"/>
+          </a:p>
+        </p:txBody>
+      </p:sp>
+      <p:cxnSp>
+        <p:nvCxnSpPr>
+          <p:cNvPr id="115" name="Connector 114"/>
+          <p:cNvCxnSpPr/>
+          <p:nvPr/>
+        </p:nvCxnSpPr>
+        <p:spPr>
+          <a:xfrm>
+            <a:off x="10347708" y="3337560"/>
+            <a:ext cx="0" cy="1554480"/>
+          </a:xfrm>
+          <a:prstGeom prst="line">
+            <a:avLst/>
+          </a:prstGeom>
+          <a:ln w="19050">
+            <a:solidFill>
+              <a:srgbClr val="7F0000"/>
+            </a:solidFill>
+          </a:ln>
+        </p:spPr>
+        <p:style>
+          <a:lnRef idx="2">
+            <a:schemeClr val="accent1"/>
+          </a:lnRef>
+          <a:fillRef idx="0">
+            <a:schemeClr val="accent1"/>
+          </a:fillRef>
+          <a:effectRef idx="1">
+            <a:schemeClr val="accent1"/>
+          </a:effectRef>
+          <a:fontRef idx="minor">
+            <a:schemeClr val="tx1"/>
+          </a:fontRef>
+        </p:style>
+      </p:cxnSp>
+      <p:sp>
+        <p:nvSpPr>
+          <p:cNvPr id="116" name="Pentagon 115"/>
+          <p:cNvSpPr/>
+          <p:nvPr/>
+        </p:nvSpPr>
+        <p:spPr>
+          <a:xfrm rot="10800000">
+            <a:off x="10201404" y="3337560"/>
+            <a:ext cx="146304" cy="137160"/>
+          </a:xfrm>
+          <a:prstGeom prst="homePlate">
+            <a:avLst/>
+          </a:prstGeom>
+          <a:solidFill>
+            <a:srgbClr val="C00000"/>
+          </a:solidFill>
+          <a:ln w="12700">
+            <a:solidFill>
+              <a:srgbClr val="7F0000"/>
+            </a:solidFill>
+          </a:ln>
+          <a:effectLst/>
+        </p:spPr>
+        <p:style>
+          <a:lnRef idx="1">
+            <a:schemeClr val="accent1"/>
+          </a:lnRef>
+          <a:fillRef idx="3">
+            <a:schemeClr val="accent1"/>
+          </a:fillRef>
+          <a:effectRef idx="2">
+            <a:schemeClr val="accent1"/>
+          </a:effectRef>
+          <a:fontRef idx="minor">
+            <a:schemeClr val="lt1"/>
+          </a:fontRef>
+        </p:style>
+        <p:txBody>
+          <a:bodyPr rtlCol="0" anchor="ctr" wrap="square" lIns="18000" rIns="18000" tIns="9000" bIns="9000"/>
+          <a:lstStyle/>
+          <a:p>
+            <a:pPr algn="ctr"/>
+          </a:p>
+        </p:txBody>
+      </p:sp>
+      <p:cxnSp>
+        <p:nvCxnSpPr>
+          <p:cNvPr id="117" name="Connector 116"/>
+          <p:cNvCxnSpPr/>
+          <p:nvPr/>
+        </p:nvCxnSpPr>
+        <p:spPr>
+          <a:xfrm>
+            <a:off x="7116954" y="4892040"/>
+            <a:ext cx="0" cy="621792"/>
+          </a:xfrm>
+          <a:prstGeom prst="line">
+            <a:avLst/>
+          </a:prstGeom>
+          <a:ln w="19050">
+            <a:solidFill>
+              <a:srgbClr val="2F5597"/>
+            </a:solidFill>
+          </a:ln>
+        </p:spPr>
+        <p:style>
+          <a:lnRef idx="2">
+            <a:schemeClr val="accent1"/>
+          </a:lnRef>
+          <a:fillRef idx="0">
+            <a:schemeClr val="accent1"/>
+          </a:fillRef>
+          <a:effectRef idx="1">
+            <a:schemeClr val="accent1"/>
+          </a:effectRef>
+          <a:fontRef idx="minor">
+            <a:schemeClr val="tx1"/>
+          </a:fontRef>
+        </p:style>
+      </p:cxnSp>
+      <p:sp>
+        <p:nvSpPr>
+          <p:cNvPr id="118" name="Pentagon 117"/>
+          <p:cNvSpPr/>
+          <p:nvPr/>
+        </p:nvSpPr>
+        <p:spPr>
+          <a:xfrm>
+            <a:off x="7116954" y="4892040"/>
+            <a:ext cx="146304" cy="137160"/>
+          </a:xfrm>
+          <a:prstGeom prst="homePlate">
+            <a:avLst/>
+          </a:prstGeom>
+          <a:solidFill>
+            <a:srgbClr val="4472C4"/>
+          </a:solidFill>
+          <a:ln w="12700">
+            <a:solidFill>
+              <a:srgbClr val="2F5597"/>
+            </a:solidFill>
+          </a:ln>
+          <a:effectLst/>
+        </p:spPr>
+        <p:style>
+          <a:lnRef idx="1">
+            <a:schemeClr val="accent1"/>
+          </a:lnRef>
+          <a:fillRef idx="3">
+            <a:schemeClr val="accent1"/>
+          </a:fillRef>
+          <a:effectRef idx="2">
+            <a:schemeClr val="accent1"/>
+          </a:effectRef>
+          <a:fontRef idx="minor">
+            <a:schemeClr val="lt1"/>
+          </a:fontRef>
+        </p:style>
+        <p:txBody>
+          <a:bodyPr rtlCol="0" anchor="ctr" wrap="square" lIns="18000" rIns="18000" tIns="9000" bIns="9000"/>
+          <a:lstStyle/>
+          <a:p>
+            <a:pPr algn="ctr"/>
+          </a:p>
+        </p:txBody>
+      </p:sp>
+      <p:cxnSp>
+        <p:nvCxnSpPr>
+          <p:cNvPr id="119" name="Connector 118"/>
+          <p:cNvCxnSpPr/>
+          <p:nvPr/>
+        </p:nvCxnSpPr>
+        <p:spPr>
+          <a:xfrm>
+            <a:off x="10886167" y="4892040"/>
+            <a:ext cx="0" cy="621792"/>
+          </a:xfrm>
+          <a:prstGeom prst="line">
+            <a:avLst/>
+          </a:prstGeom>
+          <a:ln w="19050">
+            <a:solidFill>
+              <a:srgbClr val="7F0000"/>
+            </a:solidFill>
+          </a:ln>
+        </p:spPr>
+        <p:style>
+          <a:lnRef idx="2">
+            <a:schemeClr val="accent1"/>
+          </a:lnRef>
+          <a:fillRef idx="0">
+            <a:schemeClr val="accent1"/>
+          </a:fillRef>
+          <a:effectRef idx="1">
+            <a:schemeClr val="accent1"/>
+          </a:effectRef>
+          <a:fontRef idx="minor">
+            <a:schemeClr val="tx1"/>
+          </a:fontRef>
+        </p:style>
+      </p:cxnSp>
+      <p:sp>
+        <p:nvSpPr>
+          <p:cNvPr id="120" name="Pentagon 119"/>
+          <p:cNvSpPr/>
+          <p:nvPr/>
+        </p:nvSpPr>
+        <p:spPr>
+          <a:xfrm rot="10800000">
+            <a:off x="10739863" y="4892040"/>
+            <a:ext cx="146304" cy="137160"/>
+          </a:xfrm>
+          <a:prstGeom prst="homePlate">
+            <a:avLst/>
+          </a:prstGeom>
+          <a:solidFill>
+            <a:srgbClr val="C00000"/>
+          </a:solidFill>
+          <a:ln w="12700">
+            <a:solidFill>
+              <a:srgbClr val="7F0000"/>
+            </a:solidFill>
+          </a:ln>
+          <a:effectLst/>
+        </p:spPr>
+        <p:style>
+          <a:lnRef idx="1">
+            <a:schemeClr val="accent1"/>
+          </a:lnRef>
+          <a:fillRef idx="3">
+            <a:schemeClr val="accent1"/>
+          </a:fillRef>
+          <a:effectRef idx="2">
+            <a:schemeClr val="accent1"/>
+          </a:effectRef>
+          <a:fontRef idx="minor">
+            <a:schemeClr val="lt1"/>
+          </a:fontRef>
+        </p:style>
+        <p:txBody>
+          <a:bodyPr rtlCol="0" anchor="ctr" wrap="square" lIns="18000" rIns="18000" tIns="9000" bIns="9000"/>
+          <a:lstStyle/>
+          <a:p>
+            <a:pPr algn="ctr"/>
+          </a:p>
+        </p:txBody>
+      </p:sp>
+      <p:cxnSp>
+        <p:nvCxnSpPr>
+          <p:cNvPr id="121" name="Connector 120"/>
+          <p:cNvCxnSpPr/>
+          <p:nvPr/>
+        </p:nvCxnSpPr>
+        <p:spPr>
+          <a:xfrm>
+            <a:off x="6040036" y="5513832"/>
+            <a:ext cx="0" cy="310896"/>
+          </a:xfrm>
+          <a:prstGeom prst="line">
+            <a:avLst/>
+          </a:prstGeom>
+          <a:ln w="19050">
+            <a:solidFill>
+              <a:srgbClr val="2F5597"/>
+            </a:solidFill>
+          </a:ln>
+        </p:spPr>
+        <p:style>
+          <a:lnRef idx="2">
+            <a:schemeClr val="accent1"/>
+          </a:lnRef>
+          <a:fillRef idx="0">
+            <a:schemeClr val="accent1"/>
+          </a:fillRef>
+          <a:effectRef idx="1">
+            <a:schemeClr val="accent1"/>
+          </a:effectRef>
+          <a:fontRef idx="minor">
+            <a:schemeClr val="tx1"/>
+          </a:fontRef>
+        </p:style>
+      </p:cxnSp>
+      <p:sp>
+        <p:nvSpPr>
+          <p:cNvPr id="122" name="Pentagon 121"/>
+          <p:cNvSpPr/>
+          <p:nvPr/>
+        </p:nvSpPr>
+        <p:spPr>
+          <a:xfrm>
+            <a:off x="6040036" y="5513832"/>
+            <a:ext cx="146304" cy="137160"/>
+          </a:xfrm>
+          <a:prstGeom prst="homePlate">
+            <a:avLst/>
+          </a:prstGeom>
+          <a:solidFill>
+            <a:srgbClr val="4472C4"/>
+          </a:solidFill>
+          <a:ln w="12700">
+            <a:solidFill>
+              <a:srgbClr val="2F5597"/>
+            </a:solidFill>
+          </a:ln>
+          <a:effectLst/>
+        </p:spPr>
+        <p:style>
+          <a:lnRef idx="1">
+            <a:schemeClr val="accent1"/>
+          </a:lnRef>
+          <a:fillRef idx="3">
+            <a:schemeClr val="accent1"/>
+          </a:fillRef>
+          <a:effectRef idx="2">
+            <a:schemeClr val="accent1"/>
+          </a:effectRef>
+          <a:fontRef idx="minor">
+            <a:schemeClr val="lt1"/>
+          </a:fontRef>
+        </p:style>
+        <p:txBody>
+          <a:bodyPr rtlCol="0" anchor="ctr" wrap="square" lIns="18000" rIns="18000" tIns="9000" bIns="9000"/>
+          <a:lstStyle/>
+          <a:p>
+            <a:pPr algn="ctr"/>
+          </a:p>
+        </p:txBody>
+      </p:sp>
+      <p:cxnSp>
+        <p:nvCxnSpPr>
+          <p:cNvPr id="123" name="Connector 122"/>
+          <p:cNvCxnSpPr/>
+          <p:nvPr/>
+        </p:nvCxnSpPr>
+        <p:spPr>
+          <a:xfrm>
+            <a:off x="10886167" y="5513832"/>
+            <a:ext cx="0" cy="310896"/>
+          </a:xfrm>
+          <a:prstGeom prst="line">
+            <a:avLst/>
+          </a:prstGeom>
+          <a:ln w="19050">
+            <a:solidFill>
+              <a:srgbClr val="7F0000"/>
+            </a:solidFill>
+          </a:ln>
+        </p:spPr>
+        <p:style>
+          <a:lnRef idx="2">
+            <a:schemeClr val="accent1"/>
+          </a:lnRef>
+          <a:fillRef idx="0">
+            <a:schemeClr val="accent1"/>
+          </a:fillRef>
+          <a:effectRef idx="1">
+            <a:schemeClr val="accent1"/>
+          </a:effectRef>
+          <a:fontRef idx="minor">
+            <a:schemeClr val="tx1"/>
+          </a:fontRef>
+        </p:style>
+      </p:cxnSp>
+      <p:sp>
+        <p:nvSpPr>
+          <p:cNvPr id="124" name="Pentagon 123"/>
+          <p:cNvSpPr/>
+          <p:nvPr/>
+        </p:nvSpPr>
+        <p:spPr>
+          <a:xfrm rot="10800000">
+            <a:off x="10739863" y="5513832"/>
+            <a:ext cx="146304" cy="137160"/>
+          </a:xfrm>
+          <a:prstGeom prst="homePlate">
+            <a:avLst/>
+          </a:prstGeom>
+          <a:solidFill>
+            <a:srgbClr val="C00000"/>
+          </a:solidFill>
+          <a:ln w="12700">
+            <a:solidFill>
+              <a:srgbClr val="7F0000"/>
+            </a:solidFill>
+          </a:ln>
+          <a:effectLst/>
+        </p:spPr>
+        <p:style>
+          <a:lnRef idx="1">
+            <a:schemeClr val="accent1"/>
+          </a:lnRef>
+          <a:fillRef idx="3">
+            <a:schemeClr val="accent1"/>
+          </a:fillRef>
+          <a:effectRef idx="2">
+            <a:schemeClr val="accent1"/>
+          </a:effectRef>
+          <a:fontRef idx="minor">
+            <a:schemeClr val="lt1"/>
+          </a:fontRef>
+        </p:style>
+        <p:txBody>
+          <a:bodyPr rtlCol="0" anchor="ctr" wrap="square" lIns="18000" rIns="18000" tIns="9000" bIns="9000"/>
+          <a:lstStyle/>
+          <a:p>
+            <a:pPr algn="ctr"/>
+          </a:p>
+        </p:txBody>
+      </p:sp>
+      <p:cxnSp>
+        <p:nvCxnSpPr>
+          <p:cNvPr id="125" name="Connector 124"/>
+          <p:cNvCxnSpPr/>
+          <p:nvPr/>
+        </p:nvCxnSpPr>
+        <p:spPr>
+          <a:xfrm>
             <a:off x="5770806" y="1161288"/>
             <a:ext cx="0" cy="4663440"/>
           </a:xfrm>
@@ -7904,9 +8714,187 @@
           </a:fontRef>
         </p:style>
       </p:cxnSp>
-      <p:sp>
-        <p:nvSpPr>
-          <p:cNvPr id="106" name="Diamond 105"/>
+      <p:cxnSp>
+        <p:nvCxnSpPr>
+          <p:cNvPr id="126" name="Connector 125"/>
+          <p:cNvCxnSpPr/>
+          <p:nvPr/>
+        </p:nvCxnSpPr>
+        <p:spPr>
+          <a:xfrm>
+            <a:off x="3886200" y="685800"/>
+            <a:ext cx="0" cy="5138928"/>
+          </a:xfrm>
+          <a:prstGeom prst="line">
+            <a:avLst/>
+          </a:prstGeom>
+          <a:ln w="19050">
+            <a:solidFill>
+              <a:srgbClr val="2F5597"/>
+            </a:solidFill>
+          </a:ln>
+        </p:spPr>
+        <p:style>
+          <a:lnRef idx="2">
+            <a:schemeClr val="accent1"/>
+          </a:lnRef>
+          <a:fillRef idx="0">
+            <a:schemeClr val="accent1"/>
+          </a:fillRef>
+          <a:effectRef idx="1">
+            <a:schemeClr val="accent1"/>
+          </a:effectRef>
+          <a:fontRef idx="minor">
+            <a:schemeClr val="tx1"/>
+          </a:fontRef>
+        </p:style>
+      </p:cxnSp>
+      <p:sp>
+        <p:nvSpPr>
+          <p:cNvPr id="127" name="Rectangle 126"/>
+          <p:cNvSpPr/>
+          <p:nvPr/>
+        </p:nvSpPr>
+        <p:spPr>
+          <a:xfrm>
+            <a:off x="3886200" y="685800"/>
+            <a:ext cx="566928" cy="256032"/>
+          </a:xfrm>
+          <a:prstGeom prst="rect">
+            <a:avLst/>
+          </a:prstGeom>
+          <a:solidFill>
+            <a:srgbClr val="4472C4"/>
+          </a:solidFill>
+          <a:ln w="9525">
+            <a:solidFill>
+              <a:srgbClr val="2F5597"/>
+            </a:solidFill>
+          </a:ln>
+          <a:effectLst/>
+        </p:spPr>
+        <p:style>
+          <a:lnRef idx="1">
+            <a:schemeClr val="accent1"/>
+          </a:lnRef>
+          <a:fillRef idx="3">
+            <a:schemeClr val="accent1"/>
+          </a:fillRef>
+          <a:effectRef idx="2">
+            <a:schemeClr val="accent1"/>
+          </a:effectRef>
+          <a:fontRef idx="minor">
+            <a:schemeClr val="lt1"/>
+          </a:fontRef>
+        </p:style>
+        <p:txBody>
+          <a:bodyPr rtlCol="0" anchor="ctr" wrap="square" lIns="18000" rIns="18000" tIns="9000" bIns="9000"/>
+          <a:lstStyle/>
+          <a:p>
+            <a:pPr algn="l"/>
+            <a:r>
+              <a:rPr sz="800" b="1">
+                <a:solidFill>
+                  <a:srgbClr val="FFFFFF"/>
+                </a:solidFill>
+              </a:rPr>
+              <a:t>⚑ Старт</a:t>
+            </a:r>
+          </a:p>
+        </p:txBody>
+      </p:sp>
+      <p:cxnSp>
+        <p:nvCxnSpPr>
+          <p:cNvPr id="128" name="Connector 127"/>
+          <p:cNvCxnSpPr/>
+          <p:nvPr/>
+        </p:nvCxnSpPr>
+        <p:spPr>
+          <a:xfrm>
+            <a:off x="11963085" y="685800"/>
+            <a:ext cx="0" cy="5138928"/>
+          </a:xfrm>
+          <a:prstGeom prst="line">
+            <a:avLst/>
+          </a:prstGeom>
+          <a:ln w="19050">
+            <a:solidFill>
+              <a:srgbClr val="7F0000"/>
+            </a:solidFill>
+          </a:ln>
+        </p:spPr>
+        <p:style>
+          <a:lnRef idx="2">
+            <a:schemeClr val="accent1"/>
+          </a:lnRef>
+          <a:fillRef idx="0">
+            <a:schemeClr val="accent1"/>
+          </a:fillRef>
+          <a:effectRef idx="1">
+            <a:schemeClr val="accent1"/>
+          </a:effectRef>
+          <a:fontRef idx="minor">
+            <a:schemeClr val="tx1"/>
+          </a:fontRef>
+        </p:style>
+      </p:cxnSp>
+      <p:sp>
+        <p:nvSpPr>
+          <p:cNvPr id="129" name="Rectangle 128"/>
+          <p:cNvSpPr/>
+          <p:nvPr/>
+        </p:nvSpPr>
+        <p:spPr>
+          <a:xfrm>
+            <a:off x="11396157" y="685800"/>
+            <a:ext cx="566928" cy="256032"/>
+          </a:xfrm>
+          <a:prstGeom prst="rect">
+            <a:avLst/>
+          </a:prstGeom>
+          <a:solidFill>
+            <a:srgbClr val="C00000"/>
+          </a:solidFill>
+          <a:ln w="9525">
+            <a:solidFill>
+              <a:srgbClr val="7F0000"/>
+            </a:solidFill>
+          </a:ln>
+          <a:effectLst/>
+        </p:spPr>
+        <p:style>
+          <a:lnRef idx="1">
+            <a:schemeClr val="accent1"/>
+          </a:lnRef>
+          <a:fillRef idx="3">
+            <a:schemeClr val="accent1"/>
+          </a:fillRef>
+          <a:effectRef idx="2">
+            <a:schemeClr val="accent1"/>
+          </a:effectRef>
+          <a:fontRef idx="minor">
+            <a:schemeClr val="lt1"/>
+          </a:fontRef>
+        </p:style>
+        <p:txBody>
+          <a:bodyPr rtlCol="0" anchor="ctr" wrap="square" lIns="18000" rIns="18000" tIns="9000" bIns="9000"/>
+          <a:lstStyle/>
+          <a:p>
+            <a:pPr algn="r"/>
+            <a:r>
+              <a:rPr sz="800" b="1">
+                <a:solidFill>
+                  <a:srgbClr val="FFFFFF"/>
+                </a:solidFill>
+              </a:rPr>
+              <a:t>Финиш ⚑</a:t>
+            </a:r>
+          </a:p>
+        </p:txBody>
+      </p:sp>
+      <p:sp>
+        <p:nvSpPr>
+          <p:cNvPr id="130" name="Diamond 129"/>
           <p:cNvSpPr/>
           <p:nvPr/>
         </p:nvSpPr>
@@ -7952,14 +8940,14 @@
       </p:sp>
       <p:sp>
         <p:nvSpPr>
-          <p:cNvPr id="107" name="Rectangle 106"/>
-          <p:cNvSpPr/>
-          <p:nvPr/>
-        </p:nvSpPr>
-        <p:spPr>
-          <a:xfrm>
-            <a:off x="384048" y="5934456"/>
-            <a:ext cx="1005840" cy="201168"/>
+          <p:cNvPr id="131" name="Rectangle 130"/>
+          <p:cNvSpPr/>
+          <p:nvPr/>
+        </p:nvSpPr>
+        <p:spPr>
+          <a:xfrm>
+            <a:off x="374904" y="5934456"/>
+            <a:ext cx="868680" cy="201168"/>
           </a:xfrm>
           <a:prstGeom prst="rect">
             <a:avLst/>
@@ -8002,13 +8990,13 @@
       </p:sp>
       <p:sp>
         <p:nvSpPr>
-          <p:cNvPr id="108" name="Diamond 107"/>
-          <p:cNvSpPr/>
-          <p:nvPr/>
-        </p:nvSpPr>
-        <p:spPr>
-          <a:xfrm>
-            <a:off x="1490472" y="5975604"/>
+          <p:cNvPr id="132" name="Diamond 131"/>
+          <p:cNvSpPr/>
+          <p:nvPr/>
+        </p:nvSpPr>
+        <p:spPr>
+          <a:xfrm>
+            <a:off x="1280160" y="5975604"/>
             <a:ext cx="118872" cy="118872"/>
           </a:xfrm>
           <a:prstGeom prst="diamond">
@@ -8048,14 +9036,14 @@
       </p:sp>
       <p:sp>
         <p:nvSpPr>
-          <p:cNvPr id="109" name="Rectangle 108"/>
-          <p:cNvSpPr/>
-          <p:nvPr/>
-        </p:nvSpPr>
-        <p:spPr>
-          <a:xfrm>
-            <a:off x="1645920" y="5934456"/>
-            <a:ext cx="1005840" cy="201168"/>
+          <p:cNvPr id="133" name="Rectangle 132"/>
+          <p:cNvSpPr/>
+          <p:nvPr/>
+        </p:nvSpPr>
+        <p:spPr>
+          <a:xfrm>
+            <a:off x="1426464" y="5934456"/>
+            <a:ext cx="868680" cy="201168"/>
           </a:xfrm>
           <a:prstGeom prst="rect">
             <a:avLst/>
@@ -8098,14 +9086,14 @@
       </p:sp>
       <p:sp>
         <p:nvSpPr>
-          <p:cNvPr id="110" name="Rounded Rectangle 109"/>
-          <p:cNvSpPr/>
-          <p:nvPr/>
-        </p:nvSpPr>
-        <p:spPr>
-          <a:xfrm>
-            <a:off x="2752344" y="5975604"/>
-            <a:ext cx="274320" cy="118872"/>
+          <p:cNvPr id="134" name="Rounded Rectangle 133"/>
+          <p:cNvSpPr/>
+          <p:nvPr/>
+        </p:nvSpPr>
+        <p:spPr>
+          <a:xfrm>
+            <a:off x="2331720" y="5975604"/>
+            <a:ext cx="219456" cy="118872"/>
           </a:xfrm>
           <a:prstGeom prst="roundRect">
             <a:avLst/>
@@ -8144,14 +9132,14 @@
       </p:sp>
       <p:sp>
         <p:nvSpPr>
-          <p:cNvPr id="111" name="Rectangle 110"/>
-          <p:cNvSpPr/>
-          <p:nvPr/>
-        </p:nvSpPr>
-        <p:spPr>
-          <a:xfrm>
-            <a:off x="3063240" y="5934456"/>
-            <a:ext cx="1005840" cy="201168"/>
+          <p:cNvPr id="135" name="Rectangle 134"/>
+          <p:cNvSpPr/>
+          <p:nvPr/>
+        </p:nvSpPr>
+        <p:spPr>
+          <a:xfrm>
+            <a:off x="2578608" y="5934456"/>
+            <a:ext cx="868680" cy="201168"/>
           </a:xfrm>
           <a:prstGeom prst="rect">
             <a:avLst/>
@@ -8194,14 +9182,14 @@
       </p:sp>
       <p:sp>
         <p:nvSpPr>
-          <p:cNvPr id="112" name="Rounded Rectangle 111"/>
-          <p:cNvSpPr/>
-          <p:nvPr/>
-        </p:nvSpPr>
-        <p:spPr>
-          <a:xfrm>
-            <a:off x="4169664" y="5975604"/>
-            <a:ext cx="274320" cy="118872"/>
+          <p:cNvPr id="136" name="Rounded Rectangle 135"/>
+          <p:cNvSpPr/>
+          <p:nvPr/>
+        </p:nvSpPr>
+        <p:spPr>
+          <a:xfrm>
+            <a:off x="3483864" y="5975604"/>
+            <a:ext cx="219456" cy="118872"/>
           </a:xfrm>
           <a:prstGeom prst="roundRect">
             <a:avLst/>
@@ -8240,14 +9228,14 @@
       </p:sp>
       <p:sp>
         <p:nvSpPr>
-          <p:cNvPr id="113" name="Rectangle 112"/>
-          <p:cNvSpPr/>
-          <p:nvPr/>
-        </p:nvSpPr>
-        <p:spPr>
-          <a:xfrm>
-            <a:off x="4480560" y="5934456"/>
-            <a:ext cx="1005840" cy="201168"/>
+          <p:cNvPr id="137" name="Rectangle 136"/>
+          <p:cNvSpPr/>
+          <p:nvPr/>
+        </p:nvSpPr>
+        <p:spPr>
+          <a:xfrm>
+            <a:off x="3730752" y="5934456"/>
+            <a:ext cx="868680" cy="201168"/>
           </a:xfrm>
           <a:prstGeom prst="rect">
             <a:avLst/>
@@ -8290,14 +9278,110 @@
       </p:sp>
       <p:sp>
         <p:nvSpPr>
-          <p:cNvPr id="114" name="Rounded Rectangle 113"/>
-          <p:cNvSpPr/>
-          <p:nvPr/>
-        </p:nvSpPr>
-        <p:spPr>
-          <a:xfrm>
-            <a:off x="5586984" y="5975604"/>
-            <a:ext cx="274320" cy="118872"/>
+          <p:cNvPr id="138" name="Rounded Rectangle 137"/>
+          <p:cNvSpPr/>
+          <p:nvPr/>
+        </p:nvSpPr>
+        <p:spPr>
+          <a:xfrm>
+            <a:off x="4636008" y="5975604"/>
+            <a:ext cx="219456" cy="118872"/>
+          </a:xfrm>
+          <a:prstGeom prst="roundRect">
+            <a:avLst/>
+          </a:prstGeom>
+          <a:solidFill>
+            <a:srgbClr val="E2D1F0"/>
+          </a:solidFill>
+          <a:ln w="12700">
+            <a:solidFill>
+              <a:srgbClr val="9B7FC7"/>
+            </a:solidFill>
+          </a:ln>
+          <a:effectLst/>
+        </p:spPr>
+        <p:style>
+          <a:lnRef idx="1">
+            <a:schemeClr val="accent1"/>
+          </a:lnRef>
+          <a:fillRef idx="3">
+            <a:schemeClr val="accent1"/>
+          </a:fillRef>
+          <a:effectRef idx="2">
+            <a:schemeClr val="accent1"/>
+          </a:effectRef>
+          <a:fontRef idx="minor">
+            <a:schemeClr val="lt1"/>
+          </a:fontRef>
+        </p:style>
+        <p:txBody>
+          <a:bodyPr rtlCol="0" anchor="ctr" wrap="square" lIns="18000" rIns="18000" tIns="9000" bIns="9000"/>
+          <a:lstStyle/>
+          <a:p>
+            <a:pPr algn="ctr"/>
+          </a:p>
+        </p:txBody>
+      </p:sp>
+      <p:sp>
+        <p:nvSpPr>
+          <p:cNvPr id="139" name="Rectangle 138"/>
+          <p:cNvSpPr/>
+          <p:nvPr/>
+        </p:nvSpPr>
+        <p:spPr>
+          <a:xfrm>
+            <a:off x="4882896" y="5934456"/>
+            <a:ext cx="868680" cy="201168"/>
+          </a:xfrm>
+          <a:prstGeom prst="rect">
+            <a:avLst/>
+          </a:prstGeom>
+          <a:noFill/>
+          <a:ln>
+            <a:noFill/>
+          </a:ln>
+          <a:effectLst/>
+        </p:spPr>
+        <p:style>
+          <a:lnRef idx="1">
+            <a:schemeClr val="accent1"/>
+          </a:lnRef>
+          <a:fillRef idx="3">
+            <a:schemeClr val="accent1"/>
+          </a:fillRef>
+          <a:effectRef idx="2">
+            <a:schemeClr val="accent1"/>
+          </a:effectRef>
+          <a:fontRef idx="minor">
+            <a:schemeClr val="lt1"/>
+          </a:fontRef>
+        </p:style>
+        <p:txBody>
+          <a:bodyPr rtlCol="0" anchor="ctr" wrap="square" lIns="18000" rIns="18000" tIns="9000" bIns="9000"/>
+          <a:lstStyle/>
+          <a:p>
+            <a:pPr algn="l"/>
+            <a:r>
+              <a:rPr sz="800" b="0">
+                <a:solidFill>
+                  <a:srgbClr val="333333"/>
+                </a:solidFill>
+              </a:rPr>
+              <a:t>тестирование</a:t>
+            </a:r>
+          </a:p>
+        </p:txBody>
+      </p:sp>
+      <p:sp>
+        <p:nvSpPr>
+          <p:cNvPr id="140" name="Rounded Rectangle 139"/>
+          <p:cNvSpPr/>
+          <p:nvPr/>
+        </p:nvSpPr>
+        <p:spPr>
+          <a:xfrm>
+            <a:off x="5788152" y="5975604"/>
+            <a:ext cx="219456" cy="118872"/>
           </a:xfrm>
           <a:prstGeom prst="roundRect">
             <a:avLst/>
@@ -8336,14 +9420,14 @@
       </p:sp>
       <p:sp>
         <p:nvSpPr>
-          <p:cNvPr id="115" name="Rectangle 114"/>
-          <p:cNvSpPr/>
-          <p:nvPr/>
-        </p:nvSpPr>
-        <p:spPr>
-          <a:xfrm>
-            <a:off x="5897880" y="5934456"/>
-            <a:ext cx="1005840" cy="201168"/>
+          <p:cNvPr id="141" name="Rectangle 140"/>
+          <p:cNvSpPr/>
+          <p:nvPr/>
+        </p:nvSpPr>
+        <p:spPr>
+          <a:xfrm>
+            <a:off x="6035040" y="5934456"/>
+            <a:ext cx="868680" cy="201168"/>
           </a:xfrm>
           <a:prstGeom prst="rect">
             <a:avLst/>
@@ -8386,14 +9470,14 @@
       </p:sp>
       <p:sp>
         <p:nvSpPr>
-          <p:cNvPr id="116" name="Rounded Rectangle 115"/>
-          <p:cNvSpPr/>
-          <p:nvPr/>
-        </p:nvSpPr>
-        <p:spPr>
-          <a:xfrm>
-            <a:off x="7004304" y="5975604"/>
-            <a:ext cx="274320" cy="118872"/>
+          <p:cNvPr id="142" name="Rounded Rectangle 141"/>
+          <p:cNvSpPr/>
+          <p:nvPr/>
+        </p:nvSpPr>
+        <p:spPr>
+          <a:xfrm>
+            <a:off x="6940296" y="5975604"/>
+            <a:ext cx="219456" cy="118872"/>
           </a:xfrm>
           <a:prstGeom prst="roundRect">
             <a:avLst/>
@@ -8432,14 +9516,14 @@
       </p:sp>
       <p:sp>
         <p:nvSpPr>
-          <p:cNvPr id="117" name="Rectangle 116"/>
-          <p:cNvSpPr/>
-          <p:nvPr/>
-        </p:nvSpPr>
-        <p:spPr>
-          <a:xfrm>
-            <a:off x="7315200" y="5934456"/>
-            <a:ext cx="1005840" cy="201168"/>
+          <p:cNvPr id="143" name="Rectangle 142"/>
+          <p:cNvSpPr/>
+          <p:nvPr/>
+        </p:nvSpPr>
+        <p:spPr>
+          <a:xfrm>
+            <a:off x="7187184" y="5934456"/>
+            <a:ext cx="868680" cy="201168"/>
           </a:xfrm>
           <a:prstGeom prst="rect">
             <a:avLst/>
@@ -8476,6 +9560,198 @@
                 </a:solidFill>
               </a:rPr>
               <a:t>отпуск</a:t>
+            </a:r>
+          </a:p>
+        </p:txBody>
+      </p:sp>
+      <p:sp>
+        <p:nvSpPr>
+          <p:cNvPr id="144" name="Pentagon 143"/>
+          <p:cNvSpPr/>
+          <p:nvPr/>
+        </p:nvSpPr>
+        <p:spPr>
+          <a:xfrm>
+            <a:off x="8092440" y="5975604"/>
+            <a:ext cx="219456" cy="118872"/>
+          </a:xfrm>
+          <a:prstGeom prst="homePlate">
+            <a:avLst/>
+          </a:prstGeom>
+          <a:solidFill>
+            <a:srgbClr val="4472C4"/>
+          </a:solidFill>
+          <a:ln w="12700">
+            <a:solidFill>
+              <a:srgbClr val="2F5597"/>
+            </a:solidFill>
+          </a:ln>
+          <a:effectLst/>
+        </p:spPr>
+        <p:style>
+          <a:lnRef idx="1">
+            <a:schemeClr val="accent1"/>
+          </a:lnRef>
+          <a:fillRef idx="3">
+            <a:schemeClr val="accent1"/>
+          </a:fillRef>
+          <a:effectRef idx="2">
+            <a:schemeClr val="accent1"/>
+          </a:effectRef>
+          <a:fontRef idx="minor">
+            <a:schemeClr val="lt1"/>
+          </a:fontRef>
+        </p:style>
+        <p:txBody>
+          <a:bodyPr rtlCol="0" anchor="ctr" wrap="square" lIns="18000" rIns="18000" tIns="9000" bIns="9000"/>
+          <a:lstStyle/>
+          <a:p>
+            <a:pPr algn="ctr"/>
+          </a:p>
+        </p:txBody>
+      </p:sp>
+      <p:sp>
+        <p:nvSpPr>
+          <p:cNvPr id="145" name="Rectangle 144"/>
+          <p:cNvSpPr/>
+          <p:nvPr/>
+        </p:nvSpPr>
+        <p:spPr>
+          <a:xfrm>
+            <a:off x="8339328" y="5934456"/>
+            <a:ext cx="868680" cy="201168"/>
+          </a:xfrm>
+          <a:prstGeom prst="rect">
+            <a:avLst/>
+          </a:prstGeom>
+          <a:noFill/>
+          <a:ln>
+            <a:noFill/>
+          </a:ln>
+          <a:effectLst/>
+        </p:spPr>
+        <p:style>
+          <a:lnRef idx="1">
+            <a:schemeClr val="accent1"/>
+          </a:lnRef>
+          <a:fillRef idx="3">
+            <a:schemeClr val="accent1"/>
+          </a:fillRef>
+          <a:effectRef idx="2">
+            <a:schemeClr val="accent1"/>
+          </a:effectRef>
+          <a:fontRef idx="minor">
+            <a:schemeClr val="lt1"/>
+          </a:fontRef>
+        </p:style>
+        <p:txBody>
+          <a:bodyPr rtlCol="0" anchor="ctr" wrap="square" lIns="18000" rIns="18000" tIns="9000" bIns="9000"/>
+          <a:lstStyle/>
+          <a:p>
+            <a:pPr algn="l"/>
+            <a:r>
+              <a:rPr sz="800" b="0">
+                <a:solidFill>
+                  <a:srgbClr val="333333"/>
+                </a:solidFill>
+              </a:rPr>
+              <a:t>старт</a:t>
+            </a:r>
+          </a:p>
+        </p:txBody>
+      </p:sp>
+      <p:sp>
+        <p:nvSpPr>
+          <p:cNvPr id="146" name="Pentagon 145"/>
+          <p:cNvSpPr/>
+          <p:nvPr/>
+        </p:nvSpPr>
+        <p:spPr>
+          <a:xfrm>
+            <a:off x="9244584" y="5975604"/>
+            <a:ext cx="219456" cy="118872"/>
+          </a:xfrm>
+          <a:prstGeom prst="homePlate">
+            <a:avLst/>
+          </a:prstGeom>
+          <a:solidFill>
+            <a:srgbClr val="C00000"/>
+          </a:solidFill>
+          <a:ln w="12700">
+            <a:solidFill>
+              <a:srgbClr val="7F0000"/>
+            </a:solidFill>
+          </a:ln>
+          <a:effectLst/>
+        </p:spPr>
+        <p:style>
+          <a:lnRef idx="1">
+            <a:schemeClr val="accent1"/>
+          </a:lnRef>
+          <a:fillRef idx="3">
+            <a:schemeClr val="accent1"/>
+          </a:fillRef>
+          <a:effectRef idx="2">
+            <a:schemeClr val="accent1"/>
+          </a:effectRef>
+          <a:fontRef idx="minor">
+            <a:schemeClr val="lt1"/>
+          </a:fontRef>
+        </p:style>
+        <p:txBody>
+          <a:bodyPr rtlCol="0" anchor="ctr" wrap="square" lIns="18000" rIns="18000" tIns="9000" bIns="9000"/>
+          <a:lstStyle/>
+          <a:p>
+            <a:pPr algn="ctr"/>
+          </a:p>
+        </p:txBody>
+      </p:sp>
+      <p:sp>
+        <p:nvSpPr>
+          <p:cNvPr id="147" name="Rectangle 146"/>
+          <p:cNvSpPr/>
+          <p:nvPr/>
+        </p:nvSpPr>
+        <p:spPr>
+          <a:xfrm>
+            <a:off x="9491472" y="5934456"/>
+            <a:ext cx="868680" cy="201168"/>
+          </a:xfrm>
+          <a:prstGeom prst="rect">
+            <a:avLst/>
+          </a:prstGeom>
+          <a:noFill/>
+          <a:ln>
+            <a:noFill/>
+          </a:ln>
+          <a:effectLst/>
+        </p:spPr>
+        <p:style>
+          <a:lnRef idx="1">
+            <a:schemeClr val="accent1"/>
+          </a:lnRef>
+          <a:fillRef idx="3">
+            <a:schemeClr val="accent1"/>
+          </a:fillRef>
+          <a:effectRef idx="2">
+            <a:schemeClr val="accent1"/>
+          </a:effectRef>
+          <a:fontRef idx="minor">
+            <a:schemeClr val="lt1"/>
+          </a:fontRef>
+        </p:style>
+        <p:txBody>
+          <a:bodyPr rtlCol="0" anchor="ctr" wrap="square" lIns="18000" rIns="18000" tIns="9000" bIns="9000"/>
+          <a:lstStyle/>
+          <a:p>
+            <a:pPr algn="l"/>
+            <a:r>
+              <a:rPr sz="800" b="0">
+                <a:solidFill>
+                  <a:srgbClr val="333333"/>
+                </a:solidFill>
+              </a:rPr>
+              <a:t>финиш</a:t>
             </a:r>
           </a:p>
         </p:txBody>
@@ -12775,6 +14051,492 @@
         </p:nvCxnSpPr>
         <p:spPr>
           <a:xfrm>
+            <a:off x="6040036" y="1161288"/>
+            <a:ext cx="0" cy="2487168"/>
+          </a:xfrm>
+          <a:prstGeom prst="line">
+            <a:avLst/>
+          </a:prstGeom>
+          <a:ln w="19050">
+            <a:solidFill>
+              <a:srgbClr val="2F5597"/>
+            </a:solidFill>
+          </a:ln>
+        </p:spPr>
+        <p:style>
+          <a:lnRef idx="2">
+            <a:schemeClr val="accent1"/>
+          </a:lnRef>
+          <a:fillRef idx="0">
+            <a:schemeClr val="accent1"/>
+          </a:fillRef>
+          <a:effectRef idx="1">
+            <a:schemeClr val="accent1"/>
+          </a:effectRef>
+          <a:fontRef idx="minor">
+            <a:schemeClr val="tx1"/>
+          </a:fontRef>
+        </p:style>
+      </p:cxnSp>
+      <p:sp>
+        <p:nvSpPr>
+          <p:cNvPr id="95" name="Pentagon 94"/>
+          <p:cNvSpPr/>
+          <p:nvPr/>
+        </p:nvSpPr>
+        <p:spPr>
+          <a:xfrm>
+            <a:off x="6040036" y="1161288"/>
+            <a:ext cx="146304" cy="137160"/>
+          </a:xfrm>
+          <a:prstGeom prst="homePlate">
+            <a:avLst/>
+          </a:prstGeom>
+          <a:solidFill>
+            <a:srgbClr val="4472C4"/>
+          </a:solidFill>
+          <a:ln w="12700">
+            <a:solidFill>
+              <a:srgbClr val="2F5597"/>
+            </a:solidFill>
+          </a:ln>
+          <a:effectLst/>
+        </p:spPr>
+        <p:style>
+          <a:lnRef idx="1">
+            <a:schemeClr val="accent1"/>
+          </a:lnRef>
+          <a:fillRef idx="3">
+            <a:schemeClr val="accent1"/>
+          </a:fillRef>
+          <a:effectRef idx="2">
+            <a:schemeClr val="accent1"/>
+          </a:effectRef>
+          <a:fontRef idx="minor">
+            <a:schemeClr val="lt1"/>
+          </a:fontRef>
+        </p:style>
+        <p:txBody>
+          <a:bodyPr rtlCol="0" anchor="ctr" wrap="square" lIns="18000" rIns="18000" tIns="9000" bIns="9000"/>
+          <a:lstStyle/>
+          <a:p>
+            <a:pPr algn="ctr"/>
+          </a:p>
+        </p:txBody>
+      </p:sp>
+      <p:cxnSp>
+        <p:nvCxnSpPr>
+          <p:cNvPr id="96" name="Connector 95"/>
+          <p:cNvCxnSpPr/>
+          <p:nvPr/>
+        </p:nvCxnSpPr>
+        <p:spPr>
+          <a:xfrm>
+            <a:off x="10886167" y="1161288"/>
+            <a:ext cx="0" cy="2487168"/>
+          </a:xfrm>
+          <a:prstGeom prst="line">
+            <a:avLst/>
+          </a:prstGeom>
+          <a:ln w="19050">
+            <a:solidFill>
+              <a:srgbClr val="7F0000"/>
+            </a:solidFill>
+          </a:ln>
+        </p:spPr>
+        <p:style>
+          <a:lnRef idx="2">
+            <a:schemeClr val="accent1"/>
+          </a:lnRef>
+          <a:fillRef idx="0">
+            <a:schemeClr val="accent1"/>
+          </a:fillRef>
+          <a:effectRef idx="1">
+            <a:schemeClr val="accent1"/>
+          </a:effectRef>
+          <a:fontRef idx="minor">
+            <a:schemeClr val="tx1"/>
+          </a:fontRef>
+        </p:style>
+      </p:cxnSp>
+      <p:sp>
+        <p:nvSpPr>
+          <p:cNvPr id="97" name="Pentagon 96"/>
+          <p:cNvSpPr/>
+          <p:nvPr/>
+        </p:nvSpPr>
+        <p:spPr>
+          <a:xfrm rot="10800000">
+            <a:off x="10739863" y="1161288"/>
+            <a:ext cx="146304" cy="137160"/>
+          </a:xfrm>
+          <a:prstGeom prst="homePlate">
+            <a:avLst/>
+          </a:prstGeom>
+          <a:solidFill>
+            <a:srgbClr val="C00000"/>
+          </a:solidFill>
+          <a:ln w="12700">
+            <a:solidFill>
+              <a:srgbClr val="7F0000"/>
+            </a:solidFill>
+          </a:ln>
+          <a:effectLst/>
+        </p:spPr>
+        <p:style>
+          <a:lnRef idx="1">
+            <a:schemeClr val="accent1"/>
+          </a:lnRef>
+          <a:fillRef idx="3">
+            <a:schemeClr val="accent1"/>
+          </a:fillRef>
+          <a:effectRef idx="2">
+            <a:schemeClr val="accent1"/>
+          </a:effectRef>
+          <a:fontRef idx="minor">
+            <a:schemeClr val="lt1"/>
+          </a:fontRef>
+        </p:style>
+        <p:txBody>
+          <a:bodyPr rtlCol="0" anchor="ctr" wrap="square" lIns="18000" rIns="18000" tIns="9000" bIns="9000"/>
+          <a:lstStyle/>
+          <a:p>
+            <a:pPr algn="ctr"/>
+          </a:p>
+        </p:txBody>
+      </p:sp>
+      <p:cxnSp>
+        <p:nvCxnSpPr>
+          <p:cNvPr id="98" name="Connector 97"/>
+          <p:cNvCxnSpPr/>
+          <p:nvPr/>
+        </p:nvCxnSpPr>
+        <p:spPr>
+          <a:xfrm>
+            <a:off x="3886200" y="3648456"/>
+            <a:ext cx="0" cy="1243584"/>
+          </a:xfrm>
+          <a:prstGeom prst="line">
+            <a:avLst/>
+          </a:prstGeom>
+          <a:ln w="19050">
+            <a:solidFill>
+              <a:srgbClr val="2F5597"/>
+            </a:solidFill>
+          </a:ln>
+        </p:spPr>
+        <p:style>
+          <a:lnRef idx="2">
+            <a:schemeClr val="accent1"/>
+          </a:lnRef>
+          <a:fillRef idx="0">
+            <a:schemeClr val="accent1"/>
+          </a:fillRef>
+          <a:effectRef idx="1">
+            <a:schemeClr val="accent1"/>
+          </a:effectRef>
+          <a:fontRef idx="minor">
+            <a:schemeClr val="tx1"/>
+          </a:fontRef>
+        </p:style>
+      </p:cxnSp>
+      <p:sp>
+        <p:nvSpPr>
+          <p:cNvPr id="99" name="Pentagon 98"/>
+          <p:cNvSpPr/>
+          <p:nvPr/>
+        </p:nvSpPr>
+        <p:spPr>
+          <a:xfrm>
+            <a:off x="3886200" y="3648456"/>
+            <a:ext cx="146304" cy="137160"/>
+          </a:xfrm>
+          <a:prstGeom prst="homePlate">
+            <a:avLst/>
+          </a:prstGeom>
+          <a:solidFill>
+            <a:srgbClr val="4472C4"/>
+          </a:solidFill>
+          <a:ln w="12700">
+            <a:solidFill>
+              <a:srgbClr val="2F5597"/>
+            </a:solidFill>
+          </a:ln>
+          <a:effectLst/>
+        </p:spPr>
+        <p:style>
+          <a:lnRef idx="1">
+            <a:schemeClr val="accent1"/>
+          </a:lnRef>
+          <a:fillRef idx="3">
+            <a:schemeClr val="accent1"/>
+          </a:fillRef>
+          <a:effectRef idx="2">
+            <a:schemeClr val="accent1"/>
+          </a:effectRef>
+          <a:fontRef idx="minor">
+            <a:schemeClr val="lt1"/>
+          </a:fontRef>
+        </p:style>
+        <p:txBody>
+          <a:bodyPr rtlCol="0" anchor="ctr" wrap="square" lIns="18000" rIns="18000" tIns="9000" bIns="9000"/>
+          <a:lstStyle/>
+          <a:p>
+            <a:pPr algn="ctr"/>
+          </a:p>
+        </p:txBody>
+      </p:sp>
+      <p:cxnSp>
+        <p:nvCxnSpPr>
+          <p:cNvPr id="100" name="Connector 99"/>
+          <p:cNvCxnSpPr/>
+          <p:nvPr/>
+        </p:nvCxnSpPr>
+        <p:spPr>
+          <a:xfrm>
+            <a:off x="8193872" y="3648456"/>
+            <a:ext cx="0" cy="1243584"/>
+          </a:xfrm>
+          <a:prstGeom prst="line">
+            <a:avLst/>
+          </a:prstGeom>
+          <a:ln w="19050">
+            <a:solidFill>
+              <a:srgbClr val="7F0000"/>
+            </a:solidFill>
+          </a:ln>
+        </p:spPr>
+        <p:style>
+          <a:lnRef idx="2">
+            <a:schemeClr val="accent1"/>
+          </a:lnRef>
+          <a:fillRef idx="0">
+            <a:schemeClr val="accent1"/>
+          </a:fillRef>
+          <a:effectRef idx="1">
+            <a:schemeClr val="accent1"/>
+          </a:effectRef>
+          <a:fontRef idx="minor">
+            <a:schemeClr val="tx1"/>
+          </a:fontRef>
+        </p:style>
+      </p:cxnSp>
+      <p:sp>
+        <p:nvSpPr>
+          <p:cNvPr id="101" name="Pentagon 100"/>
+          <p:cNvSpPr/>
+          <p:nvPr/>
+        </p:nvSpPr>
+        <p:spPr>
+          <a:xfrm rot="10800000">
+            <a:off x="8047568" y="3648456"/>
+            <a:ext cx="146304" cy="137160"/>
+          </a:xfrm>
+          <a:prstGeom prst="homePlate">
+            <a:avLst/>
+          </a:prstGeom>
+          <a:solidFill>
+            <a:srgbClr val="C00000"/>
+          </a:solidFill>
+          <a:ln w="12700">
+            <a:solidFill>
+              <a:srgbClr val="7F0000"/>
+            </a:solidFill>
+          </a:ln>
+          <a:effectLst/>
+        </p:spPr>
+        <p:style>
+          <a:lnRef idx="1">
+            <a:schemeClr val="accent1"/>
+          </a:lnRef>
+          <a:fillRef idx="3">
+            <a:schemeClr val="accent1"/>
+          </a:fillRef>
+          <a:effectRef idx="2">
+            <a:schemeClr val="accent1"/>
+          </a:effectRef>
+          <a:fontRef idx="minor">
+            <a:schemeClr val="lt1"/>
+          </a:fontRef>
+        </p:style>
+        <p:txBody>
+          <a:bodyPr rtlCol="0" anchor="ctr" wrap="square" lIns="18000" rIns="18000" tIns="9000" bIns="9000"/>
+          <a:lstStyle/>
+          <a:p>
+            <a:pPr algn="ctr"/>
+          </a:p>
+        </p:txBody>
+      </p:sp>
+      <p:cxnSp>
+        <p:nvCxnSpPr>
+          <p:cNvPr id="102" name="Connector 101"/>
+          <p:cNvCxnSpPr/>
+          <p:nvPr/>
+        </p:nvCxnSpPr>
+        <p:spPr>
+          <a:xfrm>
+            <a:off x="3886200" y="4892040"/>
+            <a:ext cx="0" cy="932688"/>
+          </a:xfrm>
+          <a:prstGeom prst="line">
+            <a:avLst/>
+          </a:prstGeom>
+          <a:ln w="19050">
+            <a:solidFill>
+              <a:srgbClr val="2F5597"/>
+            </a:solidFill>
+          </a:ln>
+        </p:spPr>
+        <p:style>
+          <a:lnRef idx="2">
+            <a:schemeClr val="accent1"/>
+          </a:lnRef>
+          <a:fillRef idx="0">
+            <a:schemeClr val="accent1"/>
+          </a:fillRef>
+          <a:effectRef idx="1">
+            <a:schemeClr val="accent1"/>
+          </a:effectRef>
+          <a:fontRef idx="minor">
+            <a:schemeClr val="tx1"/>
+          </a:fontRef>
+        </p:style>
+      </p:cxnSp>
+      <p:sp>
+        <p:nvSpPr>
+          <p:cNvPr id="103" name="Pentagon 102"/>
+          <p:cNvSpPr/>
+          <p:nvPr/>
+        </p:nvSpPr>
+        <p:spPr>
+          <a:xfrm>
+            <a:off x="3886200" y="4892040"/>
+            <a:ext cx="146304" cy="137160"/>
+          </a:xfrm>
+          <a:prstGeom prst="homePlate">
+            <a:avLst/>
+          </a:prstGeom>
+          <a:solidFill>
+            <a:srgbClr val="4472C4"/>
+          </a:solidFill>
+          <a:ln w="12700">
+            <a:solidFill>
+              <a:srgbClr val="2F5597"/>
+            </a:solidFill>
+          </a:ln>
+          <a:effectLst/>
+        </p:spPr>
+        <p:style>
+          <a:lnRef idx="1">
+            <a:schemeClr val="accent1"/>
+          </a:lnRef>
+          <a:fillRef idx="3">
+            <a:schemeClr val="accent1"/>
+          </a:fillRef>
+          <a:effectRef idx="2">
+            <a:schemeClr val="accent1"/>
+          </a:effectRef>
+          <a:fontRef idx="minor">
+            <a:schemeClr val="lt1"/>
+          </a:fontRef>
+        </p:style>
+        <p:txBody>
+          <a:bodyPr rtlCol="0" anchor="ctr" wrap="square" lIns="18000" rIns="18000" tIns="9000" bIns="9000"/>
+          <a:lstStyle/>
+          <a:p>
+            <a:pPr algn="ctr"/>
+          </a:p>
+        </p:txBody>
+      </p:sp>
+      <p:cxnSp>
+        <p:nvCxnSpPr>
+          <p:cNvPr id="104" name="Connector 103"/>
+          <p:cNvCxnSpPr/>
+          <p:nvPr/>
+        </p:nvCxnSpPr>
+        <p:spPr>
+          <a:xfrm>
+            <a:off x="9809249" y="4892040"/>
+            <a:ext cx="0" cy="932688"/>
+          </a:xfrm>
+          <a:prstGeom prst="line">
+            <a:avLst/>
+          </a:prstGeom>
+          <a:ln w="19050">
+            <a:solidFill>
+              <a:srgbClr val="7F0000"/>
+            </a:solidFill>
+          </a:ln>
+        </p:spPr>
+        <p:style>
+          <a:lnRef idx="2">
+            <a:schemeClr val="accent1"/>
+          </a:lnRef>
+          <a:fillRef idx="0">
+            <a:schemeClr val="accent1"/>
+          </a:fillRef>
+          <a:effectRef idx="1">
+            <a:schemeClr val="accent1"/>
+          </a:effectRef>
+          <a:fontRef idx="minor">
+            <a:schemeClr val="tx1"/>
+          </a:fontRef>
+        </p:style>
+      </p:cxnSp>
+      <p:sp>
+        <p:nvSpPr>
+          <p:cNvPr id="105" name="Pentagon 104"/>
+          <p:cNvSpPr/>
+          <p:nvPr/>
+        </p:nvSpPr>
+        <p:spPr>
+          <a:xfrm rot="10800000">
+            <a:off x="9662945" y="4892040"/>
+            <a:ext cx="146304" cy="137160"/>
+          </a:xfrm>
+          <a:prstGeom prst="homePlate">
+            <a:avLst/>
+          </a:prstGeom>
+          <a:solidFill>
+            <a:srgbClr val="C00000"/>
+          </a:solidFill>
+          <a:ln w="12700">
+            <a:solidFill>
+              <a:srgbClr val="7F0000"/>
+            </a:solidFill>
+          </a:ln>
+          <a:effectLst/>
+        </p:spPr>
+        <p:style>
+          <a:lnRef idx="1">
+            <a:schemeClr val="accent1"/>
+          </a:lnRef>
+          <a:fillRef idx="3">
+            <a:schemeClr val="accent1"/>
+          </a:fillRef>
+          <a:effectRef idx="2">
+            <a:schemeClr val="accent1"/>
+          </a:effectRef>
+          <a:fontRef idx="minor">
+            <a:schemeClr val="lt1"/>
+          </a:fontRef>
+        </p:style>
+        <p:txBody>
+          <a:bodyPr rtlCol="0" anchor="ctr" wrap="square" lIns="18000" rIns="18000" tIns="9000" bIns="9000"/>
+          <a:lstStyle/>
+          <a:p>
+            <a:pPr algn="ctr"/>
+          </a:p>
+        </p:txBody>
+      </p:sp>
+      <p:cxnSp>
+        <p:nvCxnSpPr>
+          <p:cNvPr id="106" name="Connector 105"/>
+          <p:cNvCxnSpPr/>
+          <p:nvPr/>
+        </p:nvCxnSpPr>
+        <p:spPr>
+          <a:xfrm>
             <a:off x="5770806" y="1161288"/>
             <a:ext cx="0" cy="4663440"/>
           </a:xfrm>
@@ -12802,9 +14564,187 @@
           </a:fontRef>
         </p:style>
       </p:cxnSp>
-      <p:sp>
-        <p:nvSpPr>
-          <p:cNvPr id="95" name="Diamond 94"/>
+      <p:cxnSp>
+        <p:nvCxnSpPr>
+          <p:cNvPr id="107" name="Connector 106"/>
+          <p:cNvCxnSpPr/>
+          <p:nvPr/>
+        </p:nvCxnSpPr>
+        <p:spPr>
+          <a:xfrm>
+            <a:off x="3886200" y="685800"/>
+            <a:ext cx="0" cy="5138928"/>
+          </a:xfrm>
+          <a:prstGeom prst="line">
+            <a:avLst/>
+          </a:prstGeom>
+          <a:ln w="19050">
+            <a:solidFill>
+              <a:srgbClr val="2F5597"/>
+            </a:solidFill>
+          </a:ln>
+        </p:spPr>
+        <p:style>
+          <a:lnRef idx="2">
+            <a:schemeClr val="accent1"/>
+          </a:lnRef>
+          <a:fillRef idx="0">
+            <a:schemeClr val="accent1"/>
+          </a:fillRef>
+          <a:effectRef idx="1">
+            <a:schemeClr val="accent1"/>
+          </a:effectRef>
+          <a:fontRef idx="minor">
+            <a:schemeClr val="tx1"/>
+          </a:fontRef>
+        </p:style>
+      </p:cxnSp>
+      <p:sp>
+        <p:nvSpPr>
+          <p:cNvPr id="108" name="Rectangle 107"/>
+          <p:cNvSpPr/>
+          <p:nvPr/>
+        </p:nvSpPr>
+        <p:spPr>
+          <a:xfrm>
+            <a:off x="3886200" y="685800"/>
+            <a:ext cx="566928" cy="256032"/>
+          </a:xfrm>
+          <a:prstGeom prst="rect">
+            <a:avLst/>
+          </a:prstGeom>
+          <a:solidFill>
+            <a:srgbClr val="4472C4"/>
+          </a:solidFill>
+          <a:ln w="9525">
+            <a:solidFill>
+              <a:srgbClr val="2F5597"/>
+            </a:solidFill>
+          </a:ln>
+          <a:effectLst/>
+        </p:spPr>
+        <p:style>
+          <a:lnRef idx="1">
+            <a:schemeClr val="accent1"/>
+          </a:lnRef>
+          <a:fillRef idx="3">
+            <a:schemeClr val="accent1"/>
+          </a:fillRef>
+          <a:effectRef idx="2">
+            <a:schemeClr val="accent1"/>
+          </a:effectRef>
+          <a:fontRef idx="minor">
+            <a:schemeClr val="lt1"/>
+          </a:fontRef>
+        </p:style>
+        <p:txBody>
+          <a:bodyPr rtlCol="0" anchor="ctr" wrap="square" lIns="18000" rIns="18000" tIns="9000" bIns="9000"/>
+          <a:lstStyle/>
+          <a:p>
+            <a:pPr algn="l"/>
+            <a:r>
+              <a:rPr sz="800" b="1">
+                <a:solidFill>
+                  <a:srgbClr val="FFFFFF"/>
+                </a:solidFill>
+              </a:rPr>
+              <a:t>⚑ Старт</a:t>
+            </a:r>
+          </a:p>
+        </p:txBody>
+      </p:sp>
+      <p:cxnSp>
+        <p:nvCxnSpPr>
+          <p:cNvPr id="109" name="Connector 108"/>
+          <p:cNvCxnSpPr/>
+          <p:nvPr/>
+        </p:nvCxnSpPr>
+        <p:spPr>
+          <a:xfrm>
+            <a:off x="11963085" y="685800"/>
+            <a:ext cx="0" cy="5138928"/>
+          </a:xfrm>
+          <a:prstGeom prst="line">
+            <a:avLst/>
+          </a:prstGeom>
+          <a:ln w="19050">
+            <a:solidFill>
+              <a:srgbClr val="7F0000"/>
+            </a:solidFill>
+          </a:ln>
+        </p:spPr>
+        <p:style>
+          <a:lnRef idx="2">
+            <a:schemeClr val="accent1"/>
+          </a:lnRef>
+          <a:fillRef idx="0">
+            <a:schemeClr val="accent1"/>
+          </a:fillRef>
+          <a:effectRef idx="1">
+            <a:schemeClr val="accent1"/>
+          </a:effectRef>
+          <a:fontRef idx="minor">
+            <a:schemeClr val="tx1"/>
+          </a:fontRef>
+        </p:style>
+      </p:cxnSp>
+      <p:sp>
+        <p:nvSpPr>
+          <p:cNvPr id="110" name="Rectangle 109"/>
+          <p:cNvSpPr/>
+          <p:nvPr/>
+        </p:nvSpPr>
+        <p:spPr>
+          <a:xfrm>
+            <a:off x="11396157" y="685800"/>
+            <a:ext cx="566928" cy="256032"/>
+          </a:xfrm>
+          <a:prstGeom prst="rect">
+            <a:avLst/>
+          </a:prstGeom>
+          <a:solidFill>
+            <a:srgbClr val="C00000"/>
+          </a:solidFill>
+          <a:ln w="9525">
+            <a:solidFill>
+              <a:srgbClr val="7F0000"/>
+            </a:solidFill>
+          </a:ln>
+          <a:effectLst/>
+        </p:spPr>
+        <p:style>
+          <a:lnRef idx="1">
+            <a:schemeClr val="accent1"/>
+          </a:lnRef>
+          <a:fillRef idx="3">
+            <a:schemeClr val="accent1"/>
+          </a:fillRef>
+          <a:effectRef idx="2">
+            <a:schemeClr val="accent1"/>
+          </a:effectRef>
+          <a:fontRef idx="minor">
+            <a:schemeClr val="lt1"/>
+          </a:fontRef>
+        </p:style>
+        <p:txBody>
+          <a:bodyPr rtlCol="0" anchor="ctr" wrap="square" lIns="18000" rIns="18000" tIns="9000" bIns="9000"/>
+          <a:lstStyle/>
+          <a:p>
+            <a:pPr algn="r"/>
+            <a:r>
+              <a:rPr sz="800" b="1">
+                <a:solidFill>
+                  <a:srgbClr val="FFFFFF"/>
+                </a:solidFill>
+              </a:rPr>
+              <a:t>Финиш ⚑</a:t>
+            </a:r>
+          </a:p>
+        </p:txBody>
+      </p:sp>
+      <p:sp>
+        <p:nvSpPr>
+          <p:cNvPr id="111" name="Diamond 110"/>
           <p:cNvSpPr/>
           <p:nvPr/>
         </p:nvSpPr>
@@ -12850,14 +14790,14 @@
       </p:sp>
       <p:sp>
         <p:nvSpPr>
-          <p:cNvPr id="96" name="Rectangle 95"/>
-          <p:cNvSpPr/>
-          <p:nvPr/>
-        </p:nvSpPr>
-        <p:spPr>
-          <a:xfrm>
-            <a:off x="384048" y="5934456"/>
-            <a:ext cx="1005840" cy="201168"/>
+          <p:cNvPr id="112" name="Rectangle 111"/>
+          <p:cNvSpPr/>
+          <p:nvPr/>
+        </p:nvSpPr>
+        <p:spPr>
+          <a:xfrm>
+            <a:off x="374904" y="5934456"/>
+            <a:ext cx="868680" cy="201168"/>
           </a:xfrm>
           <a:prstGeom prst="rect">
             <a:avLst/>
@@ -12900,13 +14840,13 @@
       </p:sp>
       <p:sp>
         <p:nvSpPr>
-          <p:cNvPr id="97" name="Diamond 96"/>
-          <p:cNvSpPr/>
-          <p:nvPr/>
-        </p:nvSpPr>
-        <p:spPr>
-          <a:xfrm>
-            <a:off x="1490472" y="5975604"/>
+          <p:cNvPr id="113" name="Diamond 112"/>
+          <p:cNvSpPr/>
+          <p:nvPr/>
+        </p:nvSpPr>
+        <p:spPr>
+          <a:xfrm>
+            <a:off x="1280160" y="5975604"/>
             <a:ext cx="118872" cy="118872"/>
           </a:xfrm>
           <a:prstGeom prst="diamond">
@@ -12946,14 +14886,14 @@
       </p:sp>
       <p:sp>
         <p:nvSpPr>
-          <p:cNvPr id="98" name="Rectangle 97"/>
-          <p:cNvSpPr/>
-          <p:nvPr/>
-        </p:nvSpPr>
-        <p:spPr>
-          <a:xfrm>
-            <a:off x="1645920" y="5934456"/>
-            <a:ext cx="1005840" cy="201168"/>
+          <p:cNvPr id="114" name="Rectangle 113"/>
+          <p:cNvSpPr/>
+          <p:nvPr/>
+        </p:nvSpPr>
+        <p:spPr>
+          <a:xfrm>
+            <a:off x="1426464" y="5934456"/>
+            <a:ext cx="868680" cy="201168"/>
           </a:xfrm>
           <a:prstGeom prst="rect">
             <a:avLst/>
@@ -12996,14 +14936,14 @@
       </p:sp>
       <p:sp>
         <p:nvSpPr>
-          <p:cNvPr id="99" name="Rounded Rectangle 98"/>
-          <p:cNvSpPr/>
-          <p:nvPr/>
-        </p:nvSpPr>
-        <p:spPr>
-          <a:xfrm>
-            <a:off x="2752344" y="5975604"/>
-            <a:ext cx="274320" cy="118872"/>
+          <p:cNvPr id="115" name="Rounded Rectangle 114"/>
+          <p:cNvSpPr/>
+          <p:nvPr/>
+        </p:nvSpPr>
+        <p:spPr>
+          <a:xfrm>
+            <a:off x="2331720" y="5975604"/>
+            <a:ext cx="219456" cy="118872"/>
           </a:xfrm>
           <a:prstGeom prst="roundRect">
             <a:avLst/>
@@ -13042,14 +14982,14 @@
       </p:sp>
       <p:sp>
         <p:nvSpPr>
-          <p:cNvPr id="100" name="Rectangle 99"/>
-          <p:cNvSpPr/>
-          <p:nvPr/>
-        </p:nvSpPr>
-        <p:spPr>
-          <a:xfrm>
-            <a:off x="3063240" y="5934456"/>
-            <a:ext cx="1005840" cy="201168"/>
+          <p:cNvPr id="116" name="Rectangle 115"/>
+          <p:cNvSpPr/>
+          <p:nvPr/>
+        </p:nvSpPr>
+        <p:spPr>
+          <a:xfrm>
+            <a:off x="2578608" y="5934456"/>
+            <a:ext cx="868680" cy="201168"/>
           </a:xfrm>
           <a:prstGeom prst="rect">
             <a:avLst/>
@@ -13092,14 +15032,14 @@
       </p:sp>
       <p:sp>
         <p:nvSpPr>
-          <p:cNvPr id="101" name="Rounded Rectangle 100"/>
-          <p:cNvSpPr/>
-          <p:nvPr/>
-        </p:nvSpPr>
-        <p:spPr>
-          <a:xfrm>
-            <a:off x="4169664" y="5975604"/>
-            <a:ext cx="274320" cy="118872"/>
+          <p:cNvPr id="117" name="Rounded Rectangle 116"/>
+          <p:cNvSpPr/>
+          <p:nvPr/>
+        </p:nvSpPr>
+        <p:spPr>
+          <a:xfrm>
+            <a:off x="3483864" y="5975604"/>
+            <a:ext cx="219456" cy="118872"/>
           </a:xfrm>
           <a:prstGeom prst="roundRect">
             <a:avLst/>
@@ -13138,14 +15078,14 @@
       </p:sp>
       <p:sp>
         <p:nvSpPr>
-          <p:cNvPr id="102" name="Rectangle 101"/>
-          <p:cNvSpPr/>
-          <p:nvPr/>
-        </p:nvSpPr>
-        <p:spPr>
-          <a:xfrm>
-            <a:off x="4480560" y="5934456"/>
-            <a:ext cx="1005840" cy="201168"/>
+          <p:cNvPr id="118" name="Rectangle 117"/>
+          <p:cNvSpPr/>
+          <p:nvPr/>
+        </p:nvSpPr>
+        <p:spPr>
+          <a:xfrm>
+            <a:off x="3730752" y="5934456"/>
+            <a:ext cx="868680" cy="201168"/>
           </a:xfrm>
           <a:prstGeom prst="rect">
             <a:avLst/>
@@ -13188,14 +15128,110 @@
       </p:sp>
       <p:sp>
         <p:nvSpPr>
-          <p:cNvPr id="103" name="Rounded Rectangle 102"/>
-          <p:cNvSpPr/>
-          <p:nvPr/>
-        </p:nvSpPr>
-        <p:spPr>
-          <a:xfrm>
-            <a:off x="5586984" y="5975604"/>
-            <a:ext cx="274320" cy="118872"/>
+          <p:cNvPr id="119" name="Rounded Rectangle 118"/>
+          <p:cNvSpPr/>
+          <p:nvPr/>
+        </p:nvSpPr>
+        <p:spPr>
+          <a:xfrm>
+            <a:off x="4636008" y="5975604"/>
+            <a:ext cx="219456" cy="118872"/>
+          </a:xfrm>
+          <a:prstGeom prst="roundRect">
+            <a:avLst/>
+          </a:prstGeom>
+          <a:solidFill>
+            <a:srgbClr val="E2D1F0"/>
+          </a:solidFill>
+          <a:ln w="12700">
+            <a:solidFill>
+              <a:srgbClr val="9B7FC7"/>
+            </a:solidFill>
+          </a:ln>
+          <a:effectLst/>
+        </p:spPr>
+        <p:style>
+          <a:lnRef idx="1">
+            <a:schemeClr val="accent1"/>
+          </a:lnRef>
+          <a:fillRef idx="3">
+            <a:schemeClr val="accent1"/>
+          </a:fillRef>
+          <a:effectRef idx="2">
+            <a:schemeClr val="accent1"/>
+          </a:effectRef>
+          <a:fontRef idx="minor">
+            <a:schemeClr val="lt1"/>
+          </a:fontRef>
+        </p:style>
+        <p:txBody>
+          <a:bodyPr rtlCol="0" anchor="ctr" wrap="square" lIns="18000" rIns="18000" tIns="9000" bIns="9000"/>
+          <a:lstStyle/>
+          <a:p>
+            <a:pPr algn="ctr"/>
+          </a:p>
+        </p:txBody>
+      </p:sp>
+      <p:sp>
+        <p:nvSpPr>
+          <p:cNvPr id="120" name="Rectangle 119"/>
+          <p:cNvSpPr/>
+          <p:nvPr/>
+        </p:nvSpPr>
+        <p:spPr>
+          <a:xfrm>
+            <a:off x="4882896" y="5934456"/>
+            <a:ext cx="868680" cy="201168"/>
+          </a:xfrm>
+          <a:prstGeom prst="rect">
+            <a:avLst/>
+          </a:prstGeom>
+          <a:noFill/>
+          <a:ln>
+            <a:noFill/>
+          </a:ln>
+          <a:effectLst/>
+        </p:spPr>
+        <p:style>
+          <a:lnRef idx="1">
+            <a:schemeClr val="accent1"/>
+          </a:lnRef>
+          <a:fillRef idx="3">
+            <a:schemeClr val="accent1"/>
+          </a:fillRef>
+          <a:effectRef idx="2">
+            <a:schemeClr val="accent1"/>
+          </a:effectRef>
+          <a:fontRef idx="minor">
+            <a:schemeClr val="lt1"/>
+          </a:fontRef>
+        </p:style>
+        <p:txBody>
+          <a:bodyPr rtlCol="0" anchor="ctr" wrap="square" lIns="18000" rIns="18000" tIns="9000" bIns="9000"/>
+          <a:lstStyle/>
+          <a:p>
+            <a:pPr algn="l"/>
+            <a:r>
+              <a:rPr sz="800" b="0">
+                <a:solidFill>
+                  <a:srgbClr val="333333"/>
+                </a:solidFill>
+              </a:rPr>
+              <a:t>тестирование</a:t>
+            </a:r>
+          </a:p>
+        </p:txBody>
+      </p:sp>
+      <p:sp>
+        <p:nvSpPr>
+          <p:cNvPr id="121" name="Rounded Rectangle 120"/>
+          <p:cNvSpPr/>
+          <p:nvPr/>
+        </p:nvSpPr>
+        <p:spPr>
+          <a:xfrm>
+            <a:off x="5788152" y="5975604"/>
+            <a:ext cx="219456" cy="118872"/>
           </a:xfrm>
           <a:prstGeom prst="roundRect">
             <a:avLst/>
@@ -13234,14 +15270,14 @@
       </p:sp>
       <p:sp>
         <p:nvSpPr>
-          <p:cNvPr id="104" name="Rectangle 103"/>
-          <p:cNvSpPr/>
-          <p:nvPr/>
-        </p:nvSpPr>
-        <p:spPr>
-          <a:xfrm>
-            <a:off x="5897880" y="5934456"/>
-            <a:ext cx="1005840" cy="201168"/>
+          <p:cNvPr id="122" name="Rectangle 121"/>
+          <p:cNvSpPr/>
+          <p:nvPr/>
+        </p:nvSpPr>
+        <p:spPr>
+          <a:xfrm>
+            <a:off x="6035040" y="5934456"/>
+            <a:ext cx="868680" cy="201168"/>
           </a:xfrm>
           <a:prstGeom prst="rect">
             <a:avLst/>
@@ -13284,14 +15320,14 @@
       </p:sp>
       <p:sp>
         <p:nvSpPr>
-          <p:cNvPr id="105" name="Rounded Rectangle 104"/>
-          <p:cNvSpPr/>
-          <p:nvPr/>
-        </p:nvSpPr>
-        <p:spPr>
-          <a:xfrm>
-            <a:off x="7004304" y="5975604"/>
-            <a:ext cx="274320" cy="118872"/>
+          <p:cNvPr id="123" name="Rounded Rectangle 122"/>
+          <p:cNvSpPr/>
+          <p:nvPr/>
+        </p:nvSpPr>
+        <p:spPr>
+          <a:xfrm>
+            <a:off x="6940296" y="5975604"/>
+            <a:ext cx="219456" cy="118872"/>
           </a:xfrm>
           <a:prstGeom prst="roundRect">
             <a:avLst/>
@@ -13330,14 +15366,14 @@
       </p:sp>
       <p:sp>
         <p:nvSpPr>
-          <p:cNvPr id="106" name="Rectangle 105"/>
-          <p:cNvSpPr/>
-          <p:nvPr/>
-        </p:nvSpPr>
-        <p:spPr>
-          <a:xfrm>
-            <a:off x="7315200" y="5934456"/>
-            <a:ext cx="1005840" cy="201168"/>
+          <p:cNvPr id="124" name="Rectangle 123"/>
+          <p:cNvSpPr/>
+          <p:nvPr/>
+        </p:nvSpPr>
+        <p:spPr>
+          <a:xfrm>
+            <a:off x="7187184" y="5934456"/>
+            <a:ext cx="868680" cy="201168"/>
           </a:xfrm>
           <a:prstGeom prst="rect">
             <a:avLst/>
@@ -13374,6 +15410,198 @@
                 </a:solidFill>
               </a:rPr>
               <a:t>отпуск</a:t>
+            </a:r>
+          </a:p>
+        </p:txBody>
+      </p:sp>
+      <p:sp>
+        <p:nvSpPr>
+          <p:cNvPr id="125" name="Pentagon 124"/>
+          <p:cNvSpPr/>
+          <p:nvPr/>
+        </p:nvSpPr>
+        <p:spPr>
+          <a:xfrm>
+            <a:off x="8092440" y="5975604"/>
+            <a:ext cx="219456" cy="118872"/>
+          </a:xfrm>
+          <a:prstGeom prst="homePlate">
+            <a:avLst/>
+          </a:prstGeom>
+          <a:solidFill>
+            <a:srgbClr val="4472C4"/>
+          </a:solidFill>
+          <a:ln w="12700">
+            <a:solidFill>
+              <a:srgbClr val="2F5597"/>
+            </a:solidFill>
+          </a:ln>
+          <a:effectLst/>
+        </p:spPr>
+        <p:style>
+          <a:lnRef idx="1">
+            <a:schemeClr val="accent1"/>
+          </a:lnRef>
+          <a:fillRef idx="3">
+            <a:schemeClr val="accent1"/>
+          </a:fillRef>
+          <a:effectRef idx="2">
+            <a:schemeClr val="accent1"/>
+          </a:effectRef>
+          <a:fontRef idx="minor">
+            <a:schemeClr val="lt1"/>
+          </a:fontRef>
+        </p:style>
+        <p:txBody>
+          <a:bodyPr rtlCol="0" anchor="ctr" wrap="square" lIns="18000" rIns="18000" tIns="9000" bIns="9000"/>
+          <a:lstStyle/>
+          <a:p>
+            <a:pPr algn="ctr"/>
+          </a:p>
+        </p:txBody>
+      </p:sp>
+      <p:sp>
+        <p:nvSpPr>
+          <p:cNvPr id="126" name="Rectangle 125"/>
+          <p:cNvSpPr/>
+          <p:nvPr/>
+        </p:nvSpPr>
+        <p:spPr>
+          <a:xfrm>
+            <a:off x="8339328" y="5934456"/>
+            <a:ext cx="868680" cy="201168"/>
+          </a:xfrm>
+          <a:prstGeom prst="rect">
+            <a:avLst/>
+          </a:prstGeom>
+          <a:noFill/>
+          <a:ln>
+            <a:noFill/>
+          </a:ln>
+          <a:effectLst/>
+        </p:spPr>
+        <p:style>
+          <a:lnRef idx="1">
+            <a:schemeClr val="accent1"/>
+          </a:lnRef>
+          <a:fillRef idx="3">
+            <a:schemeClr val="accent1"/>
+          </a:fillRef>
+          <a:effectRef idx="2">
+            <a:schemeClr val="accent1"/>
+          </a:effectRef>
+          <a:fontRef idx="minor">
+            <a:schemeClr val="lt1"/>
+          </a:fontRef>
+        </p:style>
+        <p:txBody>
+          <a:bodyPr rtlCol="0" anchor="ctr" wrap="square" lIns="18000" rIns="18000" tIns="9000" bIns="9000"/>
+          <a:lstStyle/>
+          <a:p>
+            <a:pPr algn="l"/>
+            <a:r>
+              <a:rPr sz="800" b="0">
+                <a:solidFill>
+                  <a:srgbClr val="333333"/>
+                </a:solidFill>
+              </a:rPr>
+              <a:t>старт</a:t>
+            </a:r>
+          </a:p>
+        </p:txBody>
+      </p:sp>
+      <p:sp>
+        <p:nvSpPr>
+          <p:cNvPr id="127" name="Pentagon 126"/>
+          <p:cNvSpPr/>
+          <p:nvPr/>
+        </p:nvSpPr>
+        <p:spPr>
+          <a:xfrm>
+            <a:off x="9244584" y="5975604"/>
+            <a:ext cx="219456" cy="118872"/>
+          </a:xfrm>
+          <a:prstGeom prst="homePlate">
+            <a:avLst/>
+          </a:prstGeom>
+          <a:solidFill>
+            <a:srgbClr val="C00000"/>
+          </a:solidFill>
+          <a:ln w="12700">
+            <a:solidFill>
+              <a:srgbClr val="7F0000"/>
+            </a:solidFill>
+          </a:ln>
+          <a:effectLst/>
+        </p:spPr>
+        <p:style>
+          <a:lnRef idx="1">
+            <a:schemeClr val="accent1"/>
+          </a:lnRef>
+          <a:fillRef idx="3">
+            <a:schemeClr val="accent1"/>
+          </a:fillRef>
+          <a:effectRef idx="2">
+            <a:schemeClr val="accent1"/>
+          </a:effectRef>
+          <a:fontRef idx="minor">
+            <a:schemeClr val="lt1"/>
+          </a:fontRef>
+        </p:style>
+        <p:txBody>
+          <a:bodyPr rtlCol="0" anchor="ctr" wrap="square" lIns="18000" rIns="18000" tIns="9000" bIns="9000"/>
+          <a:lstStyle/>
+          <a:p>
+            <a:pPr algn="ctr"/>
+          </a:p>
+        </p:txBody>
+      </p:sp>
+      <p:sp>
+        <p:nvSpPr>
+          <p:cNvPr id="128" name="Rectangle 127"/>
+          <p:cNvSpPr/>
+          <p:nvPr/>
+        </p:nvSpPr>
+        <p:spPr>
+          <a:xfrm>
+            <a:off x="9491472" y="5934456"/>
+            <a:ext cx="868680" cy="201168"/>
+          </a:xfrm>
+          <a:prstGeom prst="rect">
+            <a:avLst/>
+          </a:prstGeom>
+          <a:noFill/>
+          <a:ln>
+            <a:noFill/>
+          </a:ln>
+          <a:effectLst/>
+        </p:spPr>
+        <p:style>
+          <a:lnRef idx="1">
+            <a:schemeClr val="accent1"/>
+          </a:lnRef>
+          <a:fillRef idx="3">
+            <a:schemeClr val="accent1"/>
+          </a:fillRef>
+          <a:effectRef idx="2">
+            <a:schemeClr val="accent1"/>
+          </a:effectRef>
+          <a:fontRef idx="minor">
+            <a:schemeClr val="lt1"/>
+          </a:fontRef>
+        </p:style>
+        <p:txBody>
+          <a:bodyPr rtlCol="0" anchor="ctr" wrap="square" lIns="18000" rIns="18000" tIns="9000" bIns="9000"/>
+          <a:lstStyle/>
+          <a:p>
+            <a:pPr algn="l"/>
+            <a:r>
+              <a:rPr sz="800" b="0">
+                <a:solidFill>
+                  <a:srgbClr val="333333"/>
+                </a:solidFill>
+              </a:rPr>
+              <a:t>финиш</a:t>
             </a:r>
           </a:p>
         </p:txBody>
@@ -17711,6 +19939,654 @@
         </p:nvCxnSpPr>
         <p:spPr>
           <a:xfrm>
+            <a:off x="3886200" y="1161288"/>
+            <a:ext cx="0" cy="621792"/>
+          </a:xfrm>
+          <a:prstGeom prst="line">
+            <a:avLst/>
+          </a:prstGeom>
+          <a:ln w="19050">
+            <a:solidFill>
+              <a:srgbClr val="2F5597"/>
+            </a:solidFill>
+          </a:ln>
+        </p:spPr>
+        <p:style>
+          <a:lnRef idx="2">
+            <a:schemeClr val="accent1"/>
+          </a:lnRef>
+          <a:fillRef idx="0">
+            <a:schemeClr val="accent1"/>
+          </a:fillRef>
+          <a:effectRef idx="1">
+            <a:schemeClr val="accent1"/>
+          </a:effectRef>
+          <a:fontRef idx="minor">
+            <a:schemeClr val="tx1"/>
+          </a:fontRef>
+        </p:style>
+      </p:cxnSp>
+      <p:sp>
+        <p:nvSpPr>
+          <p:cNvPr id="96" name="Pentagon 95"/>
+          <p:cNvSpPr/>
+          <p:nvPr/>
+        </p:nvSpPr>
+        <p:spPr>
+          <a:xfrm>
+            <a:off x="3886200" y="1161288"/>
+            <a:ext cx="146304" cy="137160"/>
+          </a:xfrm>
+          <a:prstGeom prst="homePlate">
+            <a:avLst/>
+          </a:prstGeom>
+          <a:solidFill>
+            <a:srgbClr val="4472C4"/>
+          </a:solidFill>
+          <a:ln w="12700">
+            <a:solidFill>
+              <a:srgbClr val="2F5597"/>
+            </a:solidFill>
+          </a:ln>
+          <a:effectLst/>
+        </p:spPr>
+        <p:style>
+          <a:lnRef idx="1">
+            <a:schemeClr val="accent1"/>
+          </a:lnRef>
+          <a:fillRef idx="3">
+            <a:schemeClr val="accent1"/>
+          </a:fillRef>
+          <a:effectRef idx="2">
+            <a:schemeClr val="accent1"/>
+          </a:effectRef>
+          <a:fontRef idx="minor">
+            <a:schemeClr val="lt1"/>
+          </a:fontRef>
+        </p:style>
+        <p:txBody>
+          <a:bodyPr rtlCol="0" anchor="ctr" wrap="square" lIns="18000" rIns="18000" tIns="9000" bIns="9000"/>
+          <a:lstStyle/>
+          <a:p>
+            <a:pPr algn="ctr"/>
+          </a:p>
+        </p:txBody>
+      </p:sp>
+      <p:cxnSp>
+        <p:nvCxnSpPr>
+          <p:cNvPr id="97" name="Connector 96"/>
+          <p:cNvCxnSpPr/>
+          <p:nvPr/>
+        </p:nvCxnSpPr>
+        <p:spPr>
+          <a:xfrm>
+            <a:off x="9809249" y="1161288"/>
+            <a:ext cx="0" cy="621792"/>
+          </a:xfrm>
+          <a:prstGeom prst="line">
+            <a:avLst/>
+          </a:prstGeom>
+          <a:ln w="19050">
+            <a:solidFill>
+              <a:srgbClr val="7F0000"/>
+            </a:solidFill>
+          </a:ln>
+        </p:spPr>
+        <p:style>
+          <a:lnRef idx="2">
+            <a:schemeClr val="accent1"/>
+          </a:lnRef>
+          <a:fillRef idx="0">
+            <a:schemeClr val="accent1"/>
+          </a:fillRef>
+          <a:effectRef idx="1">
+            <a:schemeClr val="accent1"/>
+          </a:effectRef>
+          <a:fontRef idx="minor">
+            <a:schemeClr val="tx1"/>
+          </a:fontRef>
+        </p:style>
+      </p:cxnSp>
+      <p:sp>
+        <p:nvSpPr>
+          <p:cNvPr id="98" name="Pentagon 97"/>
+          <p:cNvSpPr/>
+          <p:nvPr/>
+        </p:nvSpPr>
+        <p:spPr>
+          <a:xfrm rot="10800000">
+            <a:off x="9662945" y="1161288"/>
+            <a:ext cx="146304" cy="137160"/>
+          </a:xfrm>
+          <a:prstGeom prst="homePlate">
+            <a:avLst/>
+          </a:prstGeom>
+          <a:solidFill>
+            <a:srgbClr val="C00000"/>
+          </a:solidFill>
+          <a:ln w="12700">
+            <a:solidFill>
+              <a:srgbClr val="7F0000"/>
+            </a:solidFill>
+          </a:ln>
+          <a:effectLst/>
+        </p:spPr>
+        <p:style>
+          <a:lnRef idx="1">
+            <a:schemeClr val="accent1"/>
+          </a:lnRef>
+          <a:fillRef idx="3">
+            <a:schemeClr val="accent1"/>
+          </a:fillRef>
+          <a:effectRef idx="2">
+            <a:schemeClr val="accent1"/>
+          </a:effectRef>
+          <a:fontRef idx="minor">
+            <a:schemeClr val="lt1"/>
+          </a:fontRef>
+        </p:style>
+        <p:txBody>
+          <a:bodyPr rtlCol="0" anchor="ctr" wrap="square" lIns="18000" rIns="18000" tIns="9000" bIns="9000"/>
+          <a:lstStyle/>
+          <a:p>
+            <a:pPr algn="ctr"/>
+          </a:p>
+        </p:txBody>
+      </p:sp>
+      <p:cxnSp>
+        <p:nvCxnSpPr>
+          <p:cNvPr id="99" name="Connector 98"/>
+          <p:cNvCxnSpPr/>
+          <p:nvPr/>
+        </p:nvCxnSpPr>
+        <p:spPr>
+          <a:xfrm>
+            <a:off x="3886200" y="1783080"/>
+            <a:ext cx="0" cy="621792"/>
+          </a:xfrm>
+          <a:prstGeom prst="line">
+            <a:avLst/>
+          </a:prstGeom>
+          <a:ln w="19050">
+            <a:solidFill>
+              <a:srgbClr val="2F5597"/>
+            </a:solidFill>
+          </a:ln>
+        </p:spPr>
+        <p:style>
+          <a:lnRef idx="2">
+            <a:schemeClr val="accent1"/>
+          </a:lnRef>
+          <a:fillRef idx="0">
+            <a:schemeClr val="accent1"/>
+          </a:fillRef>
+          <a:effectRef idx="1">
+            <a:schemeClr val="accent1"/>
+          </a:effectRef>
+          <a:fontRef idx="minor">
+            <a:schemeClr val="tx1"/>
+          </a:fontRef>
+        </p:style>
+      </p:cxnSp>
+      <p:sp>
+        <p:nvSpPr>
+          <p:cNvPr id="100" name="Pentagon 99"/>
+          <p:cNvSpPr/>
+          <p:nvPr/>
+        </p:nvSpPr>
+        <p:spPr>
+          <a:xfrm>
+            <a:off x="3886200" y="1783080"/>
+            <a:ext cx="146304" cy="137160"/>
+          </a:xfrm>
+          <a:prstGeom prst="homePlate">
+            <a:avLst/>
+          </a:prstGeom>
+          <a:solidFill>
+            <a:srgbClr val="4472C4"/>
+          </a:solidFill>
+          <a:ln w="12700">
+            <a:solidFill>
+              <a:srgbClr val="2F5597"/>
+            </a:solidFill>
+          </a:ln>
+          <a:effectLst/>
+        </p:spPr>
+        <p:style>
+          <a:lnRef idx="1">
+            <a:schemeClr val="accent1"/>
+          </a:lnRef>
+          <a:fillRef idx="3">
+            <a:schemeClr val="accent1"/>
+          </a:fillRef>
+          <a:effectRef idx="2">
+            <a:schemeClr val="accent1"/>
+          </a:effectRef>
+          <a:fontRef idx="minor">
+            <a:schemeClr val="lt1"/>
+          </a:fontRef>
+        </p:style>
+        <p:txBody>
+          <a:bodyPr rtlCol="0" anchor="ctr" wrap="square" lIns="18000" rIns="18000" tIns="9000" bIns="9000"/>
+          <a:lstStyle/>
+          <a:p>
+            <a:pPr algn="ctr"/>
+          </a:p>
+        </p:txBody>
+      </p:sp>
+      <p:cxnSp>
+        <p:nvCxnSpPr>
+          <p:cNvPr id="101" name="Connector 100"/>
+          <p:cNvCxnSpPr/>
+          <p:nvPr/>
+        </p:nvCxnSpPr>
+        <p:spPr>
+          <a:xfrm>
+            <a:off x="8193872" y="1783080"/>
+            <a:ext cx="0" cy="621792"/>
+          </a:xfrm>
+          <a:prstGeom prst="line">
+            <a:avLst/>
+          </a:prstGeom>
+          <a:ln w="19050">
+            <a:solidFill>
+              <a:srgbClr val="7F0000"/>
+            </a:solidFill>
+          </a:ln>
+        </p:spPr>
+        <p:style>
+          <a:lnRef idx="2">
+            <a:schemeClr val="accent1"/>
+          </a:lnRef>
+          <a:fillRef idx="0">
+            <a:schemeClr val="accent1"/>
+          </a:fillRef>
+          <a:effectRef idx="1">
+            <a:schemeClr val="accent1"/>
+          </a:effectRef>
+          <a:fontRef idx="minor">
+            <a:schemeClr val="tx1"/>
+          </a:fontRef>
+        </p:style>
+      </p:cxnSp>
+      <p:sp>
+        <p:nvSpPr>
+          <p:cNvPr id="102" name="Pentagon 101"/>
+          <p:cNvSpPr/>
+          <p:nvPr/>
+        </p:nvSpPr>
+        <p:spPr>
+          <a:xfrm rot="10800000">
+            <a:off x="8047568" y="1783080"/>
+            <a:ext cx="146304" cy="137160"/>
+          </a:xfrm>
+          <a:prstGeom prst="homePlate">
+            <a:avLst/>
+          </a:prstGeom>
+          <a:solidFill>
+            <a:srgbClr val="C00000"/>
+          </a:solidFill>
+          <a:ln w="12700">
+            <a:solidFill>
+              <a:srgbClr val="7F0000"/>
+            </a:solidFill>
+          </a:ln>
+          <a:effectLst/>
+        </p:spPr>
+        <p:style>
+          <a:lnRef idx="1">
+            <a:schemeClr val="accent1"/>
+          </a:lnRef>
+          <a:fillRef idx="3">
+            <a:schemeClr val="accent1"/>
+          </a:fillRef>
+          <a:effectRef idx="2">
+            <a:schemeClr val="accent1"/>
+          </a:effectRef>
+          <a:fontRef idx="minor">
+            <a:schemeClr val="lt1"/>
+          </a:fontRef>
+        </p:style>
+        <p:txBody>
+          <a:bodyPr rtlCol="0" anchor="ctr" wrap="square" lIns="18000" rIns="18000" tIns="9000" bIns="9000"/>
+          <a:lstStyle/>
+          <a:p>
+            <a:pPr algn="ctr"/>
+          </a:p>
+        </p:txBody>
+      </p:sp>
+      <p:cxnSp>
+        <p:nvCxnSpPr>
+          <p:cNvPr id="103" name="Connector 102"/>
+          <p:cNvCxnSpPr/>
+          <p:nvPr/>
+        </p:nvCxnSpPr>
+        <p:spPr>
+          <a:xfrm>
+            <a:off x="7655413" y="2404872"/>
+            <a:ext cx="0" cy="2176272"/>
+          </a:xfrm>
+          <a:prstGeom prst="line">
+            <a:avLst/>
+          </a:prstGeom>
+          <a:ln w="19050">
+            <a:solidFill>
+              <a:srgbClr val="2F5597"/>
+            </a:solidFill>
+          </a:ln>
+        </p:spPr>
+        <p:style>
+          <a:lnRef idx="2">
+            <a:schemeClr val="accent1"/>
+          </a:lnRef>
+          <a:fillRef idx="0">
+            <a:schemeClr val="accent1"/>
+          </a:fillRef>
+          <a:effectRef idx="1">
+            <a:schemeClr val="accent1"/>
+          </a:effectRef>
+          <a:fontRef idx="minor">
+            <a:schemeClr val="tx1"/>
+          </a:fontRef>
+        </p:style>
+      </p:cxnSp>
+      <p:sp>
+        <p:nvSpPr>
+          <p:cNvPr id="104" name="Pentagon 103"/>
+          <p:cNvSpPr/>
+          <p:nvPr/>
+        </p:nvSpPr>
+        <p:spPr>
+          <a:xfrm>
+            <a:off x="7655413" y="2404872"/>
+            <a:ext cx="146304" cy="137160"/>
+          </a:xfrm>
+          <a:prstGeom prst="homePlate">
+            <a:avLst/>
+          </a:prstGeom>
+          <a:solidFill>
+            <a:srgbClr val="4472C4"/>
+          </a:solidFill>
+          <a:ln w="12700">
+            <a:solidFill>
+              <a:srgbClr val="2F5597"/>
+            </a:solidFill>
+          </a:ln>
+          <a:effectLst/>
+        </p:spPr>
+        <p:style>
+          <a:lnRef idx="1">
+            <a:schemeClr val="accent1"/>
+          </a:lnRef>
+          <a:fillRef idx="3">
+            <a:schemeClr val="accent1"/>
+          </a:fillRef>
+          <a:effectRef idx="2">
+            <a:schemeClr val="accent1"/>
+          </a:effectRef>
+          <a:fontRef idx="minor">
+            <a:schemeClr val="lt1"/>
+          </a:fontRef>
+        </p:style>
+        <p:txBody>
+          <a:bodyPr rtlCol="0" anchor="ctr" wrap="square" lIns="18000" rIns="18000" tIns="9000" bIns="9000"/>
+          <a:lstStyle/>
+          <a:p>
+            <a:pPr algn="ctr"/>
+          </a:p>
+        </p:txBody>
+      </p:sp>
+      <p:cxnSp>
+        <p:nvCxnSpPr>
+          <p:cNvPr id="105" name="Connector 104"/>
+          <p:cNvCxnSpPr/>
+          <p:nvPr/>
+        </p:nvCxnSpPr>
+        <p:spPr>
+          <a:xfrm>
+            <a:off x="10886167" y="2404872"/>
+            <a:ext cx="0" cy="2176272"/>
+          </a:xfrm>
+          <a:prstGeom prst="line">
+            <a:avLst/>
+          </a:prstGeom>
+          <a:ln w="19050">
+            <a:solidFill>
+              <a:srgbClr val="7F0000"/>
+            </a:solidFill>
+          </a:ln>
+        </p:spPr>
+        <p:style>
+          <a:lnRef idx="2">
+            <a:schemeClr val="accent1"/>
+          </a:lnRef>
+          <a:fillRef idx="0">
+            <a:schemeClr val="accent1"/>
+          </a:fillRef>
+          <a:effectRef idx="1">
+            <a:schemeClr val="accent1"/>
+          </a:effectRef>
+          <a:fontRef idx="minor">
+            <a:schemeClr val="tx1"/>
+          </a:fontRef>
+        </p:style>
+      </p:cxnSp>
+      <p:sp>
+        <p:nvSpPr>
+          <p:cNvPr id="106" name="Pentagon 105"/>
+          <p:cNvSpPr/>
+          <p:nvPr/>
+        </p:nvSpPr>
+        <p:spPr>
+          <a:xfrm rot="10800000">
+            <a:off x="10739863" y="2404872"/>
+            <a:ext cx="146304" cy="137160"/>
+          </a:xfrm>
+          <a:prstGeom prst="homePlate">
+            <a:avLst/>
+          </a:prstGeom>
+          <a:solidFill>
+            <a:srgbClr val="C00000"/>
+          </a:solidFill>
+          <a:ln w="12700">
+            <a:solidFill>
+              <a:srgbClr val="7F0000"/>
+            </a:solidFill>
+          </a:ln>
+          <a:effectLst/>
+        </p:spPr>
+        <p:style>
+          <a:lnRef idx="1">
+            <a:schemeClr val="accent1"/>
+          </a:lnRef>
+          <a:fillRef idx="3">
+            <a:schemeClr val="accent1"/>
+          </a:fillRef>
+          <a:effectRef idx="2">
+            <a:schemeClr val="accent1"/>
+          </a:effectRef>
+          <a:fontRef idx="minor">
+            <a:schemeClr val="lt1"/>
+          </a:fontRef>
+        </p:style>
+        <p:txBody>
+          <a:bodyPr rtlCol="0" anchor="ctr" wrap="square" lIns="18000" rIns="18000" tIns="9000" bIns="9000"/>
+          <a:lstStyle/>
+          <a:p>
+            <a:pPr algn="ctr"/>
+          </a:p>
+        </p:txBody>
+      </p:sp>
+      <p:cxnSp>
+        <p:nvCxnSpPr>
+          <p:cNvPr id="107" name="Connector 106"/>
+          <p:cNvCxnSpPr/>
+          <p:nvPr/>
+        </p:nvCxnSpPr>
+        <p:spPr>
+          <a:xfrm>
+            <a:off x="3886200" y="4581144"/>
+            <a:ext cx="0" cy="1243584"/>
+          </a:xfrm>
+          <a:prstGeom prst="line">
+            <a:avLst/>
+          </a:prstGeom>
+          <a:ln w="19050">
+            <a:solidFill>
+              <a:srgbClr val="2F5597"/>
+            </a:solidFill>
+          </a:ln>
+        </p:spPr>
+        <p:style>
+          <a:lnRef idx="2">
+            <a:schemeClr val="accent1"/>
+          </a:lnRef>
+          <a:fillRef idx="0">
+            <a:schemeClr val="accent1"/>
+          </a:fillRef>
+          <a:effectRef idx="1">
+            <a:schemeClr val="accent1"/>
+          </a:effectRef>
+          <a:fontRef idx="minor">
+            <a:schemeClr val="tx1"/>
+          </a:fontRef>
+        </p:style>
+      </p:cxnSp>
+      <p:sp>
+        <p:nvSpPr>
+          <p:cNvPr id="108" name="Pentagon 107"/>
+          <p:cNvSpPr/>
+          <p:nvPr/>
+        </p:nvSpPr>
+        <p:spPr>
+          <a:xfrm>
+            <a:off x="3886200" y="4581144"/>
+            <a:ext cx="146304" cy="137160"/>
+          </a:xfrm>
+          <a:prstGeom prst="homePlate">
+            <a:avLst/>
+          </a:prstGeom>
+          <a:solidFill>
+            <a:srgbClr val="4472C4"/>
+          </a:solidFill>
+          <a:ln w="12700">
+            <a:solidFill>
+              <a:srgbClr val="2F5597"/>
+            </a:solidFill>
+          </a:ln>
+          <a:effectLst/>
+        </p:spPr>
+        <p:style>
+          <a:lnRef idx="1">
+            <a:schemeClr val="accent1"/>
+          </a:lnRef>
+          <a:fillRef idx="3">
+            <a:schemeClr val="accent1"/>
+          </a:fillRef>
+          <a:effectRef idx="2">
+            <a:schemeClr val="accent1"/>
+          </a:effectRef>
+          <a:fontRef idx="minor">
+            <a:schemeClr val="lt1"/>
+          </a:fontRef>
+        </p:style>
+        <p:txBody>
+          <a:bodyPr rtlCol="0" anchor="ctr" wrap="square" lIns="18000" rIns="18000" tIns="9000" bIns="9000"/>
+          <a:lstStyle/>
+          <a:p>
+            <a:pPr algn="ctr"/>
+          </a:p>
+        </p:txBody>
+      </p:sp>
+      <p:cxnSp>
+        <p:nvCxnSpPr>
+          <p:cNvPr id="109" name="Connector 108"/>
+          <p:cNvCxnSpPr/>
+          <p:nvPr/>
+        </p:nvCxnSpPr>
+        <p:spPr>
+          <a:xfrm>
+            <a:off x="9809249" y="4581144"/>
+            <a:ext cx="0" cy="1243584"/>
+          </a:xfrm>
+          <a:prstGeom prst="line">
+            <a:avLst/>
+          </a:prstGeom>
+          <a:ln w="19050">
+            <a:solidFill>
+              <a:srgbClr val="7F0000"/>
+            </a:solidFill>
+          </a:ln>
+        </p:spPr>
+        <p:style>
+          <a:lnRef idx="2">
+            <a:schemeClr val="accent1"/>
+          </a:lnRef>
+          <a:fillRef idx="0">
+            <a:schemeClr val="accent1"/>
+          </a:fillRef>
+          <a:effectRef idx="1">
+            <a:schemeClr val="accent1"/>
+          </a:effectRef>
+          <a:fontRef idx="minor">
+            <a:schemeClr val="tx1"/>
+          </a:fontRef>
+        </p:style>
+      </p:cxnSp>
+      <p:sp>
+        <p:nvSpPr>
+          <p:cNvPr id="110" name="Pentagon 109"/>
+          <p:cNvSpPr/>
+          <p:nvPr/>
+        </p:nvSpPr>
+        <p:spPr>
+          <a:xfrm rot="10800000">
+            <a:off x="9662945" y="4581144"/>
+            <a:ext cx="146304" cy="137160"/>
+          </a:xfrm>
+          <a:prstGeom prst="homePlate">
+            <a:avLst/>
+          </a:prstGeom>
+          <a:solidFill>
+            <a:srgbClr val="C00000"/>
+          </a:solidFill>
+          <a:ln w="12700">
+            <a:solidFill>
+              <a:srgbClr val="7F0000"/>
+            </a:solidFill>
+          </a:ln>
+          <a:effectLst/>
+        </p:spPr>
+        <p:style>
+          <a:lnRef idx="1">
+            <a:schemeClr val="accent1"/>
+          </a:lnRef>
+          <a:fillRef idx="3">
+            <a:schemeClr val="accent1"/>
+          </a:fillRef>
+          <a:effectRef idx="2">
+            <a:schemeClr val="accent1"/>
+          </a:effectRef>
+          <a:fontRef idx="minor">
+            <a:schemeClr val="lt1"/>
+          </a:fontRef>
+        </p:style>
+        <p:txBody>
+          <a:bodyPr rtlCol="0" anchor="ctr" wrap="square" lIns="18000" rIns="18000" tIns="9000" bIns="9000"/>
+          <a:lstStyle/>
+          <a:p>
+            <a:pPr algn="ctr"/>
+          </a:p>
+        </p:txBody>
+      </p:sp>
+      <p:cxnSp>
+        <p:nvCxnSpPr>
+          <p:cNvPr id="111" name="Connector 110"/>
+          <p:cNvCxnSpPr/>
+          <p:nvPr/>
+        </p:nvCxnSpPr>
+        <p:spPr>
+          <a:xfrm>
             <a:off x="5770806" y="1161288"/>
             <a:ext cx="0" cy="4663440"/>
           </a:xfrm>
@@ -17738,9 +20614,187 @@
           </a:fontRef>
         </p:style>
       </p:cxnSp>
-      <p:sp>
-        <p:nvSpPr>
-          <p:cNvPr id="96" name="Diamond 95"/>
+      <p:cxnSp>
+        <p:nvCxnSpPr>
+          <p:cNvPr id="112" name="Connector 111"/>
+          <p:cNvCxnSpPr/>
+          <p:nvPr/>
+        </p:nvCxnSpPr>
+        <p:spPr>
+          <a:xfrm>
+            <a:off x="3886200" y="685800"/>
+            <a:ext cx="0" cy="5138928"/>
+          </a:xfrm>
+          <a:prstGeom prst="line">
+            <a:avLst/>
+          </a:prstGeom>
+          <a:ln w="19050">
+            <a:solidFill>
+              <a:srgbClr val="2F5597"/>
+            </a:solidFill>
+          </a:ln>
+        </p:spPr>
+        <p:style>
+          <a:lnRef idx="2">
+            <a:schemeClr val="accent1"/>
+          </a:lnRef>
+          <a:fillRef idx="0">
+            <a:schemeClr val="accent1"/>
+          </a:fillRef>
+          <a:effectRef idx="1">
+            <a:schemeClr val="accent1"/>
+          </a:effectRef>
+          <a:fontRef idx="minor">
+            <a:schemeClr val="tx1"/>
+          </a:fontRef>
+        </p:style>
+      </p:cxnSp>
+      <p:sp>
+        <p:nvSpPr>
+          <p:cNvPr id="113" name="Rectangle 112"/>
+          <p:cNvSpPr/>
+          <p:nvPr/>
+        </p:nvSpPr>
+        <p:spPr>
+          <a:xfrm>
+            <a:off x="3886200" y="685800"/>
+            <a:ext cx="566928" cy="256032"/>
+          </a:xfrm>
+          <a:prstGeom prst="rect">
+            <a:avLst/>
+          </a:prstGeom>
+          <a:solidFill>
+            <a:srgbClr val="4472C4"/>
+          </a:solidFill>
+          <a:ln w="9525">
+            <a:solidFill>
+              <a:srgbClr val="2F5597"/>
+            </a:solidFill>
+          </a:ln>
+          <a:effectLst/>
+        </p:spPr>
+        <p:style>
+          <a:lnRef idx="1">
+            <a:schemeClr val="accent1"/>
+          </a:lnRef>
+          <a:fillRef idx="3">
+            <a:schemeClr val="accent1"/>
+          </a:fillRef>
+          <a:effectRef idx="2">
+            <a:schemeClr val="accent1"/>
+          </a:effectRef>
+          <a:fontRef idx="minor">
+            <a:schemeClr val="lt1"/>
+          </a:fontRef>
+        </p:style>
+        <p:txBody>
+          <a:bodyPr rtlCol="0" anchor="ctr" wrap="square" lIns="18000" rIns="18000" tIns="9000" bIns="9000"/>
+          <a:lstStyle/>
+          <a:p>
+            <a:pPr algn="l"/>
+            <a:r>
+              <a:rPr sz="800" b="1">
+                <a:solidFill>
+                  <a:srgbClr val="FFFFFF"/>
+                </a:solidFill>
+              </a:rPr>
+              <a:t>⚑ Старт</a:t>
+            </a:r>
+          </a:p>
+        </p:txBody>
+      </p:sp>
+      <p:cxnSp>
+        <p:nvCxnSpPr>
+          <p:cNvPr id="114" name="Connector 113"/>
+          <p:cNvCxnSpPr/>
+          <p:nvPr/>
+        </p:nvCxnSpPr>
+        <p:spPr>
+          <a:xfrm>
+            <a:off x="11963085" y="685800"/>
+            <a:ext cx="0" cy="5138928"/>
+          </a:xfrm>
+          <a:prstGeom prst="line">
+            <a:avLst/>
+          </a:prstGeom>
+          <a:ln w="19050">
+            <a:solidFill>
+              <a:srgbClr val="7F0000"/>
+            </a:solidFill>
+          </a:ln>
+        </p:spPr>
+        <p:style>
+          <a:lnRef idx="2">
+            <a:schemeClr val="accent1"/>
+          </a:lnRef>
+          <a:fillRef idx="0">
+            <a:schemeClr val="accent1"/>
+          </a:fillRef>
+          <a:effectRef idx="1">
+            <a:schemeClr val="accent1"/>
+          </a:effectRef>
+          <a:fontRef idx="minor">
+            <a:schemeClr val="tx1"/>
+          </a:fontRef>
+        </p:style>
+      </p:cxnSp>
+      <p:sp>
+        <p:nvSpPr>
+          <p:cNvPr id="115" name="Rectangle 114"/>
+          <p:cNvSpPr/>
+          <p:nvPr/>
+        </p:nvSpPr>
+        <p:spPr>
+          <a:xfrm>
+            <a:off x="11396157" y="685800"/>
+            <a:ext cx="566928" cy="256032"/>
+          </a:xfrm>
+          <a:prstGeom prst="rect">
+            <a:avLst/>
+          </a:prstGeom>
+          <a:solidFill>
+            <a:srgbClr val="C00000"/>
+          </a:solidFill>
+          <a:ln w="9525">
+            <a:solidFill>
+              <a:srgbClr val="7F0000"/>
+            </a:solidFill>
+          </a:ln>
+          <a:effectLst/>
+        </p:spPr>
+        <p:style>
+          <a:lnRef idx="1">
+            <a:schemeClr val="accent1"/>
+          </a:lnRef>
+          <a:fillRef idx="3">
+            <a:schemeClr val="accent1"/>
+          </a:fillRef>
+          <a:effectRef idx="2">
+            <a:schemeClr val="accent1"/>
+          </a:effectRef>
+          <a:fontRef idx="minor">
+            <a:schemeClr val="lt1"/>
+          </a:fontRef>
+        </p:style>
+        <p:txBody>
+          <a:bodyPr rtlCol="0" anchor="ctr" wrap="square" lIns="18000" rIns="18000" tIns="9000" bIns="9000"/>
+          <a:lstStyle/>
+          <a:p>
+            <a:pPr algn="r"/>
+            <a:r>
+              <a:rPr sz="800" b="1">
+                <a:solidFill>
+                  <a:srgbClr val="FFFFFF"/>
+                </a:solidFill>
+              </a:rPr>
+              <a:t>Финиш ⚑</a:t>
+            </a:r>
+          </a:p>
+        </p:txBody>
+      </p:sp>
+      <p:sp>
+        <p:nvSpPr>
+          <p:cNvPr id="116" name="Diamond 115"/>
           <p:cNvSpPr/>
           <p:nvPr/>
         </p:nvSpPr>
@@ -17786,14 +20840,14 @@
       </p:sp>
       <p:sp>
         <p:nvSpPr>
-          <p:cNvPr id="97" name="Rectangle 96"/>
-          <p:cNvSpPr/>
-          <p:nvPr/>
-        </p:nvSpPr>
-        <p:spPr>
-          <a:xfrm>
-            <a:off x="384048" y="5934456"/>
-            <a:ext cx="1005840" cy="201168"/>
+          <p:cNvPr id="117" name="Rectangle 116"/>
+          <p:cNvSpPr/>
+          <p:nvPr/>
+        </p:nvSpPr>
+        <p:spPr>
+          <a:xfrm>
+            <a:off x="374904" y="5934456"/>
+            <a:ext cx="868680" cy="201168"/>
           </a:xfrm>
           <a:prstGeom prst="rect">
             <a:avLst/>
@@ -17836,13 +20890,13 @@
       </p:sp>
       <p:sp>
         <p:nvSpPr>
-          <p:cNvPr id="98" name="Diamond 97"/>
-          <p:cNvSpPr/>
-          <p:nvPr/>
-        </p:nvSpPr>
-        <p:spPr>
-          <a:xfrm>
-            <a:off x="1490472" y="5975604"/>
+          <p:cNvPr id="118" name="Diamond 117"/>
+          <p:cNvSpPr/>
+          <p:nvPr/>
+        </p:nvSpPr>
+        <p:spPr>
+          <a:xfrm>
+            <a:off x="1280160" y="5975604"/>
             <a:ext cx="118872" cy="118872"/>
           </a:xfrm>
           <a:prstGeom prst="diamond">
@@ -17882,14 +20936,14 @@
       </p:sp>
       <p:sp>
         <p:nvSpPr>
-          <p:cNvPr id="99" name="Rectangle 98"/>
-          <p:cNvSpPr/>
-          <p:nvPr/>
-        </p:nvSpPr>
-        <p:spPr>
-          <a:xfrm>
-            <a:off x="1645920" y="5934456"/>
-            <a:ext cx="1005840" cy="201168"/>
+          <p:cNvPr id="119" name="Rectangle 118"/>
+          <p:cNvSpPr/>
+          <p:nvPr/>
+        </p:nvSpPr>
+        <p:spPr>
+          <a:xfrm>
+            <a:off x="1426464" y="5934456"/>
+            <a:ext cx="868680" cy="201168"/>
           </a:xfrm>
           <a:prstGeom prst="rect">
             <a:avLst/>
@@ -17932,14 +20986,14 @@
       </p:sp>
       <p:sp>
         <p:nvSpPr>
-          <p:cNvPr id="100" name="Rounded Rectangle 99"/>
-          <p:cNvSpPr/>
-          <p:nvPr/>
-        </p:nvSpPr>
-        <p:spPr>
-          <a:xfrm>
-            <a:off x="2752344" y="5975604"/>
-            <a:ext cx="274320" cy="118872"/>
+          <p:cNvPr id="120" name="Rounded Rectangle 119"/>
+          <p:cNvSpPr/>
+          <p:nvPr/>
+        </p:nvSpPr>
+        <p:spPr>
+          <a:xfrm>
+            <a:off x="2331720" y="5975604"/>
+            <a:ext cx="219456" cy="118872"/>
           </a:xfrm>
           <a:prstGeom prst="roundRect">
             <a:avLst/>
@@ -17978,14 +21032,14 @@
       </p:sp>
       <p:sp>
         <p:nvSpPr>
-          <p:cNvPr id="101" name="Rectangle 100"/>
-          <p:cNvSpPr/>
-          <p:nvPr/>
-        </p:nvSpPr>
-        <p:spPr>
-          <a:xfrm>
-            <a:off x="3063240" y="5934456"/>
-            <a:ext cx="1005840" cy="201168"/>
+          <p:cNvPr id="121" name="Rectangle 120"/>
+          <p:cNvSpPr/>
+          <p:nvPr/>
+        </p:nvSpPr>
+        <p:spPr>
+          <a:xfrm>
+            <a:off x="2578608" y="5934456"/>
+            <a:ext cx="868680" cy="201168"/>
           </a:xfrm>
           <a:prstGeom prst="rect">
             <a:avLst/>
@@ -18028,14 +21082,14 @@
       </p:sp>
       <p:sp>
         <p:nvSpPr>
-          <p:cNvPr id="102" name="Rounded Rectangle 101"/>
-          <p:cNvSpPr/>
-          <p:nvPr/>
-        </p:nvSpPr>
-        <p:spPr>
-          <a:xfrm>
-            <a:off x="4169664" y="5975604"/>
-            <a:ext cx="274320" cy="118872"/>
+          <p:cNvPr id="122" name="Rounded Rectangle 121"/>
+          <p:cNvSpPr/>
+          <p:nvPr/>
+        </p:nvSpPr>
+        <p:spPr>
+          <a:xfrm>
+            <a:off x="3483864" y="5975604"/>
+            <a:ext cx="219456" cy="118872"/>
           </a:xfrm>
           <a:prstGeom prst="roundRect">
             <a:avLst/>
@@ -18074,14 +21128,14 @@
       </p:sp>
       <p:sp>
         <p:nvSpPr>
-          <p:cNvPr id="103" name="Rectangle 102"/>
-          <p:cNvSpPr/>
-          <p:nvPr/>
-        </p:nvSpPr>
-        <p:spPr>
-          <a:xfrm>
-            <a:off x="4480560" y="5934456"/>
-            <a:ext cx="1005840" cy="201168"/>
+          <p:cNvPr id="123" name="Rectangle 122"/>
+          <p:cNvSpPr/>
+          <p:nvPr/>
+        </p:nvSpPr>
+        <p:spPr>
+          <a:xfrm>
+            <a:off x="3730752" y="5934456"/>
+            <a:ext cx="868680" cy="201168"/>
           </a:xfrm>
           <a:prstGeom prst="rect">
             <a:avLst/>
@@ -18124,14 +21178,110 @@
       </p:sp>
       <p:sp>
         <p:nvSpPr>
-          <p:cNvPr id="104" name="Rounded Rectangle 103"/>
-          <p:cNvSpPr/>
-          <p:nvPr/>
-        </p:nvSpPr>
-        <p:spPr>
-          <a:xfrm>
-            <a:off x="5586984" y="5975604"/>
-            <a:ext cx="274320" cy="118872"/>
+          <p:cNvPr id="124" name="Rounded Rectangle 123"/>
+          <p:cNvSpPr/>
+          <p:nvPr/>
+        </p:nvSpPr>
+        <p:spPr>
+          <a:xfrm>
+            <a:off x="4636008" y="5975604"/>
+            <a:ext cx="219456" cy="118872"/>
+          </a:xfrm>
+          <a:prstGeom prst="roundRect">
+            <a:avLst/>
+          </a:prstGeom>
+          <a:solidFill>
+            <a:srgbClr val="E2D1F0"/>
+          </a:solidFill>
+          <a:ln w="12700">
+            <a:solidFill>
+              <a:srgbClr val="9B7FC7"/>
+            </a:solidFill>
+          </a:ln>
+          <a:effectLst/>
+        </p:spPr>
+        <p:style>
+          <a:lnRef idx="1">
+            <a:schemeClr val="accent1"/>
+          </a:lnRef>
+          <a:fillRef idx="3">
+            <a:schemeClr val="accent1"/>
+          </a:fillRef>
+          <a:effectRef idx="2">
+            <a:schemeClr val="accent1"/>
+          </a:effectRef>
+          <a:fontRef idx="minor">
+            <a:schemeClr val="lt1"/>
+          </a:fontRef>
+        </p:style>
+        <p:txBody>
+          <a:bodyPr rtlCol="0" anchor="ctr" wrap="square" lIns="18000" rIns="18000" tIns="9000" bIns="9000"/>
+          <a:lstStyle/>
+          <a:p>
+            <a:pPr algn="ctr"/>
+          </a:p>
+        </p:txBody>
+      </p:sp>
+      <p:sp>
+        <p:nvSpPr>
+          <p:cNvPr id="125" name="Rectangle 124"/>
+          <p:cNvSpPr/>
+          <p:nvPr/>
+        </p:nvSpPr>
+        <p:spPr>
+          <a:xfrm>
+            <a:off x="4882896" y="5934456"/>
+            <a:ext cx="868680" cy="201168"/>
+          </a:xfrm>
+          <a:prstGeom prst="rect">
+            <a:avLst/>
+          </a:prstGeom>
+          <a:noFill/>
+          <a:ln>
+            <a:noFill/>
+          </a:ln>
+          <a:effectLst/>
+        </p:spPr>
+        <p:style>
+          <a:lnRef idx="1">
+            <a:schemeClr val="accent1"/>
+          </a:lnRef>
+          <a:fillRef idx="3">
+            <a:schemeClr val="accent1"/>
+          </a:fillRef>
+          <a:effectRef idx="2">
+            <a:schemeClr val="accent1"/>
+          </a:effectRef>
+          <a:fontRef idx="minor">
+            <a:schemeClr val="lt1"/>
+          </a:fontRef>
+        </p:style>
+        <p:txBody>
+          <a:bodyPr rtlCol="0" anchor="ctr" wrap="square" lIns="18000" rIns="18000" tIns="9000" bIns="9000"/>
+          <a:lstStyle/>
+          <a:p>
+            <a:pPr algn="l"/>
+            <a:r>
+              <a:rPr sz="800" b="0">
+                <a:solidFill>
+                  <a:srgbClr val="333333"/>
+                </a:solidFill>
+              </a:rPr>
+              <a:t>тестирование</a:t>
+            </a:r>
+          </a:p>
+        </p:txBody>
+      </p:sp>
+      <p:sp>
+        <p:nvSpPr>
+          <p:cNvPr id="126" name="Rounded Rectangle 125"/>
+          <p:cNvSpPr/>
+          <p:nvPr/>
+        </p:nvSpPr>
+        <p:spPr>
+          <a:xfrm>
+            <a:off x="5788152" y="5975604"/>
+            <a:ext cx="219456" cy="118872"/>
           </a:xfrm>
           <a:prstGeom prst="roundRect">
             <a:avLst/>
@@ -18170,14 +21320,14 @@
       </p:sp>
       <p:sp>
         <p:nvSpPr>
-          <p:cNvPr id="105" name="Rectangle 104"/>
-          <p:cNvSpPr/>
-          <p:nvPr/>
-        </p:nvSpPr>
-        <p:spPr>
-          <a:xfrm>
-            <a:off x="5897880" y="5934456"/>
-            <a:ext cx="1005840" cy="201168"/>
+          <p:cNvPr id="127" name="Rectangle 126"/>
+          <p:cNvSpPr/>
+          <p:nvPr/>
+        </p:nvSpPr>
+        <p:spPr>
+          <a:xfrm>
+            <a:off x="6035040" y="5934456"/>
+            <a:ext cx="868680" cy="201168"/>
           </a:xfrm>
           <a:prstGeom prst="rect">
             <a:avLst/>
@@ -18220,14 +21370,14 @@
       </p:sp>
       <p:sp>
         <p:nvSpPr>
-          <p:cNvPr id="106" name="Rounded Rectangle 105"/>
-          <p:cNvSpPr/>
-          <p:nvPr/>
-        </p:nvSpPr>
-        <p:spPr>
-          <a:xfrm>
-            <a:off x="7004304" y="5975604"/>
-            <a:ext cx="274320" cy="118872"/>
+          <p:cNvPr id="128" name="Rounded Rectangle 127"/>
+          <p:cNvSpPr/>
+          <p:nvPr/>
+        </p:nvSpPr>
+        <p:spPr>
+          <a:xfrm>
+            <a:off x="6940296" y="5975604"/>
+            <a:ext cx="219456" cy="118872"/>
           </a:xfrm>
           <a:prstGeom prst="roundRect">
             <a:avLst/>
@@ -18266,14 +21416,14 @@
       </p:sp>
       <p:sp>
         <p:nvSpPr>
-          <p:cNvPr id="107" name="Rectangle 106"/>
-          <p:cNvSpPr/>
-          <p:nvPr/>
-        </p:nvSpPr>
-        <p:spPr>
-          <a:xfrm>
-            <a:off x="7315200" y="5934456"/>
-            <a:ext cx="1005840" cy="201168"/>
+          <p:cNvPr id="129" name="Rectangle 128"/>
+          <p:cNvSpPr/>
+          <p:nvPr/>
+        </p:nvSpPr>
+        <p:spPr>
+          <a:xfrm>
+            <a:off x="7187184" y="5934456"/>
+            <a:ext cx="868680" cy="201168"/>
           </a:xfrm>
           <a:prstGeom prst="rect">
             <a:avLst/>
@@ -18310,6 +21460,198 @@
                 </a:solidFill>
               </a:rPr>
               <a:t>отпуск</a:t>
+            </a:r>
+          </a:p>
+        </p:txBody>
+      </p:sp>
+      <p:sp>
+        <p:nvSpPr>
+          <p:cNvPr id="130" name="Pentagon 129"/>
+          <p:cNvSpPr/>
+          <p:nvPr/>
+        </p:nvSpPr>
+        <p:spPr>
+          <a:xfrm>
+            <a:off x="8092440" y="5975604"/>
+            <a:ext cx="219456" cy="118872"/>
+          </a:xfrm>
+          <a:prstGeom prst="homePlate">
+            <a:avLst/>
+          </a:prstGeom>
+          <a:solidFill>
+            <a:srgbClr val="4472C4"/>
+          </a:solidFill>
+          <a:ln w="12700">
+            <a:solidFill>
+              <a:srgbClr val="2F5597"/>
+            </a:solidFill>
+          </a:ln>
+          <a:effectLst/>
+        </p:spPr>
+        <p:style>
+          <a:lnRef idx="1">
+            <a:schemeClr val="accent1"/>
+          </a:lnRef>
+          <a:fillRef idx="3">
+            <a:schemeClr val="accent1"/>
+          </a:fillRef>
+          <a:effectRef idx="2">
+            <a:schemeClr val="accent1"/>
+          </a:effectRef>
+          <a:fontRef idx="minor">
+            <a:schemeClr val="lt1"/>
+          </a:fontRef>
+        </p:style>
+        <p:txBody>
+          <a:bodyPr rtlCol="0" anchor="ctr" wrap="square" lIns="18000" rIns="18000" tIns="9000" bIns="9000"/>
+          <a:lstStyle/>
+          <a:p>
+            <a:pPr algn="ctr"/>
+          </a:p>
+        </p:txBody>
+      </p:sp>
+      <p:sp>
+        <p:nvSpPr>
+          <p:cNvPr id="131" name="Rectangle 130"/>
+          <p:cNvSpPr/>
+          <p:nvPr/>
+        </p:nvSpPr>
+        <p:spPr>
+          <a:xfrm>
+            <a:off x="8339328" y="5934456"/>
+            <a:ext cx="868680" cy="201168"/>
+          </a:xfrm>
+          <a:prstGeom prst="rect">
+            <a:avLst/>
+          </a:prstGeom>
+          <a:noFill/>
+          <a:ln>
+            <a:noFill/>
+          </a:ln>
+          <a:effectLst/>
+        </p:spPr>
+        <p:style>
+          <a:lnRef idx="1">
+            <a:schemeClr val="accent1"/>
+          </a:lnRef>
+          <a:fillRef idx="3">
+            <a:schemeClr val="accent1"/>
+          </a:fillRef>
+          <a:effectRef idx="2">
+            <a:schemeClr val="accent1"/>
+          </a:effectRef>
+          <a:fontRef idx="minor">
+            <a:schemeClr val="lt1"/>
+          </a:fontRef>
+        </p:style>
+        <p:txBody>
+          <a:bodyPr rtlCol="0" anchor="ctr" wrap="square" lIns="18000" rIns="18000" tIns="9000" bIns="9000"/>
+          <a:lstStyle/>
+          <a:p>
+            <a:pPr algn="l"/>
+            <a:r>
+              <a:rPr sz="800" b="0">
+                <a:solidFill>
+                  <a:srgbClr val="333333"/>
+                </a:solidFill>
+              </a:rPr>
+              <a:t>старт</a:t>
+            </a:r>
+          </a:p>
+        </p:txBody>
+      </p:sp>
+      <p:sp>
+        <p:nvSpPr>
+          <p:cNvPr id="132" name="Pentagon 131"/>
+          <p:cNvSpPr/>
+          <p:nvPr/>
+        </p:nvSpPr>
+        <p:spPr>
+          <a:xfrm>
+            <a:off x="9244584" y="5975604"/>
+            <a:ext cx="219456" cy="118872"/>
+          </a:xfrm>
+          <a:prstGeom prst="homePlate">
+            <a:avLst/>
+          </a:prstGeom>
+          <a:solidFill>
+            <a:srgbClr val="C00000"/>
+          </a:solidFill>
+          <a:ln w="12700">
+            <a:solidFill>
+              <a:srgbClr val="7F0000"/>
+            </a:solidFill>
+          </a:ln>
+          <a:effectLst/>
+        </p:spPr>
+        <p:style>
+          <a:lnRef idx="1">
+            <a:schemeClr val="accent1"/>
+          </a:lnRef>
+          <a:fillRef idx="3">
+            <a:schemeClr val="accent1"/>
+          </a:fillRef>
+          <a:effectRef idx="2">
+            <a:schemeClr val="accent1"/>
+          </a:effectRef>
+          <a:fontRef idx="minor">
+            <a:schemeClr val="lt1"/>
+          </a:fontRef>
+        </p:style>
+        <p:txBody>
+          <a:bodyPr rtlCol="0" anchor="ctr" wrap="square" lIns="18000" rIns="18000" tIns="9000" bIns="9000"/>
+          <a:lstStyle/>
+          <a:p>
+            <a:pPr algn="ctr"/>
+          </a:p>
+        </p:txBody>
+      </p:sp>
+      <p:sp>
+        <p:nvSpPr>
+          <p:cNvPr id="133" name="Rectangle 132"/>
+          <p:cNvSpPr/>
+          <p:nvPr/>
+        </p:nvSpPr>
+        <p:spPr>
+          <a:xfrm>
+            <a:off x="9491472" y="5934456"/>
+            <a:ext cx="868680" cy="201168"/>
+          </a:xfrm>
+          <a:prstGeom prst="rect">
+            <a:avLst/>
+          </a:prstGeom>
+          <a:noFill/>
+          <a:ln>
+            <a:noFill/>
+          </a:ln>
+          <a:effectLst/>
+        </p:spPr>
+        <p:style>
+          <a:lnRef idx="1">
+            <a:schemeClr val="accent1"/>
+          </a:lnRef>
+          <a:fillRef idx="3">
+            <a:schemeClr val="accent1"/>
+          </a:fillRef>
+          <a:effectRef idx="2">
+            <a:schemeClr val="accent1"/>
+          </a:effectRef>
+          <a:fontRef idx="minor">
+            <a:schemeClr val="lt1"/>
+          </a:fontRef>
+        </p:style>
+        <p:txBody>
+          <a:bodyPr rtlCol="0" anchor="ctr" wrap="square" lIns="18000" rIns="18000" tIns="9000" bIns="9000"/>
+          <a:lstStyle/>
+          <a:p>
+            <a:pPr algn="l"/>
+            <a:r>
+              <a:rPr sz="800" b="0">
+                <a:solidFill>
+                  <a:srgbClr val="333333"/>
+                </a:solidFill>
+              </a:rPr>
+              <a:t>финиш</a:t>
             </a:r>
           </a:p>
         </p:txBody>
@@ -21527,6 +24869,168 @@
         </p:nvCxnSpPr>
         <p:spPr>
           <a:xfrm>
+            <a:off x="3886200" y="1161288"/>
+            <a:ext cx="0" cy="2176272"/>
+          </a:xfrm>
+          <a:prstGeom prst="line">
+            <a:avLst/>
+          </a:prstGeom>
+          <a:ln w="19050">
+            <a:solidFill>
+              <a:srgbClr val="2F5597"/>
+            </a:solidFill>
+          </a:ln>
+        </p:spPr>
+        <p:style>
+          <a:lnRef idx="2">
+            <a:schemeClr val="accent1"/>
+          </a:lnRef>
+          <a:fillRef idx="0">
+            <a:schemeClr val="accent1"/>
+          </a:fillRef>
+          <a:effectRef idx="1">
+            <a:schemeClr val="accent1"/>
+          </a:effectRef>
+          <a:fontRef idx="minor">
+            <a:schemeClr val="tx1"/>
+          </a:fontRef>
+        </p:style>
+      </p:cxnSp>
+      <p:sp>
+        <p:nvSpPr>
+          <p:cNvPr id="71" name="Pentagon 70"/>
+          <p:cNvSpPr/>
+          <p:nvPr/>
+        </p:nvSpPr>
+        <p:spPr>
+          <a:xfrm>
+            <a:off x="3886200" y="1161288"/>
+            <a:ext cx="146304" cy="137160"/>
+          </a:xfrm>
+          <a:prstGeom prst="homePlate">
+            <a:avLst/>
+          </a:prstGeom>
+          <a:solidFill>
+            <a:srgbClr val="4472C4"/>
+          </a:solidFill>
+          <a:ln w="12700">
+            <a:solidFill>
+              <a:srgbClr val="2F5597"/>
+            </a:solidFill>
+          </a:ln>
+          <a:effectLst/>
+        </p:spPr>
+        <p:style>
+          <a:lnRef idx="1">
+            <a:schemeClr val="accent1"/>
+          </a:lnRef>
+          <a:fillRef idx="3">
+            <a:schemeClr val="accent1"/>
+          </a:fillRef>
+          <a:effectRef idx="2">
+            <a:schemeClr val="accent1"/>
+          </a:effectRef>
+          <a:fontRef idx="minor">
+            <a:schemeClr val="lt1"/>
+          </a:fontRef>
+        </p:style>
+        <p:txBody>
+          <a:bodyPr rtlCol="0" anchor="ctr" wrap="square" lIns="18000" rIns="18000" tIns="9000" bIns="9000"/>
+          <a:lstStyle/>
+          <a:p>
+            <a:pPr algn="ctr"/>
+          </a:p>
+        </p:txBody>
+      </p:sp>
+      <p:cxnSp>
+        <p:nvCxnSpPr>
+          <p:cNvPr id="72" name="Connector 71"/>
+          <p:cNvCxnSpPr/>
+          <p:nvPr/>
+        </p:nvCxnSpPr>
+        <p:spPr>
+          <a:xfrm>
+            <a:off x="9809249" y="1161288"/>
+            <a:ext cx="0" cy="2176272"/>
+          </a:xfrm>
+          <a:prstGeom prst="line">
+            <a:avLst/>
+          </a:prstGeom>
+          <a:ln w="19050">
+            <a:solidFill>
+              <a:srgbClr val="7F0000"/>
+            </a:solidFill>
+          </a:ln>
+        </p:spPr>
+        <p:style>
+          <a:lnRef idx="2">
+            <a:schemeClr val="accent1"/>
+          </a:lnRef>
+          <a:fillRef idx="0">
+            <a:schemeClr val="accent1"/>
+          </a:fillRef>
+          <a:effectRef idx="1">
+            <a:schemeClr val="accent1"/>
+          </a:effectRef>
+          <a:fontRef idx="minor">
+            <a:schemeClr val="tx1"/>
+          </a:fontRef>
+        </p:style>
+      </p:cxnSp>
+      <p:sp>
+        <p:nvSpPr>
+          <p:cNvPr id="73" name="Pentagon 72"/>
+          <p:cNvSpPr/>
+          <p:nvPr/>
+        </p:nvSpPr>
+        <p:spPr>
+          <a:xfrm rot="10800000">
+            <a:off x="9662945" y="1161288"/>
+            <a:ext cx="146304" cy="137160"/>
+          </a:xfrm>
+          <a:prstGeom prst="homePlate">
+            <a:avLst/>
+          </a:prstGeom>
+          <a:solidFill>
+            <a:srgbClr val="C00000"/>
+          </a:solidFill>
+          <a:ln w="12700">
+            <a:solidFill>
+              <a:srgbClr val="7F0000"/>
+            </a:solidFill>
+          </a:ln>
+          <a:effectLst/>
+        </p:spPr>
+        <p:style>
+          <a:lnRef idx="1">
+            <a:schemeClr val="accent1"/>
+          </a:lnRef>
+          <a:fillRef idx="3">
+            <a:schemeClr val="accent1"/>
+          </a:fillRef>
+          <a:effectRef idx="2">
+            <a:schemeClr val="accent1"/>
+          </a:effectRef>
+          <a:fontRef idx="minor">
+            <a:schemeClr val="lt1"/>
+          </a:fontRef>
+        </p:style>
+        <p:txBody>
+          <a:bodyPr rtlCol="0" anchor="ctr" wrap="square" lIns="18000" rIns="18000" tIns="9000" bIns="9000"/>
+          <a:lstStyle/>
+          <a:p>
+            <a:pPr algn="ctr"/>
+          </a:p>
+        </p:txBody>
+      </p:sp>
+      <p:cxnSp>
+        <p:nvCxnSpPr>
+          <p:cNvPr id="74" name="Connector 73"/>
+          <p:cNvCxnSpPr/>
+          <p:nvPr/>
+        </p:nvCxnSpPr>
+        <p:spPr>
+          <a:xfrm>
             <a:off x="5770806" y="1161288"/>
             <a:ext cx="0" cy="2176272"/>
           </a:xfrm>
@@ -21554,9 +25058,187 @@
           </a:fontRef>
         </p:style>
       </p:cxnSp>
-      <p:sp>
-        <p:nvSpPr>
-          <p:cNvPr id="71" name="Diamond 70"/>
+      <p:cxnSp>
+        <p:nvCxnSpPr>
+          <p:cNvPr id="75" name="Connector 74"/>
+          <p:cNvCxnSpPr/>
+          <p:nvPr/>
+        </p:nvCxnSpPr>
+        <p:spPr>
+          <a:xfrm>
+            <a:off x="3886200" y="685800"/>
+            <a:ext cx="0" cy="2651760"/>
+          </a:xfrm>
+          <a:prstGeom prst="line">
+            <a:avLst/>
+          </a:prstGeom>
+          <a:ln w="19050">
+            <a:solidFill>
+              <a:srgbClr val="2F5597"/>
+            </a:solidFill>
+          </a:ln>
+        </p:spPr>
+        <p:style>
+          <a:lnRef idx="2">
+            <a:schemeClr val="accent1"/>
+          </a:lnRef>
+          <a:fillRef idx="0">
+            <a:schemeClr val="accent1"/>
+          </a:fillRef>
+          <a:effectRef idx="1">
+            <a:schemeClr val="accent1"/>
+          </a:effectRef>
+          <a:fontRef idx="minor">
+            <a:schemeClr val="tx1"/>
+          </a:fontRef>
+        </p:style>
+      </p:cxnSp>
+      <p:sp>
+        <p:nvSpPr>
+          <p:cNvPr id="76" name="Rectangle 75"/>
+          <p:cNvSpPr/>
+          <p:nvPr/>
+        </p:nvSpPr>
+        <p:spPr>
+          <a:xfrm>
+            <a:off x="3886200" y="685800"/>
+            <a:ext cx="566928" cy="256032"/>
+          </a:xfrm>
+          <a:prstGeom prst="rect">
+            <a:avLst/>
+          </a:prstGeom>
+          <a:solidFill>
+            <a:srgbClr val="4472C4"/>
+          </a:solidFill>
+          <a:ln w="9525">
+            <a:solidFill>
+              <a:srgbClr val="2F5597"/>
+            </a:solidFill>
+          </a:ln>
+          <a:effectLst/>
+        </p:spPr>
+        <p:style>
+          <a:lnRef idx="1">
+            <a:schemeClr val="accent1"/>
+          </a:lnRef>
+          <a:fillRef idx="3">
+            <a:schemeClr val="accent1"/>
+          </a:fillRef>
+          <a:effectRef idx="2">
+            <a:schemeClr val="accent1"/>
+          </a:effectRef>
+          <a:fontRef idx="minor">
+            <a:schemeClr val="lt1"/>
+          </a:fontRef>
+        </p:style>
+        <p:txBody>
+          <a:bodyPr rtlCol="0" anchor="ctr" wrap="square" lIns="18000" rIns="18000" tIns="9000" bIns="9000"/>
+          <a:lstStyle/>
+          <a:p>
+            <a:pPr algn="l"/>
+            <a:r>
+              <a:rPr sz="800" b="1">
+                <a:solidFill>
+                  <a:srgbClr val="FFFFFF"/>
+                </a:solidFill>
+              </a:rPr>
+              <a:t>⚑ Старт</a:t>
+            </a:r>
+          </a:p>
+        </p:txBody>
+      </p:sp>
+      <p:cxnSp>
+        <p:nvCxnSpPr>
+          <p:cNvPr id="77" name="Connector 76"/>
+          <p:cNvCxnSpPr/>
+          <p:nvPr/>
+        </p:nvCxnSpPr>
+        <p:spPr>
+          <a:xfrm>
+            <a:off x="11963085" y="685800"/>
+            <a:ext cx="0" cy="2651760"/>
+          </a:xfrm>
+          <a:prstGeom prst="line">
+            <a:avLst/>
+          </a:prstGeom>
+          <a:ln w="19050">
+            <a:solidFill>
+              <a:srgbClr val="7F0000"/>
+            </a:solidFill>
+          </a:ln>
+        </p:spPr>
+        <p:style>
+          <a:lnRef idx="2">
+            <a:schemeClr val="accent1"/>
+          </a:lnRef>
+          <a:fillRef idx="0">
+            <a:schemeClr val="accent1"/>
+          </a:fillRef>
+          <a:effectRef idx="1">
+            <a:schemeClr val="accent1"/>
+          </a:effectRef>
+          <a:fontRef idx="minor">
+            <a:schemeClr val="tx1"/>
+          </a:fontRef>
+        </p:style>
+      </p:cxnSp>
+      <p:sp>
+        <p:nvSpPr>
+          <p:cNvPr id="78" name="Rectangle 77"/>
+          <p:cNvSpPr/>
+          <p:nvPr/>
+        </p:nvSpPr>
+        <p:spPr>
+          <a:xfrm>
+            <a:off x="11396157" y="685800"/>
+            <a:ext cx="566928" cy="256032"/>
+          </a:xfrm>
+          <a:prstGeom prst="rect">
+            <a:avLst/>
+          </a:prstGeom>
+          <a:solidFill>
+            <a:srgbClr val="C00000"/>
+          </a:solidFill>
+          <a:ln w="9525">
+            <a:solidFill>
+              <a:srgbClr val="7F0000"/>
+            </a:solidFill>
+          </a:ln>
+          <a:effectLst/>
+        </p:spPr>
+        <p:style>
+          <a:lnRef idx="1">
+            <a:schemeClr val="accent1"/>
+          </a:lnRef>
+          <a:fillRef idx="3">
+            <a:schemeClr val="accent1"/>
+          </a:fillRef>
+          <a:effectRef idx="2">
+            <a:schemeClr val="accent1"/>
+          </a:effectRef>
+          <a:fontRef idx="minor">
+            <a:schemeClr val="lt1"/>
+          </a:fontRef>
+        </p:style>
+        <p:txBody>
+          <a:bodyPr rtlCol="0" anchor="ctr" wrap="square" lIns="18000" rIns="18000" tIns="9000" bIns="9000"/>
+          <a:lstStyle/>
+          <a:p>
+            <a:pPr algn="r"/>
+            <a:r>
+              <a:rPr sz="800" b="1">
+                <a:solidFill>
+                  <a:srgbClr val="FFFFFF"/>
+                </a:solidFill>
+              </a:rPr>
+              <a:t>Финиш ⚑</a:t>
+            </a:r>
+          </a:p>
+        </p:txBody>
+      </p:sp>
+      <p:sp>
+        <p:nvSpPr>
+          <p:cNvPr id="79" name="Diamond 78"/>
           <p:cNvSpPr/>
           <p:nvPr/>
         </p:nvSpPr>
@@ -21602,14 +25284,14 @@
       </p:sp>
       <p:sp>
         <p:nvSpPr>
-          <p:cNvPr id="72" name="Rectangle 71"/>
-          <p:cNvSpPr/>
-          <p:nvPr/>
-        </p:nvSpPr>
-        <p:spPr>
-          <a:xfrm>
-            <a:off x="384048" y="3447288"/>
-            <a:ext cx="1005840" cy="201168"/>
+          <p:cNvPr id="80" name="Rectangle 79"/>
+          <p:cNvSpPr/>
+          <p:nvPr/>
+        </p:nvSpPr>
+        <p:spPr>
+          <a:xfrm>
+            <a:off x="374904" y="3447288"/>
+            <a:ext cx="868680" cy="201168"/>
           </a:xfrm>
           <a:prstGeom prst="rect">
             <a:avLst/>
@@ -21652,13 +25334,13 @@
       </p:sp>
       <p:sp>
         <p:nvSpPr>
-          <p:cNvPr id="73" name="Diamond 72"/>
-          <p:cNvSpPr/>
-          <p:nvPr/>
-        </p:nvSpPr>
-        <p:spPr>
-          <a:xfrm>
-            <a:off x="1490472" y="3488436"/>
+          <p:cNvPr id="81" name="Diamond 80"/>
+          <p:cNvSpPr/>
+          <p:nvPr/>
+        </p:nvSpPr>
+        <p:spPr>
+          <a:xfrm>
+            <a:off x="1280160" y="3488436"/>
             <a:ext cx="118872" cy="118872"/>
           </a:xfrm>
           <a:prstGeom prst="diamond">
@@ -21698,14 +25380,14 @@
       </p:sp>
       <p:sp>
         <p:nvSpPr>
-          <p:cNvPr id="74" name="Rectangle 73"/>
-          <p:cNvSpPr/>
-          <p:nvPr/>
-        </p:nvSpPr>
-        <p:spPr>
-          <a:xfrm>
-            <a:off x="1645920" y="3447288"/>
-            <a:ext cx="1005840" cy="201168"/>
+          <p:cNvPr id="82" name="Rectangle 81"/>
+          <p:cNvSpPr/>
+          <p:nvPr/>
+        </p:nvSpPr>
+        <p:spPr>
+          <a:xfrm>
+            <a:off x="1426464" y="3447288"/>
+            <a:ext cx="868680" cy="201168"/>
           </a:xfrm>
           <a:prstGeom prst="rect">
             <a:avLst/>
@@ -21748,14 +25430,14 @@
       </p:sp>
       <p:sp>
         <p:nvSpPr>
-          <p:cNvPr id="75" name="Rounded Rectangle 74"/>
-          <p:cNvSpPr/>
-          <p:nvPr/>
-        </p:nvSpPr>
-        <p:spPr>
-          <a:xfrm>
-            <a:off x="2752344" y="3488436"/>
-            <a:ext cx="274320" cy="118872"/>
+          <p:cNvPr id="83" name="Rounded Rectangle 82"/>
+          <p:cNvSpPr/>
+          <p:nvPr/>
+        </p:nvSpPr>
+        <p:spPr>
+          <a:xfrm>
+            <a:off x="2331720" y="3488436"/>
+            <a:ext cx="219456" cy="118872"/>
           </a:xfrm>
           <a:prstGeom prst="roundRect">
             <a:avLst/>
@@ -21794,14 +25476,14 @@
       </p:sp>
       <p:sp>
         <p:nvSpPr>
-          <p:cNvPr id="76" name="Rectangle 75"/>
-          <p:cNvSpPr/>
-          <p:nvPr/>
-        </p:nvSpPr>
-        <p:spPr>
-          <a:xfrm>
-            <a:off x="3063240" y="3447288"/>
-            <a:ext cx="1005840" cy="201168"/>
+          <p:cNvPr id="84" name="Rectangle 83"/>
+          <p:cNvSpPr/>
+          <p:nvPr/>
+        </p:nvSpPr>
+        <p:spPr>
+          <a:xfrm>
+            <a:off x="2578608" y="3447288"/>
+            <a:ext cx="868680" cy="201168"/>
           </a:xfrm>
           <a:prstGeom prst="rect">
             <a:avLst/>
@@ -21844,14 +25526,14 @@
       </p:sp>
       <p:sp>
         <p:nvSpPr>
-          <p:cNvPr id="77" name="Rounded Rectangle 76"/>
-          <p:cNvSpPr/>
-          <p:nvPr/>
-        </p:nvSpPr>
-        <p:spPr>
-          <a:xfrm>
-            <a:off x="4169664" y="3488436"/>
-            <a:ext cx="274320" cy="118872"/>
+          <p:cNvPr id="85" name="Rounded Rectangle 84"/>
+          <p:cNvSpPr/>
+          <p:nvPr/>
+        </p:nvSpPr>
+        <p:spPr>
+          <a:xfrm>
+            <a:off x="3483864" y="3488436"/>
+            <a:ext cx="219456" cy="118872"/>
           </a:xfrm>
           <a:prstGeom prst="roundRect">
             <a:avLst/>
@@ -21890,14 +25572,14 @@
       </p:sp>
       <p:sp>
         <p:nvSpPr>
-          <p:cNvPr id="78" name="Rectangle 77"/>
-          <p:cNvSpPr/>
-          <p:nvPr/>
-        </p:nvSpPr>
-        <p:spPr>
-          <a:xfrm>
-            <a:off x="4480560" y="3447288"/>
-            <a:ext cx="1005840" cy="201168"/>
+          <p:cNvPr id="86" name="Rectangle 85"/>
+          <p:cNvSpPr/>
+          <p:nvPr/>
+        </p:nvSpPr>
+        <p:spPr>
+          <a:xfrm>
+            <a:off x="3730752" y="3447288"/>
+            <a:ext cx="868680" cy="201168"/>
           </a:xfrm>
           <a:prstGeom prst="rect">
             <a:avLst/>
@@ -21940,14 +25622,110 @@
       </p:sp>
       <p:sp>
         <p:nvSpPr>
-          <p:cNvPr id="79" name="Rounded Rectangle 78"/>
-          <p:cNvSpPr/>
-          <p:nvPr/>
-        </p:nvSpPr>
-        <p:spPr>
-          <a:xfrm>
-            <a:off x="5586984" y="3488436"/>
-            <a:ext cx="274320" cy="118872"/>
+          <p:cNvPr id="87" name="Rounded Rectangle 86"/>
+          <p:cNvSpPr/>
+          <p:nvPr/>
+        </p:nvSpPr>
+        <p:spPr>
+          <a:xfrm>
+            <a:off x="4636008" y="3488436"/>
+            <a:ext cx="219456" cy="118872"/>
+          </a:xfrm>
+          <a:prstGeom prst="roundRect">
+            <a:avLst/>
+          </a:prstGeom>
+          <a:solidFill>
+            <a:srgbClr val="E2D1F0"/>
+          </a:solidFill>
+          <a:ln w="12700">
+            <a:solidFill>
+              <a:srgbClr val="9B7FC7"/>
+            </a:solidFill>
+          </a:ln>
+          <a:effectLst/>
+        </p:spPr>
+        <p:style>
+          <a:lnRef idx="1">
+            <a:schemeClr val="accent1"/>
+          </a:lnRef>
+          <a:fillRef idx="3">
+            <a:schemeClr val="accent1"/>
+          </a:fillRef>
+          <a:effectRef idx="2">
+            <a:schemeClr val="accent1"/>
+          </a:effectRef>
+          <a:fontRef idx="minor">
+            <a:schemeClr val="lt1"/>
+          </a:fontRef>
+        </p:style>
+        <p:txBody>
+          <a:bodyPr rtlCol="0" anchor="ctr" wrap="square" lIns="18000" rIns="18000" tIns="9000" bIns="9000"/>
+          <a:lstStyle/>
+          <a:p>
+            <a:pPr algn="ctr"/>
+          </a:p>
+        </p:txBody>
+      </p:sp>
+      <p:sp>
+        <p:nvSpPr>
+          <p:cNvPr id="88" name="Rectangle 87"/>
+          <p:cNvSpPr/>
+          <p:nvPr/>
+        </p:nvSpPr>
+        <p:spPr>
+          <a:xfrm>
+            <a:off x="4882896" y="3447288"/>
+            <a:ext cx="868680" cy="201168"/>
+          </a:xfrm>
+          <a:prstGeom prst="rect">
+            <a:avLst/>
+          </a:prstGeom>
+          <a:noFill/>
+          <a:ln>
+            <a:noFill/>
+          </a:ln>
+          <a:effectLst/>
+        </p:spPr>
+        <p:style>
+          <a:lnRef idx="1">
+            <a:schemeClr val="accent1"/>
+          </a:lnRef>
+          <a:fillRef idx="3">
+            <a:schemeClr val="accent1"/>
+          </a:fillRef>
+          <a:effectRef idx="2">
+            <a:schemeClr val="accent1"/>
+          </a:effectRef>
+          <a:fontRef idx="minor">
+            <a:schemeClr val="lt1"/>
+          </a:fontRef>
+        </p:style>
+        <p:txBody>
+          <a:bodyPr rtlCol="0" anchor="ctr" wrap="square" lIns="18000" rIns="18000" tIns="9000" bIns="9000"/>
+          <a:lstStyle/>
+          <a:p>
+            <a:pPr algn="l"/>
+            <a:r>
+              <a:rPr sz="800" b="0">
+                <a:solidFill>
+                  <a:srgbClr val="333333"/>
+                </a:solidFill>
+              </a:rPr>
+              <a:t>тестирование</a:t>
+            </a:r>
+          </a:p>
+        </p:txBody>
+      </p:sp>
+      <p:sp>
+        <p:nvSpPr>
+          <p:cNvPr id="89" name="Rounded Rectangle 88"/>
+          <p:cNvSpPr/>
+          <p:nvPr/>
+        </p:nvSpPr>
+        <p:spPr>
+          <a:xfrm>
+            <a:off x="5788152" y="3488436"/>
+            <a:ext cx="219456" cy="118872"/>
           </a:xfrm>
           <a:prstGeom prst="roundRect">
             <a:avLst/>
@@ -21986,14 +25764,14 @@
       </p:sp>
       <p:sp>
         <p:nvSpPr>
-          <p:cNvPr id="80" name="Rectangle 79"/>
-          <p:cNvSpPr/>
-          <p:nvPr/>
-        </p:nvSpPr>
-        <p:spPr>
-          <a:xfrm>
-            <a:off x="5897880" y="3447288"/>
-            <a:ext cx="1005840" cy="201168"/>
+          <p:cNvPr id="90" name="Rectangle 89"/>
+          <p:cNvSpPr/>
+          <p:nvPr/>
+        </p:nvSpPr>
+        <p:spPr>
+          <a:xfrm>
+            <a:off x="6035040" y="3447288"/>
+            <a:ext cx="868680" cy="201168"/>
           </a:xfrm>
           <a:prstGeom prst="rect">
             <a:avLst/>
@@ -22036,14 +25814,14 @@
       </p:sp>
       <p:sp>
         <p:nvSpPr>
-          <p:cNvPr id="81" name="Rounded Rectangle 80"/>
-          <p:cNvSpPr/>
-          <p:nvPr/>
-        </p:nvSpPr>
-        <p:spPr>
-          <a:xfrm>
-            <a:off x="7004304" y="3488436"/>
-            <a:ext cx="274320" cy="118872"/>
+          <p:cNvPr id="91" name="Rounded Rectangle 90"/>
+          <p:cNvSpPr/>
+          <p:nvPr/>
+        </p:nvSpPr>
+        <p:spPr>
+          <a:xfrm>
+            <a:off x="6940296" y="3488436"/>
+            <a:ext cx="219456" cy="118872"/>
           </a:xfrm>
           <a:prstGeom prst="roundRect">
             <a:avLst/>
@@ -22082,14 +25860,14 @@
       </p:sp>
       <p:sp>
         <p:nvSpPr>
-          <p:cNvPr id="82" name="Rectangle 81"/>
-          <p:cNvSpPr/>
-          <p:nvPr/>
-        </p:nvSpPr>
-        <p:spPr>
-          <a:xfrm>
-            <a:off x="7315200" y="3447288"/>
-            <a:ext cx="1005840" cy="201168"/>
+          <p:cNvPr id="92" name="Rectangle 91"/>
+          <p:cNvSpPr/>
+          <p:nvPr/>
+        </p:nvSpPr>
+        <p:spPr>
+          <a:xfrm>
+            <a:off x="7187184" y="3447288"/>
+            <a:ext cx="868680" cy="201168"/>
           </a:xfrm>
           <a:prstGeom prst="rect">
             <a:avLst/>
@@ -22126,6 +25904,198 @@
                 </a:solidFill>
               </a:rPr>
               <a:t>отпуск</a:t>
+            </a:r>
+          </a:p>
+        </p:txBody>
+      </p:sp>
+      <p:sp>
+        <p:nvSpPr>
+          <p:cNvPr id="93" name="Pentagon 92"/>
+          <p:cNvSpPr/>
+          <p:nvPr/>
+        </p:nvSpPr>
+        <p:spPr>
+          <a:xfrm>
+            <a:off x="8092440" y="3488436"/>
+            <a:ext cx="219456" cy="118872"/>
+          </a:xfrm>
+          <a:prstGeom prst="homePlate">
+            <a:avLst/>
+          </a:prstGeom>
+          <a:solidFill>
+            <a:srgbClr val="4472C4"/>
+          </a:solidFill>
+          <a:ln w="12700">
+            <a:solidFill>
+              <a:srgbClr val="2F5597"/>
+            </a:solidFill>
+          </a:ln>
+          <a:effectLst/>
+        </p:spPr>
+        <p:style>
+          <a:lnRef idx="1">
+            <a:schemeClr val="accent1"/>
+          </a:lnRef>
+          <a:fillRef idx="3">
+            <a:schemeClr val="accent1"/>
+          </a:fillRef>
+          <a:effectRef idx="2">
+            <a:schemeClr val="accent1"/>
+          </a:effectRef>
+          <a:fontRef idx="minor">
+            <a:schemeClr val="lt1"/>
+          </a:fontRef>
+        </p:style>
+        <p:txBody>
+          <a:bodyPr rtlCol="0" anchor="ctr" wrap="square" lIns="18000" rIns="18000" tIns="9000" bIns="9000"/>
+          <a:lstStyle/>
+          <a:p>
+            <a:pPr algn="ctr"/>
+          </a:p>
+        </p:txBody>
+      </p:sp>
+      <p:sp>
+        <p:nvSpPr>
+          <p:cNvPr id="94" name="Rectangle 93"/>
+          <p:cNvSpPr/>
+          <p:nvPr/>
+        </p:nvSpPr>
+        <p:spPr>
+          <a:xfrm>
+            <a:off x="8339328" y="3447288"/>
+            <a:ext cx="868680" cy="201168"/>
+          </a:xfrm>
+          <a:prstGeom prst="rect">
+            <a:avLst/>
+          </a:prstGeom>
+          <a:noFill/>
+          <a:ln>
+            <a:noFill/>
+          </a:ln>
+          <a:effectLst/>
+        </p:spPr>
+        <p:style>
+          <a:lnRef idx="1">
+            <a:schemeClr val="accent1"/>
+          </a:lnRef>
+          <a:fillRef idx="3">
+            <a:schemeClr val="accent1"/>
+          </a:fillRef>
+          <a:effectRef idx="2">
+            <a:schemeClr val="accent1"/>
+          </a:effectRef>
+          <a:fontRef idx="minor">
+            <a:schemeClr val="lt1"/>
+          </a:fontRef>
+        </p:style>
+        <p:txBody>
+          <a:bodyPr rtlCol="0" anchor="ctr" wrap="square" lIns="18000" rIns="18000" tIns="9000" bIns="9000"/>
+          <a:lstStyle/>
+          <a:p>
+            <a:pPr algn="l"/>
+            <a:r>
+              <a:rPr sz="800" b="0">
+                <a:solidFill>
+                  <a:srgbClr val="333333"/>
+                </a:solidFill>
+              </a:rPr>
+              <a:t>старт</a:t>
+            </a:r>
+          </a:p>
+        </p:txBody>
+      </p:sp>
+      <p:sp>
+        <p:nvSpPr>
+          <p:cNvPr id="95" name="Pentagon 94"/>
+          <p:cNvSpPr/>
+          <p:nvPr/>
+        </p:nvSpPr>
+        <p:spPr>
+          <a:xfrm>
+            <a:off x="9244584" y="3488436"/>
+            <a:ext cx="219456" cy="118872"/>
+          </a:xfrm>
+          <a:prstGeom prst="homePlate">
+            <a:avLst/>
+          </a:prstGeom>
+          <a:solidFill>
+            <a:srgbClr val="C00000"/>
+          </a:solidFill>
+          <a:ln w="12700">
+            <a:solidFill>
+              <a:srgbClr val="7F0000"/>
+            </a:solidFill>
+          </a:ln>
+          <a:effectLst/>
+        </p:spPr>
+        <p:style>
+          <a:lnRef idx="1">
+            <a:schemeClr val="accent1"/>
+          </a:lnRef>
+          <a:fillRef idx="3">
+            <a:schemeClr val="accent1"/>
+          </a:fillRef>
+          <a:effectRef idx="2">
+            <a:schemeClr val="accent1"/>
+          </a:effectRef>
+          <a:fontRef idx="minor">
+            <a:schemeClr val="lt1"/>
+          </a:fontRef>
+        </p:style>
+        <p:txBody>
+          <a:bodyPr rtlCol="0" anchor="ctr" wrap="square" lIns="18000" rIns="18000" tIns="9000" bIns="9000"/>
+          <a:lstStyle/>
+          <a:p>
+            <a:pPr algn="ctr"/>
+          </a:p>
+        </p:txBody>
+      </p:sp>
+      <p:sp>
+        <p:nvSpPr>
+          <p:cNvPr id="96" name="Rectangle 95"/>
+          <p:cNvSpPr/>
+          <p:nvPr/>
+        </p:nvSpPr>
+        <p:spPr>
+          <a:xfrm>
+            <a:off x="9491472" y="3447288"/>
+            <a:ext cx="868680" cy="201168"/>
+          </a:xfrm>
+          <a:prstGeom prst="rect">
+            <a:avLst/>
+          </a:prstGeom>
+          <a:noFill/>
+          <a:ln>
+            <a:noFill/>
+          </a:ln>
+          <a:effectLst/>
+        </p:spPr>
+        <p:style>
+          <a:lnRef idx="1">
+            <a:schemeClr val="accent1"/>
+          </a:lnRef>
+          <a:fillRef idx="3">
+            <a:schemeClr val="accent1"/>
+          </a:fillRef>
+          <a:effectRef idx="2">
+            <a:schemeClr val="accent1"/>
+          </a:effectRef>
+          <a:fontRef idx="minor">
+            <a:schemeClr val="lt1"/>
+          </a:fontRef>
+        </p:style>
+        <p:txBody>
+          <a:bodyPr rtlCol="0" anchor="ctr" wrap="square" lIns="18000" rIns="18000" tIns="9000" bIns="9000"/>
+          <a:lstStyle/>
+          <a:p>
+            <a:pPr algn="l"/>
+            <a:r>
+              <a:rPr sz="800" b="0">
+                <a:solidFill>
+                  <a:srgbClr val="333333"/>
+                </a:solidFill>
+              </a:rPr>
+              <a:t>финиш</a:t>
             </a:r>
           </a:p>
         </p:txBody>

--- a/roadmap_2026Q3.pptx
+++ b/roadmap_2026Q3.pptx
@@ -7869,59 +7869,116 @@
           </a:p>
         </p:txBody>
       </p:sp>
-      <p:cxnSp>
-        <p:nvCxnSpPr>
-          <p:cNvPr id="105" name="Connector 104"/>
-          <p:cNvCxnSpPr/>
-          <p:nvPr/>
-        </p:nvCxnSpPr>
-        <p:spPr>
-          <a:xfrm>
-            <a:off x="3886200" y="1161288"/>
-            <a:ext cx="0" cy="932688"/>
-          </a:xfrm>
-          <a:prstGeom prst="line">
-            <a:avLst/>
-          </a:prstGeom>
-          <a:ln w="19050">
+      <p:sp>
+        <p:nvSpPr>
+          <p:cNvPr id="105" name="Diamond 104"/>
+          <p:cNvSpPr/>
+          <p:nvPr/>
+        </p:nvSpPr>
+        <p:spPr>
+          <a:xfrm>
+            <a:off x="3813048" y="1243584"/>
+            <a:ext cx="146304" cy="146304"/>
+          </a:xfrm>
+          <a:prstGeom prst="diamond">
+            <a:avLst/>
+          </a:prstGeom>
+          <a:solidFill>
+            <a:srgbClr val="4472C4"/>
+          </a:solidFill>
+          <a:ln w="15875">
             <a:solidFill>
               <a:srgbClr val="2F5597"/>
             </a:solidFill>
           </a:ln>
-        </p:spPr>
-        <p:style>
-          <a:lnRef idx="2">
-            <a:schemeClr val="accent1"/>
-          </a:lnRef>
-          <a:fillRef idx="0">
-            <a:schemeClr val="accent1"/>
-          </a:fillRef>
-          <a:effectRef idx="1">
-            <a:schemeClr val="accent1"/>
-          </a:effectRef>
-          <a:fontRef idx="minor">
-            <a:schemeClr val="tx1"/>
-          </a:fontRef>
-        </p:style>
-      </p:cxnSp>
-      <p:sp>
-        <p:nvSpPr>
-          <p:cNvPr id="106" name="Pentagon 105"/>
-          <p:cNvSpPr/>
-          <p:nvPr/>
-        </p:nvSpPr>
-        <p:spPr>
-          <a:xfrm>
-            <a:off x="3886200" y="1161288"/>
-            <a:ext cx="146304" cy="137160"/>
-          </a:xfrm>
-          <a:prstGeom prst="homePlate">
+          <a:effectLst/>
+        </p:spPr>
+        <p:style>
+          <a:lnRef idx="1">
+            <a:schemeClr val="accent1"/>
+          </a:lnRef>
+          <a:fillRef idx="3">
+            <a:schemeClr val="accent1"/>
+          </a:fillRef>
+          <a:effectRef idx="2">
+            <a:schemeClr val="accent1"/>
+          </a:effectRef>
+          <a:fontRef idx="minor">
+            <a:schemeClr val="lt1"/>
+          </a:fontRef>
+        </p:style>
+        <p:txBody>
+          <a:bodyPr rtlCol="0" anchor="ctr" wrap="square" lIns="18000" rIns="18000" tIns="9000" bIns="9000"/>
+          <a:lstStyle/>
+          <a:p>
+            <a:pPr algn="ctr"/>
+          </a:p>
+        </p:txBody>
+      </p:sp>
+      <p:sp>
+        <p:nvSpPr>
+          <p:cNvPr id="106" name="Diamond 105"/>
+          <p:cNvSpPr/>
+          <p:nvPr/>
+        </p:nvSpPr>
+        <p:spPr>
+          <a:xfrm>
+            <a:off x="5966884" y="1243584"/>
+            <a:ext cx="146304" cy="146304"/>
+          </a:xfrm>
+          <a:prstGeom prst="diamond">
+            <a:avLst/>
+          </a:prstGeom>
+          <a:solidFill>
+            <a:srgbClr val="C00000"/>
+          </a:solidFill>
+          <a:ln w="15875">
+            <a:solidFill>
+              <a:srgbClr val="7F0000"/>
+            </a:solidFill>
+          </a:ln>
+          <a:effectLst/>
+        </p:spPr>
+        <p:style>
+          <a:lnRef idx="1">
+            <a:schemeClr val="accent1"/>
+          </a:lnRef>
+          <a:fillRef idx="3">
+            <a:schemeClr val="accent1"/>
+          </a:fillRef>
+          <a:effectRef idx="2">
+            <a:schemeClr val="accent1"/>
+          </a:effectRef>
+          <a:fontRef idx="minor">
+            <a:schemeClr val="lt1"/>
+          </a:fontRef>
+        </p:style>
+        <p:txBody>
+          <a:bodyPr rtlCol="0" anchor="ctr" wrap="square" lIns="18000" rIns="18000" tIns="9000" bIns="9000"/>
+          <a:lstStyle/>
+          <a:p>
+            <a:pPr algn="ctr"/>
+          </a:p>
+        </p:txBody>
+      </p:sp>
+      <p:sp>
+        <p:nvSpPr>
+          <p:cNvPr id="107" name="Diamond 106"/>
+          <p:cNvSpPr/>
+          <p:nvPr/>
+        </p:nvSpPr>
+        <p:spPr>
+          <a:xfrm>
+            <a:off x="3813048" y="2176272"/>
+            <a:ext cx="146304" cy="146304"/>
+          </a:xfrm>
+          <a:prstGeom prst="diamond">
             <a:avLst/>
           </a:prstGeom>
           <a:solidFill>
             <a:srgbClr val="4472C4"/>
           </a:solidFill>
-          <a:ln w="12700">
+          <a:ln w="15875">
             <a:solidFill>
               <a:srgbClr val="2F5597"/>
             </a:solidFill>
@@ -7950,59 +8007,116 @@
           </a:p>
         </p:txBody>
       </p:sp>
-      <p:cxnSp>
-        <p:nvCxnSpPr>
-          <p:cNvPr id="107" name="Connector 106"/>
-          <p:cNvCxnSpPr/>
-          <p:nvPr/>
-        </p:nvCxnSpPr>
-        <p:spPr>
-          <a:xfrm>
-            <a:off x="6040036" y="1161288"/>
-            <a:ext cx="0" cy="932688"/>
-          </a:xfrm>
-          <a:prstGeom prst="line">
-            <a:avLst/>
-          </a:prstGeom>
-          <a:ln w="19050">
+      <p:sp>
+        <p:nvSpPr>
+          <p:cNvPr id="108" name="Diamond 107"/>
+          <p:cNvSpPr/>
+          <p:nvPr/>
+        </p:nvSpPr>
+        <p:spPr>
+          <a:xfrm>
+            <a:off x="7582261" y="2176272"/>
+            <a:ext cx="146304" cy="146304"/>
+          </a:xfrm>
+          <a:prstGeom prst="diamond">
+            <a:avLst/>
+          </a:prstGeom>
+          <a:solidFill>
+            <a:srgbClr val="C00000"/>
+          </a:solidFill>
+          <a:ln w="15875">
             <a:solidFill>
               <a:srgbClr val="7F0000"/>
             </a:solidFill>
           </a:ln>
-        </p:spPr>
-        <p:style>
-          <a:lnRef idx="2">
-            <a:schemeClr val="accent1"/>
-          </a:lnRef>
-          <a:fillRef idx="0">
-            <a:schemeClr val="accent1"/>
-          </a:fillRef>
-          <a:effectRef idx="1">
-            <a:schemeClr val="accent1"/>
-          </a:effectRef>
-          <a:fontRef idx="minor">
-            <a:schemeClr val="tx1"/>
-          </a:fontRef>
-        </p:style>
-      </p:cxnSp>
-      <p:sp>
-        <p:nvSpPr>
-          <p:cNvPr id="108" name="Pentagon 107"/>
-          <p:cNvSpPr/>
-          <p:nvPr/>
-        </p:nvSpPr>
-        <p:spPr>
-          <a:xfrm rot="10800000">
-            <a:off x="5893732" y="1161288"/>
-            <a:ext cx="146304" cy="137160"/>
-          </a:xfrm>
-          <a:prstGeom prst="homePlate">
+          <a:effectLst/>
+        </p:spPr>
+        <p:style>
+          <a:lnRef idx="1">
+            <a:schemeClr val="accent1"/>
+          </a:lnRef>
+          <a:fillRef idx="3">
+            <a:schemeClr val="accent1"/>
+          </a:fillRef>
+          <a:effectRef idx="2">
+            <a:schemeClr val="accent1"/>
+          </a:effectRef>
+          <a:fontRef idx="minor">
+            <a:schemeClr val="lt1"/>
+          </a:fontRef>
+        </p:style>
+        <p:txBody>
+          <a:bodyPr rtlCol="0" anchor="ctr" wrap="square" lIns="18000" rIns="18000" tIns="9000" bIns="9000"/>
+          <a:lstStyle/>
+          <a:p>
+            <a:pPr algn="ctr"/>
+          </a:p>
+        </p:txBody>
+      </p:sp>
+      <p:sp>
+        <p:nvSpPr>
+          <p:cNvPr id="109" name="Diamond 108"/>
+          <p:cNvSpPr/>
+          <p:nvPr/>
+        </p:nvSpPr>
+        <p:spPr>
+          <a:xfrm>
+            <a:off x="4351507" y="3419856"/>
+            <a:ext cx="146304" cy="146304"/>
+          </a:xfrm>
+          <a:prstGeom prst="diamond">
+            <a:avLst/>
+          </a:prstGeom>
+          <a:solidFill>
+            <a:srgbClr val="4472C4"/>
+          </a:solidFill>
+          <a:ln w="15875">
+            <a:solidFill>
+              <a:srgbClr val="2F5597"/>
+            </a:solidFill>
+          </a:ln>
+          <a:effectLst/>
+        </p:spPr>
+        <p:style>
+          <a:lnRef idx="1">
+            <a:schemeClr val="accent1"/>
+          </a:lnRef>
+          <a:fillRef idx="3">
+            <a:schemeClr val="accent1"/>
+          </a:fillRef>
+          <a:effectRef idx="2">
+            <a:schemeClr val="accent1"/>
+          </a:effectRef>
+          <a:fontRef idx="minor">
+            <a:schemeClr val="lt1"/>
+          </a:fontRef>
+        </p:style>
+        <p:txBody>
+          <a:bodyPr rtlCol="0" anchor="ctr" wrap="square" lIns="18000" rIns="18000" tIns="9000" bIns="9000"/>
+          <a:lstStyle/>
+          <a:p>
+            <a:pPr algn="ctr"/>
+          </a:p>
+        </p:txBody>
+      </p:sp>
+      <p:sp>
+        <p:nvSpPr>
+          <p:cNvPr id="110" name="Diamond 109"/>
+          <p:cNvSpPr/>
+          <p:nvPr/>
+        </p:nvSpPr>
+        <p:spPr>
+          <a:xfrm>
+            <a:off x="10274556" y="3419856"/>
+            <a:ext cx="146304" cy="146304"/>
+          </a:xfrm>
+          <a:prstGeom prst="diamond">
             <a:avLst/>
           </a:prstGeom>
           <a:solidFill>
             <a:srgbClr val="C00000"/>
           </a:solidFill>
-          <a:ln w="12700">
+          <a:ln w="15875">
             <a:solidFill>
               <a:srgbClr val="7F0000"/>
             </a:solidFill>
@@ -8031,59 +8145,116 @@
           </a:p>
         </p:txBody>
       </p:sp>
-      <p:cxnSp>
-        <p:nvCxnSpPr>
-          <p:cNvPr id="109" name="Connector 108"/>
-          <p:cNvCxnSpPr/>
-          <p:nvPr/>
-        </p:nvCxnSpPr>
-        <p:spPr>
-          <a:xfrm>
-            <a:off x="3886200" y="2093976"/>
-            <a:ext cx="0" cy="1243584"/>
-          </a:xfrm>
-          <a:prstGeom prst="line">
-            <a:avLst/>
-          </a:prstGeom>
-          <a:ln w="19050">
+      <p:sp>
+        <p:nvSpPr>
+          <p:cNvPr id="111" name="Diamond 110"/>
+          <p:cNvSpPr/>
+          <p:nvPr/>
+        </p:nvSpPr>
+        <p:spPr>
+          <a:xfrm>
+            <a:off x="7043802" y="4974336"/>
+            <a:ext cx="146304" cy="146304"/>
+          </a:xfrm>
+          <a:prstGeom prst="diamond">
+            <a:avLst/>
+          </a:prstGeom>
+          <a:solidFill>
+            <a:srgbClr val="4472C4"/>
+          </a:solidFill>
+          <a:ln w="15875">
             <a:solidFill>
               <a:srgbClr val="2F5597"/>
             </a:solidFill>
           </a:ln>
-        </p:spPr>
-        <p:style>
-          <a:lnRef idx="2">
-            <a:schemeClr val="accent1"/>
-          </a:lnRef>
-          <a:fillRef idx="0">
-            <a:schemeClr val="accent1"/>
-          </a:fillRef>
-          <a:effectRef idx="1">
-            <a:schemeClr val="accent1"/>
-          </a:effectRef>
-          <a:fontRef idx="minor">
-            <a:schemeClr val="tx1"/>
-          </a:fontRef>
-        </p:style>
-      </p:cxnSp>
-      <p:sp>
-        <p:nvSpPr>
-          <p:cNvPr id="110" name="Pentagon 109"/>
-          <p:cNvSpPr/>
-          <p:nvPr/>
-        </p:nvSpPr>
-        <p:spPr>
-          <a:xfrm>
-            <a:off x="3886200" y="2093976"/>
-            <a:ext cx="146304" cy="137160"/>
-          </a:xfrm>
-          <a:prstGeom prst="homePlate">
+          <a:effectLst/>
+        </p:spPr>
+        <p:style>
+          <a:lnRef idx="1">
+            <a:schemeClr val="accent1"/>
+          </a:lnRef>
+          <a:fillRef idx="3">
+            <a:schemeClr val="accent1"/>
+          </a:fillRef>
+          <a:effectRef idx="2">
+            <a:schemeClr val="accent1"/>
+          </a:effectRef>
+          <a:fontRef idx="minor">
+            <a:schemeClr val="lt1"/>
+          </a:fontRef>
+        </p:style>
+        <p:txBody>
+          <a:bodyPr rtlCol="0" anchor="ctr" wrap="square" lIns="18000" rIns="18000" tIns="9000" bIns="9000"/>
+          <a:lstStyle/>
+          <a:p>
+            <a:pPr algn="ctr"/>
+          </a:p>
+        </p:txBody>
+      </p:sp>
+      <p:sp>
+        <p:nvSpPr>
+          <p:cNvPr id="112" name="Diamond 111"/>
+          <p:cNvSpPr/>
+          <p:nvPr/>
+        </p:nvSpPr>
+        <p:spPr>
+          <a:xfrm>
+            <a:off x="10813015" y="4974336"/>
+            <a:ext cx="146304" cy="146304"/>
+          </a:xfrm>
+          <a:prstGeom prst="diamond">
+            <a:avLst/>
+          </a:prstGeom>
+          <a:solidFill>
+            <a:srgbClr val="C00000"/>
+          </a:solidFill>
+          <a:ln w="15875">
+            <a:solidFill>
+              <a:srgbClr val="7F0000"/>
+            </a:solidFill>
+          </a:ln>
+          <a:effectLst/>
+        </p:spPr>
+        <p:style>
+          <a:lnRef idx="1">
+            <a:schemeClr val="accent1"/>
+          </a:lnRef>
+          <a:fillRef idx="3">
+            <a:schemeClr val="accent1"/>
+          </a:fillRef>
+          <a:effectRef idx="2">
+            <a:schemeClr val="accent1"/>
+          </a:effectRef>
+          <a:fontRef idx="minor">
+            <a:schemeClr val="lt1"/>
+          </a:fontRef>
+        </p:style>
+        <p:txBody>
+          <a:bodyPr rtlCol="0" anchor="ctr" wrap="square" lIns="18000" rIns="18000" tIns="9000" bIns="9000"/>
+          <a:lstStyle/>
+          <a:p>
+            <a:pPr algn="ctr"/>
+          </a:p>
+        </p:txBody>
+      </p:sp>
+      <p:sp>
+        <p:nvSpPr>
+          <p:cNvPr id="113" name="Diamond 112"/>
+          <p:cNvSpPr/>
+          <p:nvPr/>
+        </p:nvSpPr>
+        <p:spPr>
+          <a:xfrm>
+            <a:off x="5966884" y="5596128"/>
+            <a:ext cx="146304" cy="146304"/>
+          </a:xfrm>
+          <a:prstGeom prst="diamond">
             <a:avLst/>
           </a:prstGeom>
           <a:solidFill>
             <a:srgbClr val="4472C4"/>
           </a:solidFill>
-          <a:ln w="12700">
+          <a:ln w="15875">
             <a:solidFill>
               <a:srgbClr val="2F5597"/>
             </a:solidFill>
@@ -8112,142 +8283,26 @@
           </a:p>
         </p:txBody>
       </p:sp>
-      <p:cxnSp>
-        <p:nvCxnSpPr>
-          <p:cNvPr id="111" name="Connector 110"/>
-          <p:cNvCxnSpPr/>
-          <p:nvPr/>
-        </p:nvCxnSpPr>
-        <p:spPr>
-          <a:xfrm>
-            <a:off x="7655413" y="2093976"/>
-            <a:ext cx="0" cy="1243584"/>
-          </a:xfrm>
-          <a:prstGeom prst="line">
-            <a:avLst/>
-          </a:prstGeom>
-          <a:ln w="19050">
+      <p:sp>
+        <p:nvSpPr>
+          <p:cNvPr id="114" name="Diamond 113"/>
+          <p:cNvSpPr/>
+          <p:nvPr/>
+        </p:nvSpPr>
+        <p:spPr>
+          <a:xfrm>
+            <a:off x="10813015" y="5596128"/>
+            <a:ext cx="146304" cy="146304"/>
+          </a:xfrm>
+          <a:prstGeom prst="diamond">
+            <a:avLst/>
+          </a:prstGeom>
+          <a:solidFill>
+            <a:srgbClr val="C00000"/>
+          </a:solidFill>
+          <a:ln w="15875">
             <a:solidFill>
               <a:srgbClr val="7F0000"/>
-            </a:solidFill>
-          </a:ln>
-        </p:spPr>
-        <p:style>
-          <a:lnRef idx="2">
-            <a:schemeClr val="accent1"/>
-          </a:lnRef>
-          <a:fillRef idx="0">
-            <a:schemeClr val="accent1"/>
-          </a:fillRef>
-          <a:effectRef idx="1">
-            <a:schemeClr val="accent1"/>
-          </a:effectRef>
-          <a:fontRef idx="minor">
-            <a:schemeClr val="tx1"/>
-          </a:fontRef>
-        </p:style>
-      </p:cxnSp>
-      <p:sp>
-        <p:nvSpPr>
-          <p:cNvPr id="112" name="Pentagon 111"/>
-          <p:cNvSpPr/>
-          <p:nvPr/>
-        </p:nvSpPr>
-        <p:spPr>
-          <a:xfrm rot="10800000">
-            <a:off x="7509109" y="2093976"/>
-            <a:ext cx="146304" cy="137160"/>
-          </a:xfrm>
-          <a:prstGeom prst="homePlate">
-            <a:avLst/>
-          </a:prstGeom>
-          <a:solidFill>
-            <a:srgbClr val="C00000"/>
-          </a:solidFill>
-          <a:ln w="12700">
-            <a:solidFill>
-              <a:srgbClr val="7F0000"/>
-            </a:solidFill>
-          </a:ln>
-          <a:effectLst/>
-        </p:spPr>
-        <p:style>
-          <a:lnRef idx="1">
-            <a:schemeClr val="accent1"/>
-          </a:lnRef>
-          <a:fillRef idx="3">
-            <a:schemeClr val="accent1"/>
-          </a:fillRef>
-          <a:effectRef idx="2">
-            <a:schemeClr val="accent1"/>
-          </a:effectRef>
-          <a:fontRef idx="minor">
-            <a:schemeClr val="lt1"/>
-          </a:fontRef>
-        </p:style>
-        <p:txBody>
-          <a:bodyPr rtlCol="0" anchor="ctr" wrap="square" lIns="18000" rIns="18000" tIns="9000" bIns="9000"/>
-          <a:lstStyle/>
-          <a:p>
-            <a:pPr algn="ctr"/>
-          </a:p>
-        </p:txBody>
-      </p:sp>
-      <p:cxnSp>
-        <p:nvCxnSpPr>
-          <p:cNvPr id="113" name="Connector 112"/>
-          <p:cNvCxnSpPr/>
-          <p:nvPr/>
-        </p:nvCxnSpPr>
-        <p:spPr>
-          <a:xfrm>
-            <a:off x="4424659" y="3337560"/>
-            <a:ext cx="0" cy="1554480"/>
-          </a:xfrm>
-          <a:prstGeom prst="line">
-            <a:avLst/>
-          </a:prstGeom>
-          <a:ln w="19050">
-            <a:solidFill>
-              <a:srgbClr val="2F5597"/>
-            </a:solidFill>
-          </a:ln>
-        </p:spPr>
-        <p:style>
-          <a:lnRef idx="2">
-            <a:schemeClr val="accent1"/>
-          </a:lnRef>
-          <a:fillRef idx="0">
-            <a:schemeClr val="accent1"/>
-          </a:fillRef>
-          <a:effectRef idx="1">
-            <a:schemeClr val="accent1"/>
-          </a:effectRef>
-          <a:fontRef idx="minor">
-            <a:schemeClr val="tx1"/>
-          </a:fontRef>
-        </p:style>
-      </p:cxnSp>
-      <p:sp>
-        <p:nvSpPr>
-          <p:cNvPr id="114" name="Pentagon 113"/>
-          <p:cNvSpPr/>
-          <p:nvPr/>
-        </p:nvSpPr>
-        <p:spPr>
-          <a:xfrm>
-            <a:off x="4424659" y="3337560"/>
-            <a:ext cx="146304" cy="137160"/>
-          </a:xfrm>
-          <a:prstGeom prst="homePlate">
-            <a:avLst/>
-          </a:prstGeom>
-          <a:solidFill>
-            <a:srgbClr val="4472C4"/>
-          </a:solidFill>
-          <a:ln w="12700">
-            <a:solidFill>
-              <a:srgbClr val="2F5597"/>
             </a:solidFill>
           </a:ln>
           <a:effectLst/>
@@ -8282,411 +8337,6 @@
         </p:nvCxnSpPr>
         <p:spPr>
           <a:xfrm>
-            <a:off x="10347708" y="3337560"/>
-            <a:ext cx="0" cy="1554480"/>
-          </a:xfrm>
-          <a:prstGeom prst="line">
-            <a:avLst/>
-          </a:prstGeom>
-          <a:ln w="19050">
-            <a:solidFill>
-              <a:srgbClr val="7F0000"/>
-            </a:solidFill>
-          </a:ln>
-        </p:spPr>
-        <p:style>
-          <a:lnRef idx="2">
-            <a:schemeClr val="accent1"/>
-          </a:lnRef>
-          <a:fillRef idx="0">
-            <a:schemeClr val="accent1"/>
-          </a:fillRef>
-          <a:effectRef idx="1">
-            <a:schemeClr val="accent1"/>
-          </a:effectRef>
-          <a:fontRef idx="minor">
-            <a:schemeClr val="tx1"/>
-          </a:fontRef>
-        </p:style>
-      </p:cxnSp>
-      <p:sp>
-        <p:nvSpPr>
-          <p:cNvPr id="116" name="Pentagon 115"/>
-          <p:cNvSpPr/>
-          <p:nvPr/>
-        </p:nvSpPr>
-        <p:spPr>
-          <a:xfrm rot="10800000">
-            <a:off x="10201404" y="3337560"/>
-            <a:ext cx="146304" cy="137160"/>
-          </a:xfrm>
-          <a:prstGeom prst="homePlate">
-            <a:avLst/>
-          </a:prstGeom>
-          <a:solidFill>
-            <a:srgbClr val="C00000"/>
-          </a:solidFill>
-          <a:ln w="12700">
-            <a:solidFill>
-              <a:srgbClr val="7F0000"/>
-            </a:solidFill>
-          </a:ln>
-          <a:effectLst/>
-        </p:spPr>
-        <p:style>
-          <a:lnRef idx="1">
-            <a:schemeClr val="accent1"/>
-          </a:lnRef>
-          <a:fillRef idx="3">
-            <a:schemeClr val="accent1"/>
-          </a:fillRef>
-          <a:effectRef idx="2">
-            <a:schemeClr val="accent1"/>
-          </a:effectRef>
-          <a:fontRef idx="minor">
-            <a:schemeClr val="lt1"/>
-          </a:fontRef>
-        </p:style>
-        <p:txBody>
-          <a:bodyPr rtlCol="0" anchor="ctr" wrap="square" lIns="18000" rIns="18000" tIns="9000" bIns="9000"/>
-          <a:lstStyle/>
-          <a:p>
-            <a:pPr algn="ctr"/>
-          </a:p>
-        </p:txBody>
-      </p:sp>
-      <p:cxnSp>
-        <p:nvCxnSpPr>
-          <p:cNvPr id="117" name="Connector 116"/>
-          <p:cNvCxnSpPr/>
-          <p:nvPr/>
-        </p:nvCxnSpPr>
-        <p:spPr>
-          <a:xfrm>
-            <a:off x="7116954" y="4892040"/>
-            <a:ext cx="0" cy="621792"/>
-          </a:xfrm>
-          <a:prstGeom prst="line">
-            <a:avLst/>
-          </a:prstGeom>
-          <a:ln w="19050">
-            <a:solidFill>
-              <a:srgbClr val="2F5597"/>
-            </a:solidFill>
-          </a:ln>
-        </p:spPr>
-        <p:style>
-          <a:lnRef idx="2">
-            <a:schemeClr val="accent1"/>
-          </a:lnRef>
-          <a:fillRef idx="0">
-            <a:schemeClr val="accent1"/>
-          </a:fillRef>
-          <a:effectRef idx="1">
-            <a:schemeClr val="accent1"/>
-          </a:effectRef>
-          <a:fontRef idx="minor">
-            <a:schemeClr val="tx1"/>
-          </a:fontRef>
-        </p:style>
-      </p:cxnSp>
-      <p:sp>
-        <p:nvSpPr>
-          <p:cNvPr id="118" name="Pentagon 117"/>
-          <p:cNvSpPr/>
-          <p:nvPr/>
-        </p:nvSpPr>
-        <p:spPr>
-          <a:xfrm>
-            <a:off x="7116954" y="4892040"/>
-            <a:ext cx="146304" cy="137160"/>
-          </a:xfrm>
-          <a:prstGeom prst="homePlate">
-            <a:avLst/>
-          </a:prstGeom>
-          <a:solidFill>
-            <a:srgbClr val="4472C4"/>
-          </a:solidFill>
-          <a:ln w="12700">
-            <a:solidFill>
-              <a:srgbClr val="2F5597"/>
-            </a:solidFill>
-          </a:ln>
-          <a:effectLst/>
-        </p:spPr>
-        <p:style>
-          <a:lnRef idx="1">
-            <a:schemeClr val="accent1"/>
-          </a:lnRef>
-          <a:fillRef idx="3">
-            <a:schemeClr val="accent1"/>
-          </a:fillRef>
-          <a:effectRef idx="2">
-            <a:schemeClr val="accent1"/>
-          </a:effectRef>
-          <a:fontRef idx="minor">
-            <a:schemeClr val="lt1"/>
-          </a:fontRef>
-        </p:style>
-        <p:txBody>
-          <a:bodyPr rtlCol="0" anchor="ctr" wrap="square" lIns="18000" rIns="18000" tIns="9000" bIns="9000"/>
-          <a:lstStyle/>
-          <a:p>
-            <a:pPr algn="ctr"/>
-          </a:p>
-        </p:txBody>
-      </p:sp>
-      <p:cxnSp>
-        <p:nvCxnSpPr>
-          <p:cNvPr id="119" name="Connector 118"/>
-          <p:cNvCxnSpPr/>
-          <p:nvPr/>
-        </p:nvCxnSpPr>
-        <p:spPr>
-          <a:xfrm>
-            <a:off x="10886167" y="4892040"/>
-            <a:ext cx="0" cy="621792"/>
-          </a:xfrm>
-          <a:prstGeom prst="line">
-            <a:avLst/>
-          </a:prstGeom>
-          <a:ln w="19050">
-            <a:solidFill>
-              <a:srgbClr val="7F0000"/>
-            </a:solidFill>
-          </a:ln>
-        </p:spPr>
-        <p:style>
-          <a:lnRef idx="2">
-            <a:schemeClr val="accent1"/>
-          </a:lnRef>
-          <a:fillRef idx="0">
-            <a:schemeClr val="accent1"/>
-          </a:fillRef>
-          <a:effectRef idx="1">
-            <a:schemeClr val="accent1"/>
-          </a:effectRef>
-          <a:fontRef idx="minor">
-            <a:schemeClr val="tx1"/>
-          </a:fontRef>
-        </p:style>
-      </p:cxnSp>
-      <p:sp>
-        <p:nvSpPr>
-          <p:cNvPr id="120" name="Pentagon 119"/>
-          <p:cNvSpPr/>
-          <p:nvPr/>
-        </p:nvSpPr>
-        <p:spPr>
-          <a:xfrm rot="10800000">
-            <a:off x="10739863" y="4892040"/>
-            <a:ext cx="146304" cy="137160"/>
-          </a:xfrm>
-          <a:prstGeom prst="homePlate">
-            <a:avLst/>
-          </a:prstGeom>
-          <a:solidFill>
-            <a:srgbClr val="C00000"/>
-          </a:solidFill>
-          <a:ln w="12700">
-            <a:solidFill>
-              <a:srgbClr val="7F0000"/>
-            </a:solidFill>
-          </a:ln>
-          <a:effectLst/>
-        </p:spPr>
-        <p:style>
-          <a:lnRef idx="1">
-            <a:schemeClr val="accent1"/>
-          </a:lnRef>
-          <a:fillRef idx="3">
-            <a:schemeClr val="accent1"/>
-          </a:fillRef>
-          <a:effectRef idx="2">
-            <a:schemeClr val="accent1"/>
-          </a:effectRef>
-          <a:fontRef idx="minor">
-            <a:schemeClr val="lt1"/>
-          </a:fontRef>
-        </p:style>
-        <p:txBody>
-          <a:bodyPr rtlCol="0" anchor="ctr" wrap="square" lIns="18000" rIns="18000" tIns="9000" bIns="9000"/>
-          <a:lstStyle/>
-          <a:p>
-            <a:pPr algn="ctr"/>
-          </a:p>
-        </p:txBody>
-      </p:sp>
-      <p:cxnSp>
-        <p:nvCxnSpPr>
-          <p:cNvPr id="121" name="Connector 120"/>
-          <p:cNvCxnSpPr/>
-          <p:nvPr/>
-        </p:nvCxnSpPr>
-        <p:spPr>
-          <a:xfrm>
-            <a:off x="6040036" y="5513832"/>
-            <a:ext cx="0" cy="310896"/>
-          </a:xfrm>
-          <a:prstGeom prst="line">
-            <a:avLst/>
-          </a:prstGeom>
-          <a:ln w="19050">
-            <a:solidFill>
-              <a:srgbClr val="2F5597"/>
-            </a:solidFill>
-          </a:ln>
-        </p:spPr>
-        <p:style>
-          <a:lnRef idx="2">
-            <a:schemeClr val="accent1"/>
-          </a:lnRef>
-          <a:fillRef idx="0">
-            <a:schemeClr val="accent1"/>
-          </a:fillRef>
-          <a:effectRef idx="1">
-            <a:schemeClr val="accent1"/>
-          </a:effectRef>
-          <a:fontRef idx="minor">
-            <a:schemeClr val="tx1"/>
-          </a:fontRef>
-        </p:style>
-      </p:cxnSp>
-      <p:sp>
-        <p:nvSpPr>
-          <p:cNvPr id="122" name="Pentagon 121"/>
-          <p:cNvSpPr/>
-          <p:nvPr/>
-        </p:nvSpPr>
-        <p:spPr>
-          <a:xfrm>
-            <a:off x="6040036" y="5513832"/>
-            <a:ext cx="146304" cy="137160"/>
-          </a:xfrm>
-          <a:prstGeom prst="homePlate">
-            <a:avLst/>
-          </a:prstGeom>
-          <a:solidFill>
-            <a:srgbClr val="4472C4"/>
-          </a:solidFill>
-          <a:ln w="12700">
-            <a:solidFill>
-              <a:srgbClr val="2F5597"/>
-            </a:solidFill>
-          </a:ln>
-          <a:effectLst/>
-        </p:spPr>
-        <p:style>
-          <a:lnRef idx="1">
-            <a:schemeClr val="accent1"/>
-          </a:lnRef>
-          <a:fillRef idx="3">
-            <a:schemeClr val="accent1"/>
-          </a:fillRef>
-          <a:effectRef idx="2">
-            <a:schemeClr val="accent1"/>
-          </a:effectRef>
-          <a:fontRef idx="minor">
-            <a:schemeClr val="lt1"/>
-          </a:fontRef>
-        </p:style>
-        <p:txBody>
-          <a:bodyPr rtlCol="0" anchor="ctr" wrap="square" lIns="18000" rIns="18000" tIns="9000" bIns="9000"/>
-          <a:lstStyle/>
-          <a:p>
-            <a:pPr algn="ctr"/>
-          </a:p>
-        </p:txBody>
-      </p:sp>
-      <p:cxnSp>
-        <p:nvCxnSpPr>
-          <p:cNvPr id="123" name="Connector 122"/>
-          <p:cNvCxnSpPr/>
-          <p:nvPr/>
-        </p:nvCxnSpPr>
-        <p:spPr>
-          <a:xfrm>
-            <a:off x="10886167" y="5513832"/>
-            <a:ext cx="0" cy="310896"/>
-          </a:xfrm>
-          <a:prstGeom prst="line">
-            <a:avLst/>
-          </a:prstGeom>
-          <a:ln w="19050">
-            <a:solidFill>
-              <a:srgbClr val="7F0000"/>
-            </a:solidFill>
-          </a:ln>
-        </p:spPr>
-        <p:style>
-          <a:lnRef idx="2">
-            <a:schemeClr val="accent1"/>
-          </a:lnRef>
-          <a:fillRef idx="0">
-            <a:schemeClr val="accent1"/>
-          </a:fillRef>
-          <a:effectRef idx="1">
-            <a:schemeClr val="accent1"/>
-          </a:effectRef>
-          <a:fontRef idx="minor">
-            <a:schemeClr val="tx1"/>
-          </a:fontRef>
-        </p:style>
-      </p:cxnSp>
-      <p:sp>
-        <p:nvSpPr>
-          <p:cNvPr id="124" name="Pentagon 123"/>
-          <p:cNvSpPr/>
-          <p:nvPr/>
-        </p:nvSpPr>
-        <p:spPr>
-          <a:xfrm rot="10800000">
-            <a:off x="10739863" y="5513832"/>
-            <a:ext cx="146304" cy="137160"/>
-          </a:xfrm>
-          <a:prstGeom prst="homePlate">
-            <a:avLst/>
-          </a:prstGeom>
-          <a:solidFill>
-            <a:srgbClr val="C00000"/>
-          </a:solidFill>
-          <a:ln w="12700">
-            <a:solidFill>
-              <a:srgbClr val="7F0000"/>
-            </a:solidFill>
-          </a:ln>
-          <a:effectLst/>
-        </p:spPr>
-        <p:style>
-          <a:lnRef idx="1">
-            <a:schemeClr val="accent1"/>
-          </a:lnRef>
-          <a:fillRef idx="3">
-            <a:schemeClr val="accent1"/>
-          </a:fillRef>
-          <a:effectRef idx="2">
-            <a:schemeClr val="accent1"/>
-          </a:effectRef>
-          <a:fontRef idx="minor">
-            <a:schemeClr val="lt1"/>
-          </a:fontRef>
-        </p:style>
-        <p:txBody>
-          <a:bodyPr rtlCol="0" anchor="ctr" wrap="square" lIns="18000" rIns="18000" tIns="9000" bIns="9000"/>
-          <a:lstStyle/>
-          <a:p>
-            <a:pPr algn="ctr"/>
-          </a:p>
-        </p:txBody>
-      </p:sp>
-      <p:cxnSp>
-        <p:nvCxnSpPr>
-          <p:cNvPr id="125" name="Connector 124"/>
-          <p:cNvCxnSpPr/>
-          <p:nvPr/>
-        </p:nvCxnSpPr>
-        <p:spPr>
-          <a:xfrm>
             <a:off x="5770806" y="1161288"/>
             <a:ext cx="0" cy="4663440"/>
           </a:xfrm>
@@ -8716,7 +8366,7 @@
       </p:cxnSp>
       <p:cxnSp>
         <p:nvCxnSpPr>
-          <p:cNvPr id="126" name="Connector 125"/>
+          <p:cNvPr id="116" name="Connector 115"/>
           <p:cNvCxnSpPr/>
           <p:nvPr/>
         </p:nvCxnSpPr>
@@ -8751,7 +8401,7 @@
       </p:cxnSp>
       <p:sp>
         <p:nvSpPr>
-          <p:cNvPr id="127" name="Rectangle 126"/>
+          <p:cNvPr id="117" name="Rectangle 116"/>
           <p:cNvSpPr/>
           <p:nvPr/>
         </p:nvSpPr>
@@ -8805,7 +8455,7 @@
       </p:sp>
       <p:cxnSp>
         <p:nvCxnSpPr>
-          <p:cNvPr id="128" name="Connector 127"/>
+          <p:cNvPr id="118" name="Connector 117"/>
           <p:cNvCxnSpPr/>
           <p:nvPr/>
         </p:nvCxnSpPr>
@@ -8840,7 +8490,7 @@
       </p:cxnSp>
       <p:sp>
         <p:nvSpPr>
-          <p:cNvPr id="129" name="Rectangle 128"/>
+          <p:cNvPr id="119" name="Rectangle 118"/>
           <p:cNvSpPr/>
           <p:nvPr/>
         </p:nvSpPr>
@@ -8894,7 +8544,7 @@
       </p:sp>
       <p:sp>
         <p:nvSpPr>
-          <p:cNvPr id="130" name="Diamond 129"/>
+          <p:cNvPr id="120" name="Diamond 119"/>
           <p:cNvSpPr/>
           <p:nvPr/>
         </p:nvSpPr>
@@ -8940,7 +8590,7 @@
       </p:sp>
       <p:sp>
         <p:nvSpPr>
-          <p:cNvPr id="131" name="Rectangle 130"/>
+          <p:cNvPr id="121" name="Rectangle 120"/>
           <p:cNvSpPr/>
           <p:nvPr/>
         </p:nvSpPr>
@@ -8990,7 +8640,7 @@
       </p:sp>
       <p:sp>
         <p:nvSpPr>
-          <p:cNvPr id="132" name="Diamond 131"/>
+          <p:cNvPr id="122" name="Diamond 121"/>
           <p:cNvSpPr/>
           <p:nvPr/>
         </p:nvSpPr>
@@ -9036,7 +8686,7 @@
       </p:sp>
       <p:sp>
         <p:nvSpPr>
-          <p:cNvPr id="133" name="Rectangle 132"/>
+          <p:cNvPr id="123" name="Rectangle 122"/>
           <p:cNvSpPr/>
           <p:nvPr/>
         </p:nvSpPr>
@@ -9086,7 +8736,7 @@
       </p:sp>
       <p:sp>
         <p:nvSpPr>
-          <p:cNvPr id="134" name="Rounded Rectangle 133"/>
+          <p:cNvPr id="124" name="Rounded Rectangle 123"/>
           <p:cNvSpPr/>
           <p:nvPr/>
         </p:nvSpPr>
@@ -9132,7 +8782,7 @@
       </p:sp>
       <p:sp>
         <p:nvSpPr>
-          <p:cNvPr id="135" name="Rectangle 134"/>
+          <p:cNvPr id="125" name="Rectangle 124"/>
           <p:cNvSpPr/>
           <p:nvPr/>
         </p:nvSpPr>
@@ -9182,7 +8832,7 @@
       </p:sp>
       <p:sp>
         <p:nvSpPr>
-          <p:cNvPr id="136" name="Rounded Rectangle 135"/>
+          <p:cNvPr id="126" name="Rounded Rectangle 125"/>
           <p:cNvSpPr/>
           <p:nvPr/>
         </p:nvSpPr>
@@ -9228,7 +8878,7 @@
       </p:sp>
       <p:sp>
         <p:nvSpPr>
-          <p:cNvPr id="137" name="Rectangle 136"/>
+          <p:cNvPr id="127" name="Rectangle 126"/>
           <p:cNvSpPr/>
           <p:nvPr/>
         </p:nvSpPr>
@@ -9278,7 +8928,7 @@
       </p:sp>
       <p:sp>
         <p:nvSpPr>
-          <p:cNvPr id="138" name="Rounded Rectangle 137"/>
+          <p:cNvPr id="128" name="Rounded Rectangle 127"/>
           <p:cNvSpPr/>
           <p:nvPr/>
         </p:nvSpPr>
@@ -9324,7 +8974,7 @@
       </p:sp>
       <p:sp>
         <p:nvSpPr>
-          <p:cNvPr id="139" name="Rectangle 138"/>
+          <p:cNvPr id="129" name="Rectangle 128"/>
           <p:cNvSpPr/>
           <p:nvPr/>
         </p:nvSpPr>
@@ -9374,7 +9024,7 @@
       </p:sp>
       <p:sp>
         <p:nvSpPr>
-          <p:cNvPr id="140" name="Rounded Rectangle 139"/>
+          <p:cNvPr id="130" name="Rounded Rectangle 129"/>
           <p:cNvSpPr/>
           <p:nvPr/>
         </p:nvSpPr>
@@ -9420,7 +9070,7 @@
       </p:sp>
       <p:sp>
         <p:nvSpPr>
-          <p:cNvPr id="141" name="Rectangle 140"/>
+          <p:cNvPr id="131" name="Rectangle 130"/>
           <p:cNvSpPr/>
           <p:nvPr/>
         </p:nvSpPr>
@@ -9470,7 +9120,7 @@
       </p:sp>
       <p:sp>
         <p:nvSpPr>
-          <p:cNvPr id="142" name="Rounded Rectangle 141"/>
+          <p:cNvPr id="132" name="Rounded Rectangle 131"/>
           <p:cNvSpPr/>
           <p:nvPr/>
         </p:nvSpPr>
@@ -9516,7 +9166,7 @@
       </p:sp>
       <p:sp>
         <p:nvSpPr>
-          <p:cNvPr id="143" name="Rectangle 142"/>
+          <p:cNvPr id="133" name="Rectangle 132"/>
           <p:cNvSpPr/>
           <p:nvPr/>
         </p:nvSpPr>
@@ -9566,7 +9216,7 @@
       </p:sp>
       <p:sp>
         <p:nvSpPr>
-          <p:cNvPr id="144" name="Pentagon 143"/>
+          <p:cNvPr id="134" name="Pentagon 133"/>
           <p:cNvSpPr/>
           <p:nvPr/>
         </p:nvSpPr>
@@ -9612,7 +9262,7 @@
       </p:sp>
       <p:sp>
         <p:nvSpPr>
-          <p:cNvPr id="145" name="Rectangle 144"/>
+          <p:cNvPr id="135" name="Rectangle 134"/>
           <p:cNvSpPr/>
           <p:nvPr/>
         </p:nvSpPr>
@@ -9662,7 +9312,7 @@
       </p:sp>
       <p:sp>
         <p:nvSpPr>
-          <p:cNvPr id="146" name="Pentagon 145"/>
+          <p:cNvPr id="136" name="Pentagon 135"/>
           <p:cNvSpPr/>
           <p:nvPr/>
         </p:nvSpPr>
@@ -9708,7 +9358,7 @@
       </p:sp>
       <p:sp>
         <p:nvSpPr>
-          <p:cNvPr id="147" name="Rectangle 146"/>
+          <p:cNvPr id="137" name="Rectangle 136"/>
           <p:cNvSpPr/>
           <p:nvPr/>
         </p:nvSpPr>
@@ -14043,59 +13693,116 @@
           </a:p>
         </p:txBody>
       </p:sp>
-      <p:cxnSp>
-        <p:nvCxnSpPr>
-          <p:cNvPr id="94" name="Connector 93"/>
-          <p:cNvCxnSpPr/>
-          <p:nvPr/>
-        </p:nvCxnSpPr>
-        <p:spPr>
-          <a:xfrm>
-            <a:off x="6040036" y="1161288"/>
-            <a:ext cx="0" cy="2487168"/>
-          </a:xfrm>
-          <a:prstGeom prst="line">
-            <a:avLst/>
-          </a:prstGeom>
-          <a:ln w="19050">
+      <p:sp>
+        <p:nvSpPr>
+          <p:cNvPr id="94" name="Diamond 93"/>
+          <p:cNvSpPr/>
+          <p:nvPr/>
+        </p:nvSpPr>
+        <p:spPr>
+          <a:xfrm>
+            <a:off x="5966884" y="1243584"/>
+            <a:ext cx="146304" cy="146304"/>
+          </a:xfrm>
+          <a:prstGeom prst="diamond">
+            <a:avLst/>
+          </a:prstGeom>
+          <a:solidFill>
+            <a:srgbClr val="4472C4"/>
+          </a:solidFill>
+          <a:ln w="15875">
             <a:solidFill>
               <a:srgbClr val="2F5597"/>
             </a:solidFill>
           </a:ln>
-        </p:spPr>
-        <p:style>
-          <a:lnRef idx="2">
-            <a:schemeClr val="accent1"/>
-          </a:lnRef>
-          <a:fillRef idx="0">
-            <a:schemeClr val="accent1"/>
-          </a:fillRef>
-          <a:effectRef idx="1">
-            <a:schemeClr val="accent1"/>
-          </a:effectRef>
-          <a:fontRef idx="minor">
-            <a:schemeClr val="tx1"/>
-          </a:fontRef>
-        </p:style>
-      </p:cxnSp>
-      <p:sp>
-        <p:nvSpPr>
-          <p:cNvPr id="95" name="Pentagon 94"/>
-          <p:cNvSpPr/>
-          <p:nvPr/>
-        </p:nvSpPr>
-        <p:spPr>
-          <a:xfrm>
-            <a:off x="6040036" y="1161288"/>
-            <a:ext cx="146304" cy="137160"/>
-          </a:xfrm>
-          <a:prstGeom prst="homePlate">
+          <a:effectLst/>
+        </p:spPr>
+        <p:style>
+          <a:lnRef idx="1">
+            <a:schemeClr val="accent1"/>
+          </a:lnRef>
+          <a:fillRef idx="3">
+            <a:schemeClr val="accent1"/>
+          </a:fillRef>
+          <a:effectRef idx="2">
+            <a:schemeClr val="accent1"/>
+          </a:effectRef>
+          <a:fontRef idx="minor">
+            <a:schemeClr val="lt1"/>
+          </a:fontRef>
+        </p:style>
+        <p:txBody>
+          <a:bodyPr rtlCol="0" anchor="ctr" wrap="square" lIns="18000" rIns="18000" tIns="9000" bIns="9000"/>
+          <a:lstStyle/>
+          <a:p>
+            <a:pPr algn="ctr"/>
+          </a:p>
+        </p:txBody>
+      </p:sp>
+      <p:sp>
+        <p:nvSpPr>
+          <p:cNvPr id="95" name="Diamond 94"/>
+          <p:cNvSpPr/>
+          <p:nvPr/>
+        </p:nvSpPr>
+        <p:spPr>
+          <a:xfrm>
+            <a:off x="10813015" y="1243584"/>
+            <a:ext cx="146304" cy="146304"/>
+          </a:xfrm>
+          <a:prstGeom prst="diamond">
+            <a:avLst/>
+          </a:prstGeom>
+          <a:solidFill>
+            <a:srgbClr val="C00000"/>
+          </a:solidFill>
+          <a:ln w="15875">
+            <a:solidFill>
+              <a:srgbClr val="7F0000"/>
+            </a:solidFill>
+          </a:ln>
+          <a:effectLst/>
+        </p:spPr>
+        <p:style>
+          <a:lnRef idx="1">
+            <a:schemeClr val="accent1"/>
+          </a:lnRef>
+          <a:fillRef idx="3">
+            <a:schemeClr val="accent1"/>
+          </a:fillRef>
+          <a:effectRef idx="2">
+            <a:schemeClr val="accent1"/>
+          </a:effectRef>
+          <a:fontRef idx="minor">
+            <a:schemeClr val="lt1"/>
+          </a:fontRef>
+        </p:style>
+        <p:txBody>
+          <a:bodyPr rtlCol="0" anchor="ctr" wrap="square" lIns="18000" rIns="18000" tIns="9000" bIns="9000"/>
+          <a:lstStyle/>
+          <a:p>
+            <a:pPr algn="ctr"/>
+          </a:p>
+        </p:txBody>
+      </p:sp>
+      <p:sp>
+        <p:nvSpPr>
+          <p:cNvPr id="96" name="Diamond 95"/>
+          <p:cNvSpPr/>
+          <p:nvPr/>
+        </p:nvSpPr>
+        <p:spPr>
+          <a:xfrm>
+            <a:off x="3813048" y="3730752"/>
+            <a:ext cx="146304" cy="146304"/>
+          </a:xfrm>
+          <a:prstGeom prst="diamond">
             <a:avLst/>
           </a:prstGeom>
           <a:solidFill>
             <a:srgbClr val="4472C4"/>
           </a:solidFill>
-          <a:ln w="12700">
+          <a:ln w="15875">
             <a:solidFill>
               <a:srgbClr val="2F5597"/>
             </a:solidFill>
@@ -14124,142 +13831,118 @@
           </a:p>
         </p:txBody>
       </p:sp>
-      <p:cxnSp>
-        <p:nvCxnSpPr>
-          <p:cNvPr id="96" name="Connector 95"/>
-          <p:cNvCxnSpPr/>
-          <p:nvPr/>
-        </p:nvCxnSpPr>
-        <p:spPr>
-          <a:xfrm>
-            <a:off x="10886167" y="1161288"/>
-            <a:ext cx="0" cy="2487168"/>
-          </a:xfrm>
-          <a:prstGeom prst="line">
-            <a:avLst/>
-          </a:prstGeom>
-          <a:ln w="19050">
+      <p:sp>
+        <p:nvSpPr>
+          <p:cNvPr id="97" name="Diamond 96"/>
+          <p:cNvSpPr/>
+          <p:nvPr/>
+        </p:nvSpPr>
+        <p:spPr>
+          <a:xfrm>
+            <a:off x="8120720" y="3730752"/>
+            <a:ext cx="146304" cy="146304"/>
+          </a:xfrm>
+          <a:prstGeom prst="diamond">
+            <a:avLst/>
+          </a:prstGeom>
+          <a:solidFill>
+            <a:srgbClr val="C00000"/>
+          </a:solidFill>
+          <a:ln w="15875">
             <a:solidFill>
               <a:srgbClr val="7F0000"/>
             </a:solidFill>
           </a:ln>
-        </p:spPr>
-        <p:style>
-          <a:lnRef idx="2">
-            <a:schemeClr val="accent1"/>
-          </a:lnRef>
-          <a:fillRef idx="0">
-            <a:schemeClr val="accent1"/>
-          </a:fillRef>
-          <a:effectRef idx="1">
-            <a:schemeClr val="accent1"/>
-          </a:effectRef>
-          <a:fontRef idx="minor">
-            <a:schemeClr val="tx1"/>
-          </a:fontRef>
-        </p:style>
-      </p:cxnSp>
-      <p:sp>
-        <p:nvSpPr>
-          <p:cNvPr id="97" name="Pentagon 96"/>
-          <p:cNvSpPr/>
-          <p:nvPr/>
-        </p:nvSpPr>
-        <p:spPr>
-          <a:xfrm rot="10800000">
-            <a:off x="10739863" y="1161288"/>
-            <a:ext cx="146304" cy="137160"/>
-          </a:xfrm>
-          <a:prstGeom prst="homePlate">
+          <a:effectLst/>
+        </p:spPr>
+        <p:style>
+          <a:lnRef idx="1">
+            <a:schemeClr val="accent1"/>
+          </a:lnRef>
+          <a:fillRef idx="3">
+            <a:schemeClr val="accent1"/>
+          </a:fillRef>
+          <a:effectRef idx="2">
+            <a:schemeClr val="accent1"/>
+          </a:effectRef>
+          <a:fontRef idx="minor">
+            <a:schemeClr val="lt1"/>
+          </a:fontRef>
+        </p:style>
+        <p:txBody>
+          <a:bodyPr rtlCol="0" anchor="ctr" wrap="square" lIns="18000" rIns="18000" tIns="9000" bIns="9000"/>
+          <a:lstStyle/>
+          <a:p>
+            <a:pPr algn="ctr"/>
+          </a:p>
+        </p:txBody>
+      </p:sp>
+      <p:sp>
+        <p:nvSpPr>
+          <p:cNvPr id="98" name="Diamond 97"/>
+          <p:cNvSpPr/>
+          <p:nvPr/>
+        </p:nvSpPr>
+        <p:spPr>
+          <a:xfrm>
+            <a:off x="3813048" y="4974336"/>
+            <a:ext cx="146304" cy="146304"/>
+          </a:xfrm>
+          <a:prstGeom prst="diamond">
+            <a:avLst/>
+          </a:prstGeom>
+          <a:solidFill>
+            <a:srgbClr val="4472C4"/>
+          </a:solidFill>
+          <a:ln w="15875">
+            <a:solidFill>
+              <a:srgbClr val="2F5597"/>
+            </a:solidFill>
+          </a:ln>
+          <a:effectLst/>
+        </p:spPr>
+        <p:style>
+          <a:lnRef idx="1">
+            <a:schemeClr val="accent1"/>
+          </a:lnRef>
+          <a:fillRef idx="3">
+            <a:schemeClr val="accent1"/>
+          </a:fillRef>
+          <a:effectRef idx="2">
+            <a:schemeClr val="accent1"/>
+          </a:effectRef>
+          <a:fontRef idx="minor">
+            <a:schemeClr val="lt1"/>
+          </a:fontRef>
+        </p:style>
+        <p:txBody>
+          <a:bodyPr rtlCol="0" anchor="ctr" wrap="square" lIns="18000" rIns="18000" tIns="9000" bIns="9000"/>
+          <a:lstStyle/>
+          <a:p>
+            <a:pPr algn="ctr"/>
+          </a:p>
+        </p:txBody>
+      </p:sp>
+      <p:sp>
+        <p:nvSpPr>
+          <p:cNvPr id="99" name="Diamond 98"/>
+          <p:cNvSpPr/>
+          <p:nvPr/>
+        </p:nvSpPr>
+        <p:spPr>
+          <a:xfrm>
+            <a:off x="9736097" y="4974336"/>
+            <a:ext cx="146304" cy="146304"/>
+          </a:xfrm>
+          <a:prstGeom prst="diamond">
             <a:avLst/>
           </a:prstGeom>
           <a:solidFill>
             <a:srgbClr val="C00000"/>
           </a:solidFill>
-          <a:ln w="12700">
+          <a:ln w="15875">
             <a:solidFill>
               <a:srgbClr val="7F0000"/>
-            </a:solidFill>
-          </a:ln>
-          <a:effectLst/>
-        </p:spPr>
-        <p:style>
-          <a:lnRef idx="1">
-            <a:schemeClr val="accent1"/>
-          </a:lnRef>
-          <a:fillRef idx="3">
-            <a:schemeClr val="accent1"/>
-          </a:fillRef>
-          <a:effectRef idx="2">
-            <a:schemeClr val="accent1"/>
-          </a:effectRef>
-          <a:fontRef idx="minor">
-            <a:schemeClr val="lt1"/>
-          </a:fontRef>
-        </p:style>
-        <p:txBody>
-          <a:bodyPr rtlCol="0" anchor="ctr" wrap="square" lIns="18000" rIns="18000" tIns="9000" bIns="9000"/>
-          <a:lstStyle/>
-          <a:p>
-            <a:pPr algn="ctr"/>
-          </a:p>
-        </p:txBody>
-      </p:sp>
-      <p:cxnSp>
-        <p:nvCxnSpPr>
-          <p:cNvPr id="98" name="Connector 97"/>
-          <p:cNvCxnSpPr/>
-          <p:nvPr/>
-        </p:nvCxnSpPr>
-        <p:spPr>
-          <a:xfrm>
-            <a:off x="3886200" y="3648456"/>
-            <a:ext cx="0" cy="1243584"/>
-          </a:xfrm>
-          <a:prstGeom prst="line">
-            <a:avLst/>
-          </a:prstGeom>
-          <a:ln w="19050">
-            <a:solidFill>
-              <a:srgbClr val="2F5597"/>
-            </a:solidFill>
-          </a:ln>
-        </p:spPr>
-        <p:style>
-          <a:lnRef idx="2">
-            <a:schemeClr val="accent1"/>
-          </a:lnRef>
-          <a:fillRef idx="0">
-            <a:schemeClr val="accent1"/>
-          </a:fillRef>
-          <a:effectRef idx="1">
-            <a:schemeClr val="accent1"/>
-          </a:effectRef>
-          <a:fontRef idx="minor">
-            <a:schemeClr val="tx1"/>
-          </a:fontRef>
-        </p:style>
-      </p:cxnSp>
-      <p:sp>
-        <p:nvSpPr>
-          <p:cNvPr id="99" name="Pentagon 98"/>
-          <p:cNvSpPr/>
-          <p:nvPr/>
-        </p:nvSpPr>
-        <p:spPr>
-          <a:xfrm>
-            <a:off x="3886200" y="3648456"/>
-            <a:ext cx="146304" cy="137160"/>
-          </a:xfrm>
-          <a:prstGeom prst="homePlate">
-            <a:avLst/>
-          </a:prstGeom>
-          <a:solidFill>
-            <a:srgbClr val="4472C4"/>
-          </a:solidFill>
-          <a:ln w="12700">
-            <a:solidFill>
-              <a:srgbClr val="2F5597"/>
             </a:solidFill>
           </a:ln>
           <a:effectLst/>
@@ -14294,249 +13977,6 @@
         </p:nvCxnSpPr>
         <p:spPr>
           <a:xfrm>
-            <a:off x="8193872" y="3648456"/>
-            <a:ext cx="0" cy="1243584"/>
-          </a:xfrm>
-          <a:prstGeom prst="line">
-            <a:avLst/>
-          </a:prstGeom>
-          <a:ln w="19050">
-            <a:solidFill>
-              <a:srgbClr val="7F0000"/>
-            </a:solidFill>
-          </a:ln>
-        </p:spPr>
-        <p:style>
-          <a:lnRef idx="2">
-            <a:schemeClr val="accent1"/>
-          </a:lnRef>
-          <a:fillRef idx="0">
-            <a:schemeClr val="accent1"/>
-          </a:fillRef>
-          <a:effectRef idx="1">
-            <a:schemeClr val="accent1"/>
-          </a:effectRef>
-          <a:fontRef idx="minor">
-            <a:schemeClr val="tx1"/>
-          </a:fontRef>
-        </p:style>
-      </p:cxnSp>
-      <p:sp>
-        <p:nvSpPr>
-          <p:cNvPr id="101" name="Pentagon 100"/>
-          <p:cNvSpPr/>
-          <p:nvPr/>
-        </p:nvSpPr>
-        <p:spPr>
-          <a:xfrm rot="10800000">
-            <a:off x="8047568" y="3648456"/>
-            <a:ext cx="146304" cy="137160"/>
-          </a:xfrm>
-          <a:prstGeom prst="homePlate">
-            <a:avLst/>
-          </a:prstGeom>
-          <a:solidFill>
-            <a:srgbClr val="C00000"/>
-          </a:solidFill>
-          <a:ln w="12700">
-            <a:solidFill>
-              <a:srgbClr val="7F0000"/>
-            </a:solidFill>
-          </a:ln>
-          <a:effectLst/>
-        </p:spPr>
-        <p:style>
-          <a:lnRef idx="1">
-            <a:schemeClr val="accent1"/>
-          </a:lnRef>
-          <a:fillRef idx="3">
-            <a:schemeClr val="accent1"/>
-          </a:fillRef>
-          <a:effectRef idx="2">
-            <a:schemeClr val="accent1"/>
-          </a:effectRef>
-          <a:fontRef idx="minor">
-            <a:schemeClr val="lt1"/>
-          </a:fontRef>
-        </p:style>
-        <p:txBody>
-          <a:bodyPr rtlCol="0" anchor="ctr" wrap="square" lIns="18000" rIns="18000" tIns="9000" bIns="9000"/>
-          <a:lstStyle/>
-          <a:p>
-            <a:pPr algn="ctr"/>
-          </a:p>
-        </p:txBody>
-      </p:sp>
-      <p:cxnSp>
-        <p:nvCxnSpPr>
-          <p:cNvPr id="102" name="Connector 101"/>
-          <p:cNvCxnSpPr/>
-          <p:nvPr/>
-        </p:nvCxnSpPr>
-        <p:spPr>
-          <a:xfrm>
-            <a:off x="3886200" y="4892040"/>
-            <a:ext cx="0" cy="932688"/>
-          </a:xfrm>
-          <a:prstGeom prst="line">
-            <a:avLst/>
-          </a:prstGeom>
-          <a:ln w="19050">
-            <a:solidFill>
-              <a:srgbClr val="2F5597"/>
-            </a:solidFill>
-          </a:ln>
-        </p:spPr>
-        <p:style>
-          <a:lnRef idx="2">
-            <a:schemeClr val="accent1"/>
-          </a:lnRef>
-          <a:fillRef idx="0">
-            <a:schemeClr val="accent1"/>
-          </a:fillRef>
-          <a:effectRef idx="1">
-            <a:schemeClr val="accent1"/>
-          </a:effectRef>
-          <a:fontRef idx="minor">
-            <a:schemeClr val="tx1"/>
-          </a:fontRef>
-        </p:style>
-      </p:cxnSp>
-      <p:sp>
-        <p:nvSpPr>
-          <p:cNvPr id="103" name="Pentagon 102"/>
-          <p:cNvSpPr/>
-          <p:nvPr/>
-        </p:nvSpPr>
-        <p:spPr>
-          <a:xfrm>
-            <a:off x="3886200" y="4892040"/>
-            <a:ext cx="146304" cy="137160"/>
-          </a:xfrm>
-          <a:prstGeom prst="homePlate">
-            <a:avLst/>
-          </a:prstGeom>
-          <a:solidFill>
-            <a:srgbClr val="4472C4"/>
-          </a:solidFill>
-          <a:ln w="12700">
-            <a:solidFill>
-              <a:srgbClr val="2F5597"/>
-            </a:solidFill>
-          </a:ln>
-          <a:effectLst/>
-        </p:spPr>
-        <p:style>
-          <a:lnRef idx="1">
-            <a:schemeClr val="accent1"/>
-          </a:lnRef>
-          <a:fillRef idx="3">
-            <a:schemeClr val="accent1"/>
-          </a:fillRef>
-          <a:effectRef idx="2">
-            <a:schemeClr val="accent1"/>
-          </a:effectRef>
-          <a:fontRef idx="minor">
-            <a:schemeClr val="lt1"/>
-          </a:fontRef>
-        </p:style>
-        <p:txBody>
-          <a:bodyPr rtlCol="0" anchor="ctr" wrap="square" lIns="18000" rIns="18000" tIns="9000" bIns="9000"/>
-          <a:lstStyle/>
-          <a:p>
-            <a:pPr algn="ctr"/>
-          </a:p>
-        </p:txBody>
-      </p:sp>
-      <p:cxnSp>
-        <p:nvCxnSpPr>
-          <p:cNvPr id="104" name="Connector 103"/>
-          <p:cNvCxnSpPr/>
-          <p:nvPr/>
-        </p:nvCxnSpPr>
-        <p:spPr>
-          <a:xfrm>
-            <a:off x="9809249" y="4892040"/>
-            <a:ext cx="0" cy="932688"/>
-          </a:xfrm>
-          <a:prstGeom prst="line">
-            <a:avLst/>
-          </a:prstGeom>
-          <a:ln w="19050">
-            <a:solidFill>
-              <a:srgbClr val="7F0000"/>
-            </a:solidFill>
-          </a:ln>
-        </p:spPr>
-        <p:style>
-          <a:lnRef idx="2">
-            <a:schemeClr val="accent1"/>
-          </a:lnRef>
-          <a:fillRef idx="0">
-            <a:schemeClr val="accent1"/>
-          </a:fillRef>
-          <a:effectRef idx="1">
-            <a:schemeClr val="accent1"/>
-          </a:effectRef>
-          <a:fontRef idx="minor">
-            <a:schemeClr val="tx1"/>
-          </a:fontRef>
-        </p:style>
-      </p:cxnSp>
-      <p:sp>
-        <p:nvSpPr>
-          <p:cNvPr id="105" name="Pentagon 104"/>
-          <p:cNvSpPr/>
-          <p:nvPr/>
-        </p:nvSpPr>
-        <p:spPr>
-          <a:xfrm rot="10800000">
-            <a:off x="9662945" y="4892040"/>
-            <a:ext cx="146304" cy="137160"/>
-          </a:xfrm>
-          <a:prstGeom prst="homePlate">
-            <a:avLst/>
-          </a:prstGeom>
-          <a:solidFill>
-            <a:srgbClr val="C00000"/>
-          </a:solidFill>
-          <a:ln w="12700">
-            <a:solidFill>
-              <a:srgbClr val="7F0000"/>
-            </a:solidFill>
-          </a:ln>
-          <a:effectLst/>
-        </p:spPr>
-        <p:style>
-          <a:lnRef idx="1">
-            <a:schemeClr val="accent1"/>
-          </a:lnRef>
-          <a:fillRef idx="3">
-            <a:schemeClr val="accent1"/>
-          </a:fillRef>
-          <a:effectRef idx="2">
-            <a:schemeClr val="accent1"/>
-          </a:effectRef>
-          <a:fontRef idx="minor">
-            <a:schemeClr val="lt1"/>
-          </a:fontRef>
-        </p:style>
-        <p:txBody>
-          <a:bodyPr rtlCol="0" anchor="ctr" wrap="square" lIns="18000" rIns="18000" tIns="9000" bIns="9000"/>
-          <a:lstStyle/>
-          <a:p>
-            <a:pPr algn="ctr"/>
-          </a:p>
-        </p:txBody>
-      </p:sp>
-      <p:cxnSp>
-        <p:nvCxnSpPr>
-          <p:cNvPr id="106" name="Connector 105"/>
-          <p:cNvCxnSpPr/>
-          <p:nvPr/>
-        </p:nvCxnSpPr>
-        <p:spPr>
-          <a:xfrm>
             <a:off x="5770806" y="1161288"/>
             <a:ext cx="0" cy="4663440"/>
           </a:xfrm>
@@ -14566,7 +14006,7 @@
       </p:cxnSp>
       <p:cxnSp>
         <p:nvCxnSpPr>
-          <p:cNvPr id="107" name="Connector 106"/>
+          <p:cNvPr id="101" name="Connector 100"/>
           <p:cNvCxnSpPr/>
           <p:nvPr/>
         </p:nvCxnSpPr>
@@ -14601,7 +14041,7 @@
       </p:cxnSp>
       <p:sp>
         <p:nvSpPr>
-          <p:cNvPr id="108" name="Rectangle 107"/>
+          <p:cNvPr id="102" name="Rectangle 101"/>
           <p:cNvSpPr/>
           <p:nvPr/>
         </p:nvSpPr>
@@ -14655,7 +14095,7 @@
       </p:sp>
       <p:cxnSp>
         <p:nvCxnSpPr>
-          <p:cNvPr id="109" name="Connector 108"/>
+          <p:cNvPr id="103" name="Connector 102"/>
           <p:cNvCxnSpPr/>
           <p:nvPr/>
         </p:nvCxnSpPr>
@@ -14690,7 +14130,7 @@
       </p:cxnSp>
       <p:sp>
         <p:nvSpPr>
-          <p:cNvPr id="110" name="Rectangle 109"/>
+          <p:cNvPr id="104" name="Rectangle 103"/>
           <p:cNvSpPr/>
           <p:nvPr/>
         </p:nvSpPr>
@@ -14744,7 +14184,7 @@
       </p:sp>
       <p:sp>
         <p:nvSpPr>
-          <p:cNvPr id="111" name="Diamond 110"/>
+          <p:cNvPr id="105" name="Diamond 104"/>
           <p:cNvSpPr/>
           <p:nvPr/>
         </p:nvSpPr>
@@ -14790,7 +14230,7 @@
       </p:sp>
       <p:sp>
         <p:nvSpPr>
-          <p:cNvPr id="112" name="Rectangle 111"/>
+          <p:cNvPr id="106" name="Rectangle 105"/>
           <p:cNvSpPr/>
           <p:nvPr/>
         </p:nvSpPr>
@@ -14840,7 +14280,7 @@
       </p:sp>
       <p:sp>
         <p:nvSpPr>
-          <p:cNvPr id="113" name="Diamond 112"/>
+          <p:cNvPr id="107" name="Diamond 106"/>
           <p:cNvSpPr/>
           <p:nvPr/>
         </p:nvSpPr>
@@ -14886,7 +14326,7 @@
       </p:sp>
       <p:sp>
         <p:nvSpPr>
-          <p:cNvPr id="114" name="Rectangle 113"/>
+          <p:cNvPr id="108" name="Rectangle 107"/>
           <p:cNvSpPr/>
           <p:nvPr/>
         </p:nvSpPr>
@@ -14936,7 +14376,7 @@
       </p:sp>
       <p:sp>
         <p:nvSpPr>
-          <p:cNvPr id="115" name="Rounded Rectangle 114"/>
+          <p:cNvPr id="109" name="Rounded Rectangle 108"/>
           <p:cNvSpPr/>
           <p:nvPr/>
         </p:nvSpPr>
@@ -14982,7 +14422,7 @@
       </p:sp>
       <p:sp>
         <p:nvSpPr>
-          <p:cNvPr id="116" name="Rectangle 115"/>
+          <p:cNvPr id="110" name="Rectangle 109"/>
           <p:cNvSpPr/>
           <p:nvPr/>
         </p:nvSpPr>
@@ -15032,7 +14472,7 @@
       </p:sp>
       <p:sp>
         <p:nvSpPr>
-          <p:cNvPr id="117" name="Rounded Rectangle 116"/>
+          <p:cNvPr id="111" name="Rounded Rectangle 110"/>
           <p:cNvSpPr/>
           <p:nvPr/>
         </p:nvSpPr>
@@ -15078,7 +14518,7 @@
       </p:sp>
       <p:sp>
         <p:nvSpPr>
-          <p:cNvPr id="118" name="Rectangle 117"/>
+          <p:cNvPr id="112" name="Rectangle 111"/>
           <p:cNvSpPr/>
           <p:nvPr/>
         </p:nvSpPr>
@@ -15128,7 +14568,7 @@
       </p:sp>
       <p:sp>
         <p:nvSpPr>
-          <p:cNvPr id="119" name="Rounded Rectangle 118"/>
+          <p:cNvPr id="113" name="Rounded Rectangle 112"/>
           <p:cNvSpPr/>
           <p:nvPr/>
         </p:nvSpPr>
@@ -15174,7 +14614,7 @@
       </p:sp>
       <p:sp>
         <p:nvSpPr>
-          <p:cNvPr id="120" name="Rectangle 119"/>
+          <p:cNvPr id="114" name="Rectangle 113"/>
           <p:cNvSpPr/>
           <p:nvPr/>
         </p:nvSpPr>
@@ -15224,7 +14664,7 @@
       </p:sp>
       <p:sp>
         <p:nvSpPr>
-          <p:cNvPr id="121" name="Rounded Rectangle 120"/>
+          <p:cNvPr id="115" name="Rounded Rectangle 114"/>
           <p:cNvSpPr/>
           <p:nvPr/>
         </p:nvSpPr>
@@ -15270,7 +14710,7 @@
       </p:sp>
       <p:sp>
         <p:nvSpPr>
-          <p:cNvPr id="122" name="Rectangle 121"/>
+          <p:cNvPr id="116" name="Rectangle 115"/>
           <p:cNvSpPr/>
           <p:nvPr/>
         </p:nvSpPr>
@@ -15320,7 +14760,7 @@
       </p:sp>
       <p:sp>
         <p:nvSpPr>
-          <p:cNvPr id="123" name="Rounded Rectangle 122"/>
+          <p:cNvPr id="117" name="Rounded Rectangle 116"/>
           <p:cNvSpPr/>
           <p:nvPr/>
         </p:nvSpPr>
@@ -15366,7 +14806,7 @@
       </p:sp>
       <p:sp>
         <p:nvSpPr>
-          <p:cNvPr id="124" name="Rectangle 123"/>
+          <p:cNvPr id="118" name="Rectangle 117"/>
           <p:cNvSpPr/>
           <p:nvPr/>
         </p:nvSpPr>
@@ -15416,7 +14856,7 @@
       </p:sp>
       <p:sp>
         <p:nvSpPr>
-          <p:cNvPr id="125" name="Pentagon 124"/>
+          <p:cNvPr id="119" name="Pentagon 118"/>
           <p:cNvSpPr/>
           <p:nvPr/>
         </p:nvSpPr>
@@ -15462,7 +14902,7 @@
       </p:sp>
       <p:sp>
         <p:nvSpPr>
-          <p:cNvPr id="126" name="Rectangle 125"/>
+          <p:cNvPr id="120" name="Rectangle 119"/>
           <p:cNvSpPr/>
           <p:nvPr/>
         </p:nvSpPr>
@@ -15512,7 +14952,7 @@
       </p:sp>
       <p:sp>
         <p:nvSpPr>
-          <p:cNvPr id="127" name="Pentagon 126"/>
+          <p:cNvPr id="121" name="Pentagon 120"/>
           <p:cNvSpPr/>
           <p:nvPr/>
         </p:nvSpPr>
@@ -15558,7 +14998,7 @@
       </p:sp>
       <p:sp>
         <p:nvSpPr>
-          <p:cNvPr id="128" name="Rectangle 127"/>
+          <p:cNvPr id="122" name="Rectangle 121"/>
           <p:cNvSpPr/>
           <p:nvPr/>
         </p:nvSpPr>
@@ -19931,59 +19371,116 @@
           </a:p>
         </p:txBody>
       </p:sp>
-      <p:cxnSp>
-        <p:nvCxnSpPr>
-          <p:cNvPr id="95" name="Connector 94"/>
-          <p:cNvCxnSpPr/>
-          <p:nvPr/>
-        </p:nvCxnSpPr>
-        <p:spPr>
-          <a:xfrm>
-            <a:off x="3886200" y="1161288"/>
-            <a:ext cx="0" cy="621792"/>
-          </a:xfrm>
-          <a:prstGeom prst="line">
-            <a:avLst/>
-          </a:prstGeom>
-          <a:ln w="19050">
+      <p:sp>
+        <p:nvSpPr>
+          <p:cNvPr id="95" name="Diamond 94"/>
+          <p:cNvSpPr/>
+          <p:nvPr/>
+        </p:nvSpPr>
+        <p:spPr>
+          <a:xfrm>
+            <a:off x="3813048" y="1243584"/>
+            <a:ext cx="146304" cy="146304"/>
+          </a:xfrm>
+          <a:prstGeom prst="diamond">
+            <a:avLst/>
+          </a:prstGeom>
+          <a:solidFill>
+            <a:srgbClr val="4472C4"/>
+          </a:solidFill>
+          <a:ln w="15875">
             <a:solidFill>
               <a:srgbClr val="2F5597"/>
             </a:solidFill>
           </a:ln>
-        </p:spPr>
-        <p:style>
-          <a:lnRef idx="2">
-            <a:schemeClr val="accent1"/>
-          </a:lnRef>
-          <a:fillRef idx="0">
-            <a:schemeClr val="accent1"/>
-          </a:fillRef>
-          <a:effectRef idx="1">
-            <a:schemeClr val="accent1"/>
-          </a:effectRef>
-          <a:fontRef idx="minor">
-            <a:schemeClr val="tx1"/>
-          </a:fontRef>
-        </p:style>
-      </p:cxnSp>
-      <p:sp>
-        <p:nvSpPr>
-          <p:cNvPr id="96" name="Pentagon 95"/>
-          <p:cNvSpPr/>
-          <p:nvPr/>
-        </p:nvSpPr>
-        <p:spPr>
-          <a:xfrm>
-            <a:off x="3886200" y="1161288"/>
-            <a:ext cx="146304" cy="137160"/>
-          </a:xfrm>
-          <a:prstGeom prst="homePlate">
+          <a:effectLst/>
+        </p:spPr>
+        <p:style>
+          <a:lnRef idx="1">
+            <a:schemeClr val="accent1"/>
+          </a:lnRef>
+          <a:fillRef idx="3">
+            <a:schemeClr val="accent1"/>
+          </a:fillRef>
+          <a:effectRef idx="2">
+            <a:schemeClr val="accent1"/>
+          </a:effectRef>
+          <a:fontRef idx="minor">
+            <a:schemeClr val="lt1"/>
+          </a:fontRef>
+        </p:style>
+        <p:txBody>
+          <a:bodyPr rtlCol="0" anchor="ctr" wrap="square" lIns="18000" rIns="18000" tIns="9000" bIns="9000"/>
+          <a:lstStyle/>
+          <a:p>
+            <a:pPr algn="ctr"/>
+          </a:p>
+        </p:txBody>
+      </p:sp>
+      <p:sp>
+        <p:nvSpPr>
+          <p:cNvPr id="96" name="Diamond 95"/>
+          <p:cNvSpPr/>
+          <p:nvPr/>
+        </p:nvSpPr>
+        <p:spPr>
+          <a:xfrm>
+            <a:off x="9736097" y="1243584"/>
+            <a:ext cx="146304" cy="146304"/>
+          </a:xfrm>
+          <a:prstGeom prst="diamond">
+            <a:avLst/>
+          </a:prstGeom>
+          <a:solidFill>
+            <a:srgbClr val="C00000"/>
+          </a:solidFill>
+          <a:ln w="15875">
+            <a:solidFill>
+              <a:srgbClr val="7F0000"/>
+            </a:solidFill>
+          </a:ln>
+          <a:effectLst/>
+        </p:spPr>
+        <p:style>
+          <a:lnRef idx="1">
+            <a:schemeClr val="accent1"/>
+          </a:lnRef>
+          <a:fillRef idx="3">
+            <a:schemeClr val="accent1"/>
+          </a:fillRef>
+          <a:effectRef idx="2">
+            <a:schemeClr val="accent1"/>
+          </a:effectRef>
+          <a:fontRef idx="minor">
+            <a:schemeClr val="lt1"/>
+          </a:fontRef>
+        </p:style>
+        <p:txBody>
+          <a:bodyPr rtlCol="0" anchor="ctr" wrap="square" lIns="18000" rIns="18000" tIns="9000" bIns="9000"/>
+          <a:lstStyle/>
+          <a:p>
+            <a:pPr algn="ctr"/>
+          </a:p>
+        </p:txBody>
+      </p:sp>
+      <p:sp>
+        <p:nvSpPr>
+          <p:cNvPr id="97" name="Diamond 96"/>
+          <p:cNvSpPr/>
+          <p:nvPr/>
+        </p:nvSpPr>
+        <p:spPr>
+          <a:xfrm>
+            <a:off x="3813048" y="1865376"/>
+            <a:ext cx="146304" cy="146304"/>
+          </a:xfrm>
+          <a:prstGeom prst="diamond">
             <a:avLst/>
           </a:prstGeom>
           <a:solidFill>
             <a:srgbClr val="4472C4"/>
           </a:solidFill>
-          <a:ln w="12700">
+          <a:ln w="15875">
             <a:solidFill>
               <a:srgbClr val="2F5597"/>
             </a:solidFill>
@@ -20012,59 +19509,116 @@
           </a:p>
         </p:txBody>
       </p:sp>
-      <p:cxnSp>
-        <p:nvCxnSpPr>
-          <p:cNvPr id="97" name="Connector 96"/>
-          <p:cNvCxnSpPr/>
-          <p:nvPr/>
-        </p:nvCxnSpPr>
-        <p:spPr>
-          <a:xfrm>
-            <a:off x="9809249" y="1161288"/>
-            <a:ext cx="0" cy="621792"/>
-          </a:xfrm>
-          <a:prstGeom prst="line">
-            <a:avLst/>
-          </a:prstGeom>
-          <a:ln w="19050">
+      <p:sp>
+        <p:nvSpPr>
+          <p:cNvPr id="98" name="Diamond 97"/>
+          <p:cNvSpPr/>
+          <p:nvPr/>
+        </p:nvSpPr>
+        <p:spPr>
+          <a:xfrm>
+            <a:off x="8120720" y="1865376"/>
+            <a:ext cx="146304" cy="146304"/>
+          </a:xfrm>
+          <a:prstGeom prst="diamond">
+            <a:avLst/>
+          </a:prstGeom>
+          <a:solidFill>
+            <a:srgbClr val="C00000"/>
+          </a:solidFill>
+          <a:ln w="15875">
             <a:solidFill>
               <a:srgbClr val="7F0000"/>
             </a:solidFill>
           </a:ln>
-        </p:spPr>
-        <p:style>
-          <a:lnRef idx="2">
-            <a:schemeClr val="accent1"/>
-          </a:lnRef>
-          <a:fillRef idx="0">
-            <a:schemeClr val="accent1"/>
-          </a:fillRef>
-          <a:effectRef idx="1">
-            <a:schemeClr val="accent1"/>
-          </a:effectRef>
-          <a:fontRef idx="minor">
-            <a:schemeClr val="tx1"/>
-          </a:fontRef>
-        </p:style>
-      </p:cxnSp>
-      <p:sp>
-        <p:nvSpPr>
-          <p:cNvPr id="98" name="Pentagon 97"/>
-          <p:cNvSpPr/>
-          <p:nvPr/>
-        </p:nvSpPr>
-        <p:spPr>
-          <a:xfrm rot="10800000">
-            <a:off x="9662945" y="1161288"/>
-            <a:ext cx="146304" cy="137160"/>
-          </a:xfrm>
-          <a:prstGeom prst="homePlate">
+          <a:effectLst/>
+        </p:spPr>
+        <p:style>
+          <a:lnRef idx="1">
+            <a:schemeClr val="accent1"/>
+          </a:lnRef>
+          <a:fillRef idx="3">
+            <a:schemeClr val="accent1"/>
+          </a:fillRef>
+          <a:effectRef idx="2">
+            <a:schemeClr val="accent1"/>
+          </a:effectRef>
+          <a:fontRef idx="minor">
+            <a:schemeClr val="lt1"/>
+          </a:fontRef>
+        </p:style>
+        <p:txBody>
+          <a:bodyPr rtlCol="0" anchor="ctr" wrap="square" lIns="18000" rIns="18000" tIns="9000" bIns="9000"/>
+          <a:lstStyle/>
+          <a:p>
+            <a:pPr algn="ctr"/>
+          </a:p>
+        </p:txBody>
+      </p:sp>
+      <p:sp>
+        <p:nvSpPr>
+          <p:cNvPr id="99" name="Diamond 98"/>
+          <p:cNvSpPr/>
+          <p:nvPr/>
+        </p:nvSpPr>
+        <p:spPr>
+          <a:xfrm>
+            <a:off x="7582261" y="2487168"/>
+            <a:ext cx="146304" cy="146304"/>
+          </a:xfrm>
+          <a:prstGeom prst="diamond">
+            <a:avLst/>
+          </a:prstGeom>
+          <a:solidFill>
+            <a:srgbClr val="4472C4"/>
+          </a:solidFill>
+          <a:ln w="15875">
+            <a:solidFill>
+              <a:srgbClr val="2F5597"/>
+            </a:solidFill>
+          </a:ln>
+          <a:effectLst/>
+        </p:spPr>
+        <p:style>
+          <a:lnRef idx="1">
+            <a:schemeClr val="accent1"/>
+          </a:lnRef>
+          <a:fillRef idx="3">
+            <a:schemeClr val="accent1"/>
+          </a:fillRef>
+          <a:effectRef idx="2">
+            <a:schemeClr val="accent1"/>
+          </a:effectRef>
+          <a:fontRef idx="minor">
+            <a:schemeClr val="lt1"/>
+          </a:fontRef>
+        </p:style>
+        <p:txBody>
+          <a:bodyPr rtlCol="0" anchor="ctr" wrap="square" lIns="18000" rIns="18000" tIns="9000" bIns="9000"/>
+          <a:lstStyle/>
+          <a:p>
+            <a:pPr algn="ctr"/>
+          </a:p>
+        </p:txBody>
+      </p:sp>
+      <p:sp>
+        <p:nvSpPr>
+          <p:cNvPr id="100" name="Diamond 99"/>
+          <p:cNvSpPr/>
+          <p:nvPr/>
+        </p:nvSpPr>
+        <p:spPr>
+          <a:xfrm>
+            <a:off x="10813015" y="2487168"/>
+            <a:ext cx="146304" cy="146304"/>
+          </a:xfrm>
+          <a:prstGeom prst="diamond">
             <a:avLst/>
           </a:prstGeom>
           <a:solidFill>
             <a:srgbClr val="C00000"/>
           </a:solidFill>
-          <a:ln w="12700">
+          <a:ln w="15875">
             <a:solidFill>
               <a:srgbClr val="7F0000"/>
             </a:solidFill>
@@ -20093,63 +19647,28 @@
           </a:p>
         </p:txBody>
       </p:sp>
-      <p:cxnSp>
-        <p:nvCxnSpPr>
-          <p:cNvPr id="99" name="Connector 98"/>
-          <p:cNvCxnSpPr/>
-          <p:nvPr/>
-        </p:nvCxnSpPr>
-        <p:spPr>
-          <a:xfrm>
-            <a:off x="3886200" y="1783080"/>
-            <a:ext cx="0" cy="621792"/>
-          </a:xfrm>
-          <a:prstGeom prst="line">
-            <a:avLst/>
-          </a:prstGeom>
-          <a:ln w="19050">
+      <p:sp>
+        <p:nvSpPr>
+          <p:cNvPr id="101" name="Diamond 100"/>
+          <p:cNvSpPr/>
+          <p:nvPr/>
+        </p:nvSpPr>
+        <p:spPr>
+          <a:xfrm>
+            <a:off x="3813048" y="4663440"/>
+            <a:ext cx="146304" cy="146304"/>
+          </a:xfrm>
+          <a:prstGeom prst="diamond">
+            <a:avLst/>
+          </a:prstGeom>
+          <a:solidFill>
+            <a:srgbClr val="4472C4"/>
+          </a:solidFill>
+          <a:ln w="15875">
             <a:solidFill>
               <a:srgbClr val="2F5597"/>
             </a:solidFill>
           </a:ln>
-        </p:spPr>
-        <p:style>
-          <a:lnRef idx="2">
-            <a:schemeClr val="accent1"/>
-          </a:lnRef>
-          <a:fillRef idx="0">
-            <a:schemeClr val="accent1"/>
-          </a:fillRef>
-          <a:effectRef idx="1">
-            <a:schemeClr val="accent1"/>
-          </a:effectRef>
-          <a:fontRef idx="minor">
-            <a:schemeClr val="tx1"/>
-          </a:fontRef>
-        </p:style>
-      </p:cxnSp>
-      <p:sp>
-        <p:nvSpPr>
-          <p:cNvPr id="100" name="Pentagon 99"/>
-          <p:cNvSpPr/>
-          <p:nvPr/>
-        </p:nvSpPr>
-        <p:spPr>
-          <a:xfrm>
-            <a:off x="3886200" y="1783080"/>
-            <a:ext cx="146304" cy="137160"/>
-          </a:xfrm>
-          <a:prstGeom prst="homePlate">
-            <a:avLst/>
-          </a:prstGeom>
-          <a:solidFill>
-            <a:srgbClr val="4472C4"/>
-          </a:solidFill>
-          <a:ln w="12700">
-            <a:solidFill>
-              <a:srgbClr val="2F5597"/>
-            </a:solidFill>
-          </a:ln>
           <a:effectLst/>
         </p:spPr>
         <p:style>
@@ -20174,59 +19693,24 @@
           </a:p>
         </p:txBody>
       </p:sp>
-      <p:cxnSp>
-        <p:nvCxnSpPr>
-          <p:cNvPr id="101" name="Connector 100"/>
-          <p:cNvCxnSpPr/>
-          <p:nvPr/>
-        </p:nvCxnSpPr>
-        <p:spPr>
-          <a:xfrm>
-            <a:off x="8193872" y="1783080"/>
-            <a:ext cx="0" cy="621792"/>
-          </a:xfrm>
-          <a:prstGeom prst="line">
-            <a:avLst/>
-          </a:prstGeom>
-          <a:ln w="19050">
-            <a:solidFill>
-              <a:srgbClr val="7F0000"/>
-            </a:solidFill>
-          </a:ln>
-        </p:spPr>
-        <p:style>
-          <a:lnRef idx="2">
-            <a:schemeClr val="accent1"/>
-          </a:lnRef>
-          <a:fillRef idx="0">
-            <a:schemeClr val="accent1"/>
-          </a:fillRef>
-          <a:effectRef idx="1">
-            <a:schemeClr val="accent1"/>
-          </a:effectRef>
-          <a:fontRef idx="minor">
-            <a:schemeClr val="tx1"/>
-          </a:fontRef>
-        </p:style>
-      </p:cxnSp>
-      <p:sp>
-        <p:nvSpPr>
-          <p:cNvPr id="102" name="Pentagon 101"/>
-          <p:cNvSpPr/>
-          <p:nvPr/>
-        </p:nvSpPr>
-        <p:spPr>
-          <a:xfrm rot="10800000">
-            <a:off x="8047568" y="1783080"/>
-            <a:ext cx="146304" cy="137160"/>
-          </a:xfrm>
-          <a:prstGeom prst="homePlate">
+      <p:sp>
+        <p:nvSpPr>
+          <p:cNvPr id="102" name="Diamond 101"/>
+          <p:cNvSpPr/>
+          <p:nvPr/>
+        </p:nvSpPr>
+        <p:spPr>
+          <a:xfrm>
+            <a:off x="9736097" y="4663440"/>
+            <a:ext cx="146304" cy="146304"/>
+          </a:xfrm>
+          <a:prstGeom prst="diamond">
             <a:avLst/>
           </a:prstGeom>
           <a:solidFill>
             <a:srgbClr val="C00000"/>
           </a:solidFill>
-          <a:ln w="12700">
+          <a:ln w="15875">
             <a:solidFill>
               <a:srgbClr val="7F0000"/>
             </a:solidFill>
@@ -20263,330 +19747,6 @@
         </p:nvCxnSpPr>
         <p:spPr>
           <a:xfrm>
-            <a:off x="7655413" y="2404872"/>
-            <a:ext cx="0" cy="2176272"/>
-          </a:xfrm>
-          <a:prstGeom prst="line">
-            <a:avLst/>
-          </a:prstGeom>
-          <a:ln w="19050">
-            <a:solidFill>
-              <a:srgbClr val="2F5597"/>
-            </a:solidFill>
-          </a:ln>
-        </p:spPr>
-        <p:style>
-          <a:lnRef idx="2">
-            <a:schemeClr val="accent1"/>
-          </a:lnRef>
-          <a:fillRef idx="0">
-            <a:schemeClr val="accent1"/>
-          </a:fillRef>
-          <a:effectRef idx="1">
-            <a:schemeClr val="accent1"/>
-          </a:effectRef>
-          <a:fontRef idx="minor">
-            <a:schemeClr val="tx1"/>
-          </a:fontRef>
-        </p:style>
-      </p:cxnSp>
-      <p:sp>
-        <p:nvSpPr>
-          <p:cNvPr id="104" name="Pentagon 103"/>
-          <p:cNvSpPr/>
-          <p:nvPr/>
-        </p:nvSpPr>
-        <p:spPr>
-          <a:xfrm>
-            <a:off x="7655413" y="2404872"/>
-            <a:ext cx="146304" cy="137160"/>
-          </a:xfrm>
-          <a:prstGeom prst="homePlate">
-            <a:avLst/>
-          </a:prstGeom>
-          <a:solidFill>
-            <a:srgbClr val="4472C4"/>
-          </a:solidFill>
-          <a:ln w="12700">
-            <a:solidFill>
-              <a:srgbClr val="2F5597"/>
-            </a:solidFill>
-          </a:ln>
-          <a:effectLst/>
-        </p:spPr>
-        <p:style>
-          <a:lnRef idx="1">
-            <a:schemeClr val="accent1"/>
-          </a:lnRef>
-          <a:fillRef idx="3">
-            <a:schemeClr val="accent1"/>
-          </a:fillRef>
-          <a:effectRef idx="2">
-            <a:schemeClr val="accent1"/>
-          </a:effectRef>
-          <a:fontRef idx="minor">
-            <a:schemeClr val="lt1"/>
-          </a:fontRef>
-        </p:style>
-        <p:txBody>
-          <a:bodyPr rtlCol="0" anchor="ctr" wrap="square" lIns="18000" rIns="18000" tIns="9000" bIns="9000"/>
-          <a:lstStyle/>
-          <a:p>
-            <a:pPr algn="ctr"/>
-          </a:p>
-        </p:txBody>
-      </p:sp>
-      <p:cxnSp>
-        <p:nvCxnSpPr>
-          <p:cNvPr id="105" name="Connector 104"/>
-          <p:cNvCxnSpPr/>
-          <p:nvPr/>
-        </p:nvCxnSpPr>
-        <p:spPr>
-          <a:xfrm>
-            <a:off x="10886167" y="2404872"/>
-            <a:ext cx="0" cy="2176272"/>
-          </a:xfrm>
-          <a:prstGeom prst="line">
-            <a:avLst/>
-          </a:prstGeom>
-          <a:ln w="19050">
-            <a:solidFill>
-              <a:srgbClr val="7F0000"/>
-            </a:solidFill>
-          </a:ln>
-        </p:spPr>
-        <p:style>
-          <a:lnRef idx="2">
-            <a:schemeClr val="accent1"/>
-          </a:lnRef>
-          <a:fillRef idx="0">
-            <a:schemeClr val="accent1"/>
-          </a:fillRef>
-          <a:effectRef idx="1">
-            <a:schemeClr val="accent1"/>
-          </a:effectRef>
-          <a:fontRef idx="minor">
-            <a:schemeClr val="tx1"/>
-          </a:fontRef>
-        </p:style>
-      </p:cxnSp>
-      <p:sp>
-        <p:nvSpPr>
-          <p:cNvPr id="106" name="Pentagon 105"/>
-          <p:cNvSpPr/>
-          <p:nvPr/>
-        </p:nvSpPr>
-        <p:spPr>
-          <a:xfrm rot="10800000">
-            <a:off x="10739863" y="2404872"/>
-            <a:ext cx="146304" cy="137160"/>
-          </a:xfrm>
-          <a:prstGeom prst="homePlate">
-            <a:avLst/>
-          </a:prstGeom>
-          <a:solidFill>
-            <a:srgbClr val="C00000"/>
-          </a:solidFill>
-          <a:ln w="12700">
-            <a:solidFill>
-              <a:srgbClr val="7F0000"/>
-            </a:solidFill>
-          </a:ln>
-          <a:effectLst/>
-        </p:spPr>
-        <p:style>
-          <a:lnRef idx="1">
-            <a:schemeClr val="accent1"/>
-          </a:lnRef>
-          <a:fillRef idx="3">
-            <a:schemeClr val="accent1"/>
-          </a:fillRef>
-          <a:effectRef idx="2">
-            <a:schemeClr val="accent1"/>
-          </a:effectRef>
-          <a:fontRef idx="minor">
-            <a:schemeClr val="lt1"/>
-          </a:fontRef>
-        </p:style>
-        <p:txBody>
-          <a:bodyPr rtlCol="0" anchor="ctr" wrap="square" lIns="18000" rIns="18000" tIns="9000" bIns="9000"/>
-          <a:lstStyle/>
-          <a:p>
-            <a:pPr algn="ctr"/>
-          </a:p>
-        </p:txBody>
-      </p:sp>
-      <p:cxnSp>
-        <p:nvCxnSpPr>
-          <p:cNvPr id="107" name="Connector 106"/>
-          <p:cNvCxnSpPr/>
-          <p:nvPr/>
-        </p:nvCxnSpPr>
-        <p:spPr>
-          <a:xfrm>
-            <a:off x="3886200" y="4581144"/>
-            <a:ext cx="0" cy="1243584"/>
-          </a:xfrm>
-          <a:prstGeom prst="line">
-            <a:avLst/>
-          </a:prstGeom>
-          <a:ln w="19050">
-            <a:solidFill>
-              <a:srgbClr val="2F5597"/>
-            </a:solidFill>
-          </a:ln>
-        </p:spPr>
-        <p:style>
-          <a:lnRef idx="2">
-            <a:schemeClr val="accent1"/>
-          </a:lnRef>
-          <a:fillRef idx="0">
-            <a:schemeClr val="accent1"/>
-          </a:fillRef>
-          <a:effectRef idx="1">
-            <a:schemeClr val="accent1"/>
-          </a:effectRef>
-          <a:fontRef idx="minor">
-            <a:schemeClr val="tx1"/>
-          </a:fontRef>
-        </p:style>
-      </p:cxnSp>
-      <p:sp>
-        <p:nvSpPr>
-          <p:cNvPr id="108" name="Pentagon 107"/>
-          <p:cNvSpPr/>
-          <p:nvPr/>
-        </p:nvSpPr>
-        <p:spPr>
-          <a:xfrm>
-            <a:off x="3886200" y="4581144"/>
-            <a:ext cx="146304" cy="137160"/>
-          </a:xfrm>
-          <a:prstGeom prst="homePlate">
-            <a:avLst/>
-          </a:prstGeom>
-          <a:solidFill>
-            <a:srgbClr val="4472C4"/>
-          </a:solidFill>
-          <a:ln w="12700">
-            <a:solidFill>
-              <a:srgbClr val="2F5597"/>
-            </a:solidFill>
-          </a:ln>
-          <a:effectLst/>
-        </p:spPr>
-        <p:style>
-          <a:lnRef idx="1">
-            <a:schemeClr val="accent1"/>
-          </a:lnRef>
-          <a:fillRef idx="3">
-            <a:schemeClr val="accent1"/>
-          </a:fillRef>
-          <a:effectRef idx="2">
-            <a:schemeClr val="accent1"/>
-          </a:effectRef>
-          <a:fontRef idx="minor">
-            <a:schemeClr val="lt1"/>
-          </a:fontRef>
-        </p:style>
-        <p:txBody>
-          <a:bodyPr rtlCol="0" anchor="ctr" wrap="square" lIns="18000" rIns="18000" tIns="9000" bIns="9000"/>
-          <a:lstStyle/>
-          <a:p>
-            <a:pPr algn="ctr"/>
-          </a:p>
-        </p:txBody>
-      </p:sp>
-      <p:cxnSp>
-        <p:nvCxnSpPr>
-          <p:cNvPr id="109" name="Connector 108"/>
-          <p:cNvCxnSpPr/>
-          <p:nvPr/>
-        </p:nvCxnSpPr>
-        <p:spPr>
-          <a:xfrm>
-            <a:off x="9809249" y="4581144"/>
-            <a:ext cx="0" cy="1243584"/>
-          </a:xfrm>
-          <a:prstGeom prst="line">
-            <a:avLst/>
-          </a:prstGeom>
-          <a:ln w="19050">
-            <a:solidFill>
-              <a:srgbClr val="7F0000"/>
-            </a:solidFill>
-          </a:ln>
-        </p:spPr>
-        <p:style>
-          <a:lnRef idx="2">
-            <a:schemeClr val="accent1"/>
-          </a:lnRef>
-          <a:fillRef idx="0">
-            <a:schemeClr val="accent1"/>
-          </a:fillRef>
-          <a:effectRef idx="1">
-            <a:schemeClr val="accent1"/>
-          </a:effectRef>
-          <a:fontRef idx="minor">
-            <a:schemeClr val="tx1"/>
-          </a:fontRef>
-        </p:style>
-      </p:cxnSp>
-      <p:sp>
-        <p:nvSpPr>
-          <p:cNvPr id="110" name="Pentagon 109"/>
-          <p:cNvSpPr/>
-          <p:nvPr/>
-        </p:nvSpPr>
-        <p:spPr>
-          <a:xfrm rot="10800000">
-            <a:off x="9662945" y="4581144"/>
-            <a:ext cx="146304" cy="137160"/>
-          </a:xfrm>
-          <a:prstGeom prst="homePlate">
-            <a:avLst/>
-          </a:prstGeom>
-          <a:solidFill>
-            <a:srgbClr val="C00000"/>
-          </a:solidFill>
-          <a:ln w="12700">
-            <a:solidFill>
-              <a:srgbClr val="7F0000"/>
-            </a:solidFill>
-          </a:ln>
-          <a:effectLst/>
-        </p:spPr>
-        <p:style>
-          <a:lnRef idx="1">
-            <a:schemeClr val="accent1"/>
-          </a:lnRef>
-          <a:fillRef idx="3">
-            <a:schemeClr val="accent1"/>
-          </a:fillRef>
-          <a:effectRef idx="2">
-            <a:schemeClr val="accent1"/>
-          </a:effectRef>
-          <a:fontRef idx="minor">
-            <a:schemeClr val="lt1"/>
-          </a:fontRef>
-        </p:style>
-        <p:txBody>
-          <a:bodyPr rtlCol="0" anchor="ctr" wrap="square" lIns="18000" rIns="18000" tIns="9000" bIns="9000"/>
-          <a:lstStyle/>
-          <a:p>
-            <a:pPr algn="ctr"/>
-          </a:p>
-        </p:txBody>
-      </p:sp>
-      <p:cxnSp>
-        <p:nvCxnSpPr>
-          <p:cNvPr id="111" name="Connector 110"/>
-          <p:cNvCxnSpPr/>
-          <p:nvPr/>
-        </p:nvCxnSpPr>
-        <p:spPr>
-          <a:xfrm>
             <a:off x="5770806" y="1161288"/>
             <a:ext cx="0" cy="4663440"/>
           </a:xfrm>
@@ -20616,7 +19776,7 @@
       </p:cxnSp>
       <p:cxnSp>
         <p:nvCxnSpPr>
-          <p:cNvPr id="112" name="Connector 111"/>
+          <p:cNvPr id="104" name="Connector 103"/>
           <p:cNvCxnSpPr/>
           <p:nvPr/>
         </p:nvCxnSpPr>
@@ -20651,7 +19811,7 @@
       </p:cxnSp>
       <p:sp>
         <p:nvSpPr>
-          <p:cNvPr id="113" name="Rectangle 112"/>
+          <p:cNvPr id="105" name="Rectangle 104"/>
           <p:cNvSpPr/>
           <p:nvPr/>
         </p:nvSpPr>
@@ -20705,7 +19865,7 @@
       </p:sp>
       <p:cxnSp>
         <p:nvCxnSpPr>
-          <p:cNvPr id="114" name="Connector 113"/>
+          <p:cNvPr id="106" name="Connector 105"/>
           <p:cNvCxnSpPr/>
           <p:nvPr/>
         </p:nvCxnSpPr>
@@ -20740,7 +19900,7 @@
       </p:cxnSp>
       <p:sp>
         <p:nvSpPr>
-          <p:cNvPr id="115" name="Rectangle 114"/>
+          <p:cNvPr id="107" name="Rectangle 106"/>
           <p:cNvSpPr/>
           <p:nvPr/>
         </p:nvSpPr>
@@ -20794,7 +19954,7 @@
       </p:sp>
       <p:sp>
         <p:nvSpPr>
-          <p:cNvPr id="116" name="Diamond 115"/>
+          <p:cNvPr id="108" name="Diamond 107"/>
           <p:cNvSpPr/>
           <p:nvPr/>
         </p:nvSpPr>
@@ -20840,7 +20000,7 @@
       </p:sp>
       <p:sp>
         <p:nvSpPr>
-          <p:cNvPr id="117" name="Rectangle 116"/>
+          <p:cNvPr id="109" name="Rectangle 108"/>
           <p:cNvSpPr/>
           <p:nvPr/>
         </p:nvSpPr>
@@ -20890,7 +20050,7 @@
       </p:sp>
       <p:sp>
         <p:nvSpPr>
-          <p:cNvPr id="118" name="Diamond 117"/>
+          <p:cNvPr id="110" name="Diamond 109"/>
           <p:cNvSpPr/>
           <p:nvPr/>
         </p:nvSpPr>
@@ -20936,7 +20096,7 @@
       </p:sp>
       <p:sp>
         <p:nvSpPr>
-          <p:cNvPr id="119" name="Rectangle 118"/>
+          <p:cNvPr id="111" name="Rectangle 110"/>
           <p:cNvSpPr/>
           <p:nvPr/>
         </p:nvSpPr>
@@ -20986,7 +20146,7 @@
       </p:sp>
       <p:sp>
         <p:nvSpPr>
-          <p:cNvPr id="120" name="Rounded Rectangle 119"/>
+          <p:cNvPr id="112" name="Rounded Rectangle 111"/>
           <p:cNvSpPr/>
           <p:nvPr/>
         </p:nvSpPr>
@@ -21032,7 +20192,7 @@
       </p:sp>
       <p:sp>
         <p:nvSpPr>
-          <p:cNvPr id="121" name="Rectangle 120"/>
+          <p:cNvPr id="113" name="Rectangle 112"/>
           <p:cNvSpPr/>
           <p:nvPr/>
         </p:nvSpPr>
@@ -21082,7 +20242,7 @@
       </p:sp>
       <p:sp>
         <p:nvSpPr>
-          <p:cNvPr id="122" name="Rounded Rectangle 121"/>
+          <p:cNvPr id="114" name="Rounded Rectangle 113"/>
           <p:cNvSpPr/>
           <p:nvPr/>
         </p:nvSpPr>
@@ -21128,7 +20288,7 @@
       </p:sp>
       <p:sp>
         <p:nvSpPr>
-          <p:cNvPr id="123" name="Rectangle 122"/>
+          <p:cNvPr id="115" name="Rectangle 114"/>
           <p:cNvSpPr/>
           <p:nvPr/>
         </p:nvSpPr>
@@ -21178,7 +20338,7 @@
       </p:sp>
       <p:sp>
         <p:nvSpPr>
-          <p:cNvPr id="124" name="Rounded Rectangle 123"/>
+          <p:cNvPr id="116" name="Rounded Rectangle 115"/>
           <p:cNvSpPr/>
           <p:nvPr/>
         </p:nvSpPr>
@@ -21224,7 +20384,7 @@
       </p:sp>
       <p:sp>
         <p:nvSpPr>
-          <p:cNvPr id="125" name="Rectangle 124"/>
+          <p:cNvPr id="117" name="Rectangle 116"/>
           <p:cNvSpPr/>
           <p:nvPr/>
         </p:nvSpPr>
@@ -21274,7 +20434,7 @@
       </p:sp>
       <p:sp>
         <p:nvSpPr>
-          <p:cNvPr id="126" name="Rounded Rectangle 125"/>
+          <p:cNvPr id="118" name="Rounded Rectangle 117"/>
           <p:cNvSpPr/>
           <p:nvPr/>
         </p:nvSpPr>
@@ -21320,7 +20480,7 @@
       </p:sp>
       <p:sp>
         <p:nvSpPr>
-          <p:cNvPr id="127" name="Rectangle 126"/>
+          <p:cNvPr id="119" name="Rectangle 118"/>
           <p:cNvSpPr/>
           <p:nvPr/>
         </p:nvSpPr>
@@ -21370,7 +20530,7 @@
       </p:sp>
       <p:sp>
         <p:nvSpPr>
-          <p:cNvPr id="128" name="Rounded Rectangle 127"/>
+          <p:cNvPr id="120" name="Rounded Rectangle 119"/>
           <p:cNvSpPr/>
           <p:nvPr/>
         </p:nvSpPr>
@@ -21416,7 +20576,7 @@
       </p:sp>
       <p:sp>
         <p:nvSpPr>
-          <p:cNvPr id="129" name="Rectangle 128"/>
+          <p:cNvPr id="121" name="Rectangle 120"/>
           <p:cNvSpPr/>
           <p:nvPr/>
         </p:nvSpPr>
@@ -21466,7 +20626,7 @@
       </p:sp>
       <p:sp>
         <p:nvSpPr>
-          <p:cNvPr id="130" name="Pentagon 129"/>
+          <p:cNvPr id="122" name="Pentagon 121"/>
           <p:cNvSpPr/>
           <p:nvPr/>
         </p:nvSpPr>
@@ -21512,7 +20672,7 @@
       </p:sp>
       <p:sp>
         <p:nvSpPr>
-          <p:cNvPr id="131" name="Rectangle 130"/>
+          <p:cNvPr id="123" name="Rectangle 122"/>
           <p:cNvSpPr/>
           <p:nvPr/>
         </p:nvSpPr>
@@ -21562,7 +20722,7 @@
       </p:sp>
       <p:sp>
         <p:nvSpPr>
-          <p:cNvPr id="132" name="Pentagon 131"/>
+          <p:cNvPr id="124" name="Pentagon 123"/>
           <p:cNvSpPr/>
           <p:nvPr/>
         </p:nvSpPr>
@@ -21608,7 +20768,7 @@
       </p:sp>
       <p:sp>
         <p:nvSpPr>
-          <p:cNvPr id="133" name="Rectangle 132"/>
+          <p:cNvPr id="125" name="Rectangle 124"/>
           <p:cNvSpPr/>
           <p:nvPr/>
         </p:nvSpPr>
@@ -24861,61 +24021,72 @@
           </a:p>
         </p:txBody>
       </p:sp>
-      <p:cxnSp>
-        <p:nvCxnSpPr>
-          <p:cNvPr id="70" name="Connector 69"/>
-          <p:cNvCxnSpPr/>
-          <p:nvPr/>
-        </p:nvCxnSpPr>
-        <p:spPr>
-          <a:xfrm>
-            <a:off x="3886200" y="1161288"/>
-            <a:ext cx="0" cy="2176272"/>
-          </a:xfrm>
-          <a:prstGeom prst="line">
-            <a:avLst/>
-          </a:prstGeom>
-          <a:ln w="19050">
+      <p:sp>
+        <p:nvSpPr>
+          <p:cNvPr id="70" name="Diamond 69"/>
+          <p:cNvSpPr/>
+          <p:nvPr/>
+        </p:nvSpPr>
+        <p:spPr>
+          <a:xfrm>
+            <a:off x="3813048" y="1243584"/>
+            <a:ext cx="146304" cy="146304"/>
+          </a:xfrm>
+          <a:prstGeom prst="diamond">
+            <a:avLst/>
+          </a:prstGeom>
+          <a:solidFill>
+            <a:srgbClr val="4472C4"/>
+          </a:solidFill>
+          <a:ln w="15875">
             <a:solidFill>
               <a:srgbClr val="2F5597"/>
             </a:solidFill>
           </a:ln>
-        </p:spPr>
-        <p:style>
-          <a:lnRef idx="2">
-            <a:schemeClr val="accent1"/>
-          </a:lnRef>
-          <a:fillRef idx="0">
-            <a:schemeClr val="accent1"/>
-          </a:fillRef>
-          <a:effectRef idx="1">
-            <a:schemeClr val="accent1"/>
-          </a:effectRef>
-          <a:fontRef idx="minor">
-            <a:schemeClr val="tx1"/>
-          </a:fontRef>
-        </p:style>
-      </p:cxnSp>
-      <p:sp>
-        <p:nvSpPr>
-          <p:cNvPr id="71" name="Pentagon 70"/>
-          <p:cNvSpPr/>
-          <p:nvPr/>
-        </p:nvSpPr>
-        <p:spPr>
-          <a:xfrm>
-            <a:off x="3886200" y="1161288"/>
-            <a:ext cx="146304" cy="137160"/>
-          </a:xfrm>
-          <a:prstGeom prst="homePlate">
-            <a:avLst/>
-          </a:prstGeom>
-          <a:solidFill>
-            <a:srgbClr val="4472C4"/>
-          </a:solidFill>
-          <a:ln w="12700">
-            <a:solidFill>
-              <a:srgbClr val="2F5597"/>
+          <a:effectLst/>
+        </p:spPr>
+        <p:style>
+          <a:lnRef idx="1">
+            <a:schemeClr val="accent1"/>
+          </a:lnRef>
+          <a:fillRef idx="3">
+            <a:schemeClr val="accent1"/>
+          </a:fillRef>
+          <a:effectRef idx="2">
+            <a:schemeClr val="accent1"/>
+          </a:effectRef>
+          <a:fontRef idx="minor">
+            <a:schemeClr val="lt1"/>
+          </a:fontRef>
+        </p:style>
+        <p:txBody>
+          <a:bodyPr rtlCol="0" anchor="ctr" wrap="square" lIns="18000" rIns="18000" tIns="9000" bIns="9000"/>
+          <a:lstStyle/>
+          <a:p>
+            <a:pPr algn="ctr"/>
+          </a:p>
+        </p:txBody>
+      </p:sp>
+      <p:sp>
+        <p:nvSpPr>
+          <p:cNvPr id="71" name="Diamond 70"/>
+          <p:cNvSpPr/>
+          <p:nvPr/>
+        </p:nvSpPr>
+        <p:spPr>
+          <a:xfrm>
+            <a:off x="9736097" y="1243584"/>
+            <a:ext cx="146304" cy="146304"/>
+          </a:xfrm>
+          <a:prstGeom prst="diamond">
+            <a:avLst/>
+          </a:prstGeom>
+          <a:solidFill>
+            <a:srgbClr val="C00000"/>
+          </a:solidFill>
+          <a:ln w="15875">
+            <a:solidFill>
+              <a:srgbClr val="7F0000"/>
             </a:solidFill>
           </a:ln>
           <a:effectLst/>
@@ -24950,15 +24121,15 @@
         </p:nvCxnSpPr>
         <p:spPr>
           <a:xfrm>
-            <a:off x="9809249" y="1161288"/>
+            <a:off x="5770806" y="1161288"/>
             <a:ext cx="0" cy="2176272"/>
           </a:xfrm>
           <a:prstGeom prst="line">
             <a:avLst/>
           </a:prstGeom>
-          <a:ln w="19050">
-            <a:solidFill>
-              <a:srgbClr val="7F0000"/>
+          <a:ln w="22225">
+            <a:solidFill>
+              <a:srgbClr val="2E7D32"/>
             </a:solidFill>
           </a:ln>
         </p:spPr>
@@ -24977,69 +24148,23 @@
           </a:fontRef>
         </p:style>
       </p:cxnSp>
-      <p:sp>
-        <p:nvSpPr>
-          <p:cNvPr id="73" name="Pentagon 72"/>
-          <p:cNvSpPr/>
-          <p:nvPr/>
-        </p:nvSpPr>
-        <p:spPr>
-          <a:xfrm rot="10800000">
-            <a:off x="9662945" y="1161288"/>
-            <a:ext cx="146304" cy="137160"/>
-          </a:xfrm>
-          <a:prstGeom prst="homePlate">
-            <a:avLst/>
-          </a:prstGeom>
-          <a:solidFill>
-            <a:srgbClr val="C00000"/>
-          </a:solidFill>
-          <a:ln w="12700">
-            <a:solidFill>
-              <a:srgbClr val="7F0000"/>
-            </a:solidFill>
-          </a:ln>
-          <a:effectLst/>
-        </p:spPr>
-        <p:style>
-          <a:lnRef idx="1">
-            <a:schemeClr val="accent1"/>
-          </a:lnRef>
-          <a:fillRef idx="3">
-            <a:schemeClr val="accent1"/>
-          </a:fillRef>
-          <a:effectRef idx="2">
-            <a:schemeClr val="accent1"/>
-          </a:effectRef>
-          <a:fontRef idx="minor">
-            <a:schemeClr val="lt1"/>
-          </a:fontRef>
-        </p:style>
-        <p:txBody>
-          <a:bodyPr rtlCol="0" anchor="ctr" wrap="square" lIns="18000" rIns="18000" tIns="9000" bIns="9000"/>
-          <a:lstStyle/>
-          <a:p>
-            <a:pPr algn="ctr"/>
-          </a:p>
-        </p:txBody>
-      </p:sp>
       <p:cxnSp>
         <p:nvCxnSpPr>
-          <p:cNvPr id="74" name="Connector 73"/>
+          <p:cNvPr id="73" name="Connector 72"/>
           <p:cNvCxnSpPr/>
           <p:nvPr/>
         </p:nvCxnSpPr>
         <p:spPr>
           <a:xfrm>
-            <a:off x="5770806" y="1161288"/>
-            <a:ext cx="0" cy="2176272"/>
+            <a:off x="3886200" y="685800"/>
+            <a:ext cx="0" cy="2651760"/>
           </a:xfrm>
           <a:prstGeom prst="line">
             <a:avLst/>
           </a:prstGeom>
-          <a:ln w="22225">
-            <a:solidFill>
-              <a:srgbClr val="2E7D32"/>
+          <a:ln w="19050">
+            <a:solidFill>
+              <a:srgbClr val="2F5597"/>
             </a:solidFill>
           </a:ln>
         </p:spPr>
@@ -25058,6 +24183,60 @@
           </a:fontRef>
         </p:style>
       </p:cxnSp>
+      <p:sp>
+        <p:nvSpPr>
+          <p:cNvPr id="74" name="Rectangle 73"/>
+          <p:cNvSpPr/>
+          <p:nvPr/>
+        </p:nvSpPr>
+        <p:spPr>
+          <a:xfrm>
+            <a:off x="3886200" y="685800"/>
+            <a:ext cx="566928" cy="256032"/>
+          </a:xfrm>
+          <a:prstGeom prst="rect">
+            <a:avLst/>
+          </a:prstGeom>
+          <a:solidFill>
+            <a:srgbClr val="4472C4"/>
+          </a:solidFill>
+          <a:ln w="9525">
+            <a:solidFill>
+              <a:srgbClr val="2F5597"/>
+            </a:solidFill>
+          </a:ln>
+          <a:effectLst/>
+        </p:spPr>
+        <p:style>
+          <a:lnRef idx="1">
+            <a:schemeClr val="accent1"/>
+          </a:lnRef>
+          <a:fillRef idx="3">
+            <a:schemeClr val="accent1"/>
+          </a:fillRef>
+          <a:effectRef idx="2">
+            <a:schemeClr val="accent1"/>
+          </a:effectRef>
+          <a:fontRef idx="minor">
+            <a:schemeClr val="lt1"/>
+          </a:fontRef>
+        </p:style>
+        <p:txBody>
+          <a:bodyPr rtlCol="0" anchor="ctr" wrap="square" lIns="18000" rIns="18000" tIns="9000" bIns="9000"/>
+          <a:lstStyle/>
+          <a:p>
+            <a:pPr algn="l"/>
+            <a:r>
+              <a:rPr sz="800" b="1">
+                <a:solidFill>
+                  <a:srgbClr val="FFFFFF"/>
+                </a:solidFill>
+              </a:rPr>
+              <a:t>⚑ Старт</a:t>
+            </a:r>
+          </a:p>
+        </p:txBody>
+      </p:sp>
       <p:cxnSp>
         <p:nvCxnSpPr>
           <p:cNvPr id="75" name="Connector 74"/>
@@ -25066,95 +24245,6 @@
         </p:nvCxnSpPr>
         <p:spPr>
           <a:xfrm>
-            <a:off x="3886200" y="685800"/>
-            <a:ext cx="0" cy="2651760"/>
-          </a:xfrm>
-          <a:prstGeom prst="line">
-            <a:avLst/>
-          </a:prstGeom>
-          <a:ln w="19050">
-            <a:solidFill>
-              <a:srgbClr val="2F5597"/>
-            </a:solidFill>
-          </a:ln>
-        </p:spPr>
-        <p:style>
-          <a:lnRef idx="2">
-            <a:schemeClr val="accent1"/>
-          </a:lnRef>
-          <a:fillRef idx="0">
-            <a:schemeClr val="accent1"/>
-          </a:fillRef>
-          <a:effectRef idx="1">
-            <a:schemeClr val="accent1"/>
-          </a:effectRef>
-          <a:fontRef idx="minor">
-            <a:schemeClr val="tx1"/>
-          </a:fontRef>
-        </p:style>
-      </p:cxnSp>
-      <p:sp>
-        <p:nvSpPr>
-          <p:cNvPr id="76" name="Rectangle 75"/>
-          <p:cNvSpPr/>
-          <p:nvPr/>
-        </p:nvSpPr>
-        <p:spPr>
-          <a:xfrm>
-            <a:off x="3886200" y="685800"/>
-            <a:ext cx="566928" cy="256032"/>
-          </a:xfrm>
-          <a:prstGeom prst="rect">
-            <a:avLst/>
-          </a:prstGeom>
-          <a:solidFill>
-            <a:srgbClr val="4472C4"/>
-          </a:solidFill>
-          <a:ln w="9525">
-            <a:solidFill>
-              <a:srgbClr val="2F5597"/>
-            </a:solidFill>
-          </a:ln>
-          <a:effectLst/>
-        </p:spPr>
-        <p:style>
-          <a:lnRef idx="1">
-            <a:schemeClr val="accent1"/>
-          </a:lnRef>
-          <a:fillRef idx="3">
-            <a:schemeClr val="accent1"/>
-          </a:fillRef>
-          <a:effectRef idx="2">
-            <a:schemeClr val="accent1"/>
-          </a:effectRef>
-          <a:fontRef idx="minor">
-            <a:schemeClr val="lt1"/>
-          </a:fontRef>
-        </p:style>
-        <p:txBody>
-          <a:bodyPr rtlCol="0" anchor="ctr" wrap="square" lIns="18000" rIns="18000" tIns="9000" bIns="9000"/>
-          <a:lstStyle/>
-          <a:p>
-            <a:pPr algn="l"/>
-            <a:r>
-              <a:rPr sz="800" b="1">
-                <a:solidFill>
-                  <a:srgbClr val="FFFFFF"/>
-                </a:solidFill>
-              </a:rPr>
-              <a:t>⚑ Старт</a:t>
-            </a:r>
-          </a:p>
-        </p:txBody>
-      </p:sp>
-      <p:cxnSp>
-        <p:nvCxnSpPr>
-          <p:cNvPr id="77" name="Connector 76"/>
-          <p:cNvCxnSpPr/>
-          <p:nvPr/>
-        </p:nvCxnSpPr>
-        <p:spPr>
-          <a:xfrm>
             <a:off x="11963085" y="685800"/>
             <a:ext cx="0" cy="2651760"/>
           </a:xfrm>
@@ -25184,7 +24274,7 @@
       </p:cxnSp>
       <p:sp>
         <p:nvSpPr>
-          <p:cNvPr id="78" name="Rectangle 77"/>
+          <p:cNvPr id="76" name="Rectangle 75"/>
           <p:cNvSpPr/>
           <p:nvPr/>
         </p:nvSpPr>
@@ -25238,7 +24328,7 @@
       </p:sp>
       <p:sp>
         <p:nvSpPr>
-          <p:cNvPr id="79" name="Diamond 78"/>
+          <p:cNvPr id="77" name="Diamond 76"/>
           <p:cNvSpPr/>
           <p:nvPr/>
         </p:nvSpPr>
@@ -25284,7 +24374,7 @@
       </p:sp>
       <p:sp>
         <p:nvSpPr>
-          <p:cNvPr id="80" name="Rectangle 79"/>
+          <p:cNvPr id="78" name="Rectangle 77"/>
           <p:cNvSpPr/>
           <p:nvPr/>
         </p:nvSpPr>
@@ -25334,7 +24424,7 @@
       </p:sp>
       <p:sp>
         <p:nvSpPr>
-          <p:cNvPr id="81" name="Diamond 80"/>
+          <p:cNvPr id="79" name="Diamond 78"/>
           <p:cNvSpPr/>
           <p:nvPr/>
         </p:nvSpPr>
@@ -25380,7 +24470,7 @@
       </p:sp>
       <p:sp>
         <p:nvSpPr>
-          <p:cNvPr id="82" name="Rectangle 81"/>
+          <p:cNvPr id="80" name="Rectangle 79"/>
           <p:cNvSpPr/>
           <p:nvPr/>
         </p:nvSpPr>
@@ -25430,7 +24520,7 @@
       </p:sp>
       <p:sp>
         <p:nvSpPr>
-          <p:cNvPr id="83" name="Rounded Rectangle 82"/>
+          <p:cNvPr id="81" name="Rounded Rectangle 80"/>
           <p:cNvSpPr/>
           <p:nvPr/>
         </p:nvSpPr>
@@ -25476,7 +24566,7 @@
       </p:sp>
       <p:sp>
         <p:nvSpPr>
-          <p:cNvPr id="84" name="Rectangle 83"/>
+          <p:cNvPr id="82" name="Rectangle 81"/>
           <p:cNvSpPr/>
           <p:nvPr/>
         </p:nvSpPr>
@@ -25526,7 +24616,7 @@
       </p:sp>
       <p:sp>
         <p:nvSpPr>
-          <p:cNvPr id="85" name="Rounded Rectangle 84"/>
+          <p:cNvPr id="83" name="Rounded Rectangle 82"/>
           <p:cNvSpPr/>
           <p:nvPr/>
         </p:nvSpPr>
@@ -25572,7 +24662,7 @@
       </p:sp>
       <p:sp>
         <p:nvSpPr>
-          <p:cNvPr id="86" name="Rectangle 85"/>
+          <p:cNvPr id="84" name="Rectangle 83"/>
           <p:cNvSpPr/>
           <p:nvPr/>
         </p:nvSpPr>
@@ -25622,7 +24712,7 @@
       </p:sp>
       <p:sp>
         <p:nvSpPr>
-          <p:cNvPr id="87" name="Rounded Rectangle 86"/>
+          <p:cNvPr id="85" name="Rounded Rectangle 84"/>
           <p:cNvSpPr/>
           <p:nvPr/>
         </p:nvSpPr>
@@ -25668,7 +24758,7 @@
       </p:sp>
       <p:sp>
         <p:nvSpPr>
-          <p:cNvPr id="88" name="Rectangle 87"/>
+          <p:cNvPr id="86" name="Rectangle 85"/>
           <p:cNvSpPr/>
           <p:nvPr/>
         </p:nvSpPr>
@@ -25718,7 +24808,7 @@
       </p:sp>
       <p:sp>
         <p:nvSpPr>
-          <p:cNvPr id="89" name="Rounded Rectangle 88"/>
+          <p:cNvPr id="87" name="Rounded Rectangle 86"/>
           <p:cNvSpPr/>
           <p:nvPr/>
         </p:nvSpPr>
@@ -25764,7 +24854,7 @@
       </p:sp>
       <p:sp>
         <p:nvSpPr>
-          <p:cNvPr id="90" name="Rectangle 89"/>
+          <p:cNvPr id="88" name="Rectangle 87"/>
           <p:cNvSpPr/>
           <p:nvPr/>
         </p:nvSpPr>
@@ -25814,7 +24904,7 @@
       </p:sp>
       <p:sp>
         <p:nvSpPr>
-          <p:cNvPr id="91" name="Rounded Rectangle 90"/>
+          <p:cNvPr id="89" name="Rounded Rectangle 88"/>
           <p:cNvSpPr/>
           <p:nvPr/>
         </p:nvSpPr>
@@ -25860,7 +24950,7 @@
       </p:sp>
       <p:sp>
         <p:nvSpPr>
-          <p:cNvPr id="92" name="Rectangle 91"/>
+          <p:cNvPr id="90" name="Rectangle 89"/>
           <p:cNvSpPr/>
           <p:nvPr/>
         </p:nvSpPr>
@@ -25910,7 +25000,7 @@
       </p:sp>
       <p:sp>
         <p:nvSpPr>
-          <p:cNvPr id="93" name="Pentagon 92"/>
+          <p:cNvPr id="91" name="Pentagon 90"/>
           <p:cNvSpPr/>
           <p:nvPr/>
         </p:nvSpPr>
@@ -25956,7 +25046,7 @@
       </p:sp>
       <p:sp>
         <p:nvSpPr>
-          <p:cNvPr id="94" name="Rectangle 93"/>
+          <p:cNvPr id="92" name="Rectangle 91"/>
           <p:cNvSpPr/>
           <p:nvPr/>
         </p:nvSpPr>
@@ -26006,7 +25096,7 @@
       </p:sp>
       <p:sp>
         <p:nvSpPr>
-          <p:cNvPr id="95" name="Pentagon 94"/>
+          <p:cNvPr id="93" name="Pentagon 92"/>
           <p:cNvSpPr/>
           <p:nvPr/>
         </p:nvSpPr>
@@ -26052,7 +25142,7 @@
       </p:sp>
       <p:sp>
         <p:nvSpPr>
-          <p:cNvPr id="96" name="Rectangle 95"/>
+          <p:cNvPr id="94" name="Rectangle 93"/>
           <p:cNvSpPr/>
           <p:nvPr/>
         </p:nvSpPr>

--- a/roadmap_2026Q3.pptx
+++ b/roadmap_2026Q3.pptx
@@ -7923,7 +7923,7 @@
         </p:nvSpPr>
         <p:spPr>
           <a:xfrm>
-            <a:off x="5966884" y="1243584"/>
+            <a:off x="5966884" y="1865376"/>
             <a:ext cx="146304" cy="146304"/>
           </a:xfrm>
           <a:prstGeom prst="diamond">
@@ -8015,7 +8015,7 @@
         </p:nvSpPr>
         <p:spPr>
           <a:xfrm>
-            <a:off x="7582261" y="2176272"/>
+            <a:off x="7582261" y="3108960"/>
             <a:ext cx="146304" cy="146304"/>
           </a:xfrm>
           <a:prstGeom prst="diamond">
@@ -8107,7 +8107,7 @@
         </p:nvSpPr>
         <p:spPr>
           <a:xfrm>
-            <a:off x="10274556" y="3419856"/>
+            <a:off x="10274556" y="4352544"/>
             <a:ext cx="146304" cy="146304"/>
           </a:xfrm>
           <a:prstGeom prst="diamond">
@@ -8199,7 +8199,7 @@
         </p:nvSpPr>
         <p:spPr>
           <a:xfrm>
-            <a:off x="10813015" y="4974336"/>
+            <a:off x="10813015" y="5285232"/>
             <a:ext cx="146304" cy="146304"/>
           </a:xfrm>
           <a:prstGeom prst="diamond">
@@ -8291,7 +8291,7 @@
         </p:nvSpPr>
         <p:spPr>
           <a:xfrm>
-            <a:off x="10813015" y="5596128"/>
+            <a:off x="6505343" y="5596128"/>
             <a:ext cx="146304" cy="146304"/>
           </a:xfrm>
           <a:prstGeom prst="diamond">
@@ -13701,7 +13701,7 @@
         </p:nvSpPr>
         <p:spPr>
           <a:xfrm>
-            <a:off x="5966884" y="1243584"/>
+            <a:off x="5966884" y="2487168"/>
             <a:ext cx="146304" cy="146304"/>
           </a:xfrm>
           <a:prstGeom prst="diamond">
@@ -13747,7 +13747,7 @@
         </p:nvSpPr>
         <p:spPr>
           <a:xfrm>
-            <a:off x="10813015" y="1243584"/>
+            <a:off x="10813015" y="3419856"/>
             <a:ext cx="146304" cy="146304"/>
           </a:xfrm>
           <a:prstGeom prst="diamond">
@@ -13839,7 +13839,7 @@
         </p:nvSpPr>
         <p:spPr>
           <a:xfrm>
-            <a:off x="8120720" y="3730752"/>
+            <a:off x="8120720" y="4352544"/>
             <a:ext cx="146304" cy="146304"/>
           </a:xfrm>
           <a:prstGeom prst="diamond">
@@ -13931,7 +13931,7 @@
         </p:nvSpPr>
         <p:spPr>
           <a:xfrm>
-            <a:off x="9736097" y="4974336"/>
+            <a:off x="9736097" y="5596128"/>
             <a:ext cx="146304" cy="146304"/>
           </a:xfrm>
           <a:prstGeom prst="diamond">
@@ -19379,7 +19379,7 @@
         </p:nvSpPr>
         <p:spPr>
           <a:xfrm>
-            <a:off x="3813048" y="1243584"/>
+            <a:off x="7043802" y="1243584"/>
             <a:ext cx="146304" cy="146304"/>
           </a:xfrm>
           <a:prstGeom prst="diamond">
@@ -19425,7 +19425,7 @@
         </p:nvSpPr>
         <p:spPr>
           <a:xfrm>
-            <a:off x="9736097" y="1243584"/>
+            <a:off x="9736097" y="1554480"/>
             <a:ext cx="146304" cy="146304"/>
           </a:xfrm>
           <a:prstGeom prst="diamond">
@@ -19517,7 +19517,7 @@
         </p:nvSpPr>
         <p:spPr>
           <a:xfrm>
-            <a:off x="8120720" y="1865376"/>
+            <a:off x="8120720" y="2176272"/>
             <a:ext cx="146304" cy="146304"/>
           </a:xfrm>
           <a:prstGeom prst="diamond">
@@ -19609,7 +19609,7 @@
         </p:nvSpPr>
         <p:spPr>
           <a:xfrm>
-            <a:off x="10813015" y="2487168"/>
+            <a:off x="10813015" y="4041648"/>
             <a:ext cx="146304" cy="146304"/>
           </a:xfrm>
           <a:prstGeom prst="diamond">
@@ -19701,7 +19701,7 @@
         </p:nvSpPr>
         <p:spPr>
           <a:xfrm>
-            <a:off x="9736097" y="4663440"/>
+            <a:off x="9736097" y="4974336"/>
             <a:ext cx="146304" cy="146304"/>
           </a:xfrm>
           <a:prstGeom prst="diamond">
@@ -24029,7 +24029,7 @@
         </p:nvSpPr>
         <p:spPr>
           <a:xfrm>
-            <a:off x="3813048" y="1243584"/>
+            <a:off x="3813048" y="2487168"/>
             <a:ext cx="146304" cy="146304"/>
           </a:xfrm>
           <a:prstGeom prst="diamond">
@@ -24075,7 +24075,7 @@
         </p:nvSpPr>
         <p:spPr>
           <a:xfrm>
-            <a:off x="9736097" y="1243584"/>
+            <a:off x="8659179" y="2176272"/>
             <a:ext cx="146304" cy="146304"/>
           </a:xfrm>
           <a:prstGeom prst="diamond">

--- a/roadmap_2026Q3.pptx
+++ b/roadmap_2026Q3.pptx
@@ -8283,52 +8283,41 @@
           </a:p>
         </p:txBody>
       </p:sp>
-      <p:sp>
-        <p:nvSpPr>
-          <p:cNvPr id="114" name="Diamond 113"/>
-          <p:cNvSpPr/>
-          <p:nvPr/>
-        </p:nvSpPr>
-        <p:spPr>
-          <a:xfrm>
-            <a:off x="6505343" y="5596128"/>
-            <a:ext cx="146304" cy="146304"/>
-          </a:xfrm>
-          <a:prstGeom prst="diamond">
-            <a:avLst/>
-          </a:prstGeom>
-          <a:solidFill>
-            <a:srgbClr val="C00000"/>
-          </a:solidFill>
-          <a:ln w="15875">
-            <a:solidFill>
-              <a:srgbClr val="7F0000"/>
-            </a:solidFill>
-          </a:ln>
-          <a:effectLst/>
-        </p:spPr>
-        <p:style>
-          <a:lnRef idx="1">
-            <a:schemeClr val="accent1"/>
-          </a:lnRef>
-          <a:fillRef idx="3">
-            <a:schemeClr val="accent1"/>
-          </a:fillRef>
-          <a:effectRef idx="2">
-            <a:schemeClr val="accent1"/>
-          </a:effectRef>
-          <a:fontRef idx="minor">
-            <a:schemeClr val="lt1"/>
-          </a:fontRef>
-        </p:style>
-        <p:txBody>
-          <a:bodyPr rtlCol="0" anchor="ctr" wrap="square" lIns="18000" rIns="18000" tIns="9000" bIns="9000"/>
-          <a:lstStyle/>
-          <a:p>
-            <a:pPr algn="ctr"/>
-          </a:p>
-        </p:txBody>
-      </p:sp>
+      <p:cxnSp>
+        <p:nvCxnSpPr>
+          <p:cNvPr id="114" name="Connector 113"/>
+          <p:cNvCxnSpPr/>
+          <p:nvPr/>
+        </p:nvCxnSpPr>
+        <p:spPr>
+          <a:xfrm>
+            <a:off x="5770806" y="1161288"/>
+            <a:ext cx="0" cy="4663440"/>
+          </a:xfrm>
+          <a:prstGeom prst="line">
+            <a:avLst/>
+          </a:prstGeom>
+          <a:ln w="22225">
+            <a:solidFill>
+              <a:srgbClr val="2E7D32"/>
+            </a:solidFill>
+          </a:ln>
+        </p:spPr>
+        <p:style>
+          <a:lnRef idx="2">
+            <a:schemeClr val="accent1"/>
+          </a:lnRef>
+          <a:fillRef idx="0">
+            <a:schemeClr val="accent1"/>
+          </a:fillRef>
+          <a:effectRef idx="1">
+            <a:schemeClr val="accent1"/>
+          </a:effectRef>
+          <a:fontRef idx="minor">
+            <a:schemeClr val="tx1"/>
+          </a:fontRef>
+        </p:style>
+      </p:cxnSp>
       <p:cxnSp>
         <p:nvCxnSpPr>
           <p:cNvPr id="115" name="Connector 114"/>
@@ -8337,15 +8326,15 @@
         </p:nvCxnSpPr>
         <p:spPr>
           <a:xfrm>
-            <a:off x="5770806" y="1161288"/>
-            <a:ext cx="0" cy="4663440"/>
+            <a:off x="3886200" y="685800"/>
+            <a:ext cx="0" cy="5138928"/>
           </a:xfrm>
           <a:prstGeom prst="line">
             <a:avLst/>
           </a:prstGeom>
-          <a:ln w="22225">
-            <a:solidFill>
-              <a:srgbClr val="2E7D32"/>
+          <a:ln w="19050">
+            <a:solidFill>
+              <a:srgbClr val="2F5597"/>
             </a:solidFill>
           </a:ln>
         </p:spPr>
@@ -8364,98 +8353,63 @@
           </a:fontRef>
         </p:style>
       </p:cxnSp>
+      <p:sp>
+        <p:nvSpPr>
+          <p:cNvPr id="116" name="Rectangle 115"/>
+          <p:cNvSpPr/>
+          <p:nvPr/>
+        </p:nvSpPr>
+        <p:spPr>
+          <a:xfrm>
+            <a:off x="3886200" y="685800"/>
+            <a:ext cx="566928" cy="256032"/>
+          </a:xfrm>
+          <a:prstGeom prst="rect">
+            <a:avLst/>
+          </a:prstGeom>
+          <a:solidFill>
+            <a:srgbClr val="4472C4"/>
+          </a:solidFill>
+          <a:ln w="9525">
+            <a:solidFill>
+              <a:srgbClr val="2F5597"/>
+            </a:solidFill>
+          </a:ln>
+          <a:effectLst/>
+        </p:spPr>
+        <p:style>
+          <a:lnRef idx="1">
+            <a:schemeClr val="accent1"/>
+          </a:lnRef>
+          <a:fillRef idx="3">
+            <a:schemeClr val="accent1"/>
+          </a:fillRef>
+          <a:effectRef idx="2">
+            <a:schemeClr val="accent1"/>
+          </a:effectRef>
+          <a:fontRef idx="minor">
+            <a:schemeClr val="lt1"/>
+          </a:fontRef>
+        </p:style>
+        <p:txBody>
+          <a:bodyPr rtlCol="0" anchor="ctr" wrap="square" lIns="18000" rIns="18000" tIns="9000" bIns="9000"/>
+          <a:lstStyle/>
+          <a:p>
+            <a:pPr algn="l"/>
+            <a:r>
+              <a:rPr sz="800" b="1">
+                <a:solidFill>
+                  <a:srgbClr val="FFFFFF"/>
+                </a:solidFill>
+              </a:rPr>
+              <a:t>⚑ Старт</a:t>
+            </a:r>
+          </a:p>
+        </p:txBody>
+      </p:sp>
       <p:cxnSp>
         <p:nvCxnSpPr>
-          <p:cNvPr id="116" name="Connector 115"/>
-          <p:cNvCxnSpPr/>
-          <p:nvPr/>
-        </p:nvCxnSpPr>
-        <p:spPr>
-          <a:xfrm>
-            <a:off x="3886200" y="685800"/>
-            <a:ext cx="0" cy="5138928"/>
-          </a:xfrm>
-          <a:prstGeom prst="line">
-            <a:avLst/>
-          </a:prstGeom>
-          <a:ln w="19050">
-            <a:solidFill>
-              <a:srgbClr val="2F5597"/>
-            </a:solidFill>
-          </a:ln>
-        </p:spPr>
-        <p:style>
-          <a:lnRef idx="2">
-            <a:schemeClr val="accent1"/>
-          </a:lnRef>
-          <a:fillRef idx="0">
-            <a:schemeClr val="accent1"/>
-          </a:fillRef>
-          <a:effectRef idx="1">
-            <a:schemeClr val="accent1"/>
-          </a:effectRef>
-          <a:fontRef idx="minor">
-            <a:schemeClr val="tx1"/>
-          </a:fontRef>
-        </p:style>
-      </p:cxnSp>
-      <p:sp>
-        <p:nvSpPr>
-          <p:cNvPr id="117" name="Rectangle 116"/>
-          <p:cNvSpPr/>
-          <p:nvPr/>
-        </p:nvSpPr>
-        <p:spPr>
-          <a:xfrm>
-            <a:off x="3886200" y="685800"/>
-            <a:ext cx="566928" cy="256032"/>
-          </a:xfrm>
-          <a:prstGeom prst="rect">
-            <a:avLst/>
-          </a:prstGeom>
-          <a:solidFill>
-            <a:srgbClr val="4472C4"/>
-          </a:solidFill>
-          <a:ln w="9525">
-            <a:solidFill>
-              <a:srgbClr val="2F5597"/>
-            </a:solidFill>
-          </a:ln>
-          <a:effectLst/>
-        </p:spPr>
-        <p:style>
-          <a:lnRef idx="1">
-            <a:schemeClr val="accent1"/>
-          </a:lnRef>
-          <a:fillRef idx="3">
-            <a:schemeClr val="accent1"/>
-          </a:fillRef>
-          <a:effectRef idx="2">
-            <a:schemeClr val="accent1"/>
-          </a:effectRef>
-          <a:fontRef idx="minor">
-            <a:schemeClr val="lt1"/>
-          </a:fontRef>
-        </p:style>
-        <p:txBody>
-          <a:bodyPr rtlCol="0" anchor="ctr" wrap="square" lIns="18000" rIns="18000" tIns="9000" bIns="9000"/>
-          <a:lstStyle/>
-          <a:p>
-            <a:pPr algn="l"/>
-            <a:r>
-              <a:rPr sz="800" b="1">
-                <a:solidFill>
-                  <a:srgbClr val="FFFFFF"/>
-                </a:solidFill>
-              </a:rPr>
-              <a:t>⚑ Старт</a:t>
-            </a:r>
-          </a:p>
-        </p:txBody>
-      </p:sp>
-      <p:cxnSp>
-        <p:nvCxnSpPr>
-          <p:cNvPr id="118" name="Connector 117"/>
+          <p:cNvPr id="117" name="Connector 116"/>
           <p:cNvCxnSpPr/>
           <p:nvPr/>
         </p:nvCxnSpPr>
@@ -8490,7 +8444,7 @@
       </p:cxnSp>
       <p:sp>
         <p:nvSpPr>
-          <p:cNvPr id="119" name="Rectangle 118"/>
+          <p:cNvPr id="118" name="Rectangle 117"/>
           <p:cNvSpPr/>
           <p:nvPr/>
         </p:nvSpPr>
@@ -8544,7 +8498,7 @@
       </p:sp>
       <p:sp>
         <p:nvSpPr>
-          <p:cNvPr id="120" name="Diamond 119"/>
+          <p:cNvPr id="119" name="Diamond 118"/>
           <p:cNvSpPr/>
           <p:nvPr/>
         </p:nvSpPr>
@@ -8590,7 +8544,7 @@
       </p:sp>
       <p:sp>
         <p:nvSpPr>
-          <p:cNvPr id="121" name="Rectangle 120"/>
+          <p:cNvPr id="120" name="Rectangle 119"/>
           <p:cNvSpPr/>
           <p:nvPr/>
         </p:nvSpPr>
@@ -8640,7 +8594,7 @@
       </p:sp>
       <p:sp>
         <p:nvSpPr>
-          <p:cNvPr id="122" name="Diamond 121"/>
+          <p:cNvPr id="121" name="Diamond 120"/>
           <p:cNvSpPr/>
           <p:nvPr/>
         </p:nvSpPr>
@@ -8686,7 +8640,7 @@
       </p:sp>
       <p:sp>
         <p:nvSpPr>
-          <p:cNvPr id="123" name="Rectangle 122"/>
+          <p:cNvPr id="122" name="Rectangle 121"/>
           <p:cNvSpPr/>
           <p:nvPr/>
         </p:nvSpPr>
@@ -8736,7 +8690,7 @@
       </p:sp>
       <p:sp>
         <p:nvSpPr>
-          <p:cNvPr id="124" name="Rounded Rectangle 123"/>
+          <p:cNvPr id="123" name="Rounded Rectangle 122"/>
           <p:cNvSpPr/>
           <p:nvPr/>
         </p:nvSpPr>
@@ -8782,7 +8736,7 @@
       </p:sp>
       <p:sp>
         <p:nvSpPr>
-          <p:cNvPr id="125" name="Rectangle 124"/>
+          <p:cNvPr id="124" name="Rectangle 123"/>
           <p:cNvSpPr/>
           <p:nvPr/>
         </p:nvSpPr>
@@ -8832,7 +8786,7 @@
       </p:sp>
       <p:sp>
         <p:nvSpPr>
-          <p:cNvPr id="126" name="Rounded Rectangle 125"/>
+          <p:cNvPr id="125" name="Rounded Rectangle 124"/>
           <p:cNvSpPr/>
           <p:nvPr/>
         </p:nvSpPr>
@@ -8878,7 +8832,7 @@
       </p:sp>
       <p:sp>
         <p:nvSpPr>
-          <p:cNvPr id="127" name="Rectangle 126"/>
+          <p:cNvPr id="126" name="Rectangle 125"/>
           <p:cNvSpPr/>
           <p:nvPr/>
         </p:nvSpPr>
@@ -8928,7 +8882,7 @@
       </p:sp>
       <p:sp>
         <p:nvSpPr>
-          <p:cNvPr id="128" name="Rounded Rectangle 127"/>
+          <p:cNvPr id="127" name="Rounded Rectangle 126"/>
           <p:cNvSpPr/>
           <p:nvPr/>
         </p:nvSpPr>
@@ -8974,7 +8928,7 @@
       </p:sp>
       <p:sp>
         <p:nvSpPr>
-          <p:cNvPr id="129" name="Rectangle 128"/>
+          <p:cNvPr id="128" name="Rectangle 127"/>
           <p:cNvSpPr/>
           <p:nvPr/>
         </p:nvSpPr>
@@ -9024,7 +8978,7 @@
       </p:sp>
       <p:sp>
         <p:nvSpPr>
-          <p:cNvPr id="130" name="Rounded Rectangle 129"/>
+          <p:cNvPr id="129" name="Rounded Rectangle 128"/>
           <p:cNvSpPr/>
           <p:nvPr/>
         </p:nvSpPr>
@@ -9070,7 +9024,7 @@
       </p:sp>
       <p:sp>
         <p:nvSpPr>
-          <p:cNvPr id="131" name="Rectangle 130"/>
+          <p:cNvPr id="130" name="Rectangle 129"/>
           <p:cNvSpPr/>
           <p:nvPr/>
         </p:nvSpPr>
@@ -9120,7 +9074,7 @@
       </p:sp>
       <p:sp>
         <p:nvSpPr>
-          <p:cNvPr id="132" name="Rounded Rectangle 131"/>
+          <p:cNvPr id="131" name="Rounded Rectangle 130"/>
           <p:cNvSpPr/>
           <p:nvPr/>
         </p:nvSpPr>
@@ -9166,7 +9120,7 @@
       </p:sp>
       <p:sp>
         <p:nvSpPr>
-          <p:cNvPr id="133" name="Rectangle 132"/>
+          <p:cNvPr id="132" name="Rectangle 131"/>
           <p:cNvSpPr/>
           <p:nvPr/>
         </p:nvSpPr>
@@ -9216,7 +9170,7 @@
       </p:sp>
       <p:sp>
         <p:nvSpPr>
-          <p:cNvPr id="134" name="Pentagon 133"/>
+          <p:cNvPr id="133" name="Pentagon 132"/>
           <p:cNvSpPr/>
           <p:nvPr/>
         </p:nvSpPr>
@@ -9262,7 +9216,7 @@
       </p:sp>
       <p:sp>
         <p:nvSpPr>
-          <p:cNvPr id="135" name="Rectangle 134"/>
+          <p:cNvPr id="134" name="Rectangle 133"/>
           <p:cNvSpPr/>
           <p:nvPr/>
         </p:nvSpPr>
@@ -9312,7 +9266,7 @@
       </p:sp>
       <p:sp>
         <p:nvSpPr>
-          <p:cNvPr id="136" name="Pentagon 135"/>
+          <p:cNvPr id="135" name="Pentagon 134"/>
           <p:cNvSpPr/>
           <p:nvPr/>
         </p:nvSpPr>
@@ -9358,7 +9312,7 @@
       </p:sp>
       <p:sp>
         <p:nvSpPr>
-          <p:cNvPr id="137" name="Rectangle 136"/>
+          <p:cNvPr id="136" name="Rectangle 135"/>
           <p:cNvSpPr/>
           <p:nvPr/>
         </p:nvSpPr>
@@ -13701,52 +13655,6 @@
         </p:nvSpPr>
         <p:spPr>
           <a:xfrm>
-            <a:off x="5966884" y="2487168"/>
-            <a:ext cx="146304" cy="146304"/>
-          </a:xfrm>
-          <a:prstGeom prst="diamond">
-            <a:avLst/>
-          </a:prstGeom>
-          <a:solidFill>
-            <a:srgbClr val="4472C4"/>
-          </a:solidFill>
-          <a:ln w="15875">
-            <a:solidFill>
-              <a:srgbClr val="2F5597"/>
-            </a:solidFill>
-          </a:ln>
-          <a:effectLst/>
-        </p:spPr>
-        <p:style>
-          <a:lnRef idx="1">
-            <a:schemeClr val="accent1"/>
-          </a:lnRef>
-          <a:fillRef idx="3">
-            <a:schemeClr val="accent1"/>
-          </a:fillRef>
-          <a:effectRef idx="2">
-            <a:schemeClr val="accent1"/>
-          </a:effectRef>
-          <a:fontRef idx="minor">
-            <a:schemeClr val="lt1"/>
-          </a:fontRef>
-        </p:style>
-        <p:txBody>
-          <a:bodyPr rtlCol="0" anchor="ctr" wrap="square" lIns="18000" rIns="18000" tIns="9000" bIns="9000"/>
-          <a:lstStyle/>
-          <a:p>
-            <a:pPr algn="ctr"/>
-          </a:p>
-        </p:txBody>
-      </p:sp>
-      <p:sp>
-        <p:nvSpPr>
-          <p:cNvPr id="95" name="Diamond 94"/>
-          <p:cNvSpPr/>
-          <p:nvPr/>
-        </p:nvSpPr>
-        <p:spPr>
-          <a:xfrm>
             <a:off x="10813015" y="3419856"/>
             <a:ext cx="146304" cy="146304"/>
           </a:xfrm>
@@ -13787,7 +13695,7 @@
       </p:sp>
       <p:sp>
         <p:nvSpPr>
-          <p:cNvPr id="96" name="Diamond 95"/>
+          <p:cNvPr id="95" name="Diamond 94"/>
           <p:cNvSpPr/>
           <p:nvPr/>
         </p:nvSpPr>
@@ -13833,7 +13741,7 @@
       </p:sp>
       <p:sp>
         <p:nvSpPr>
-          <p:cNvPr id="97" name="Diamond 96"/>
+          <p:cNvPr id="96" name="Diamond 95"/>
           <p:cNvSpPr/>
           <p:nvPr/>
         </p:nvSpPr>
@@ -13879,7 +13787,7 @@
       </p:sp>
       <p:sp>
         <p:nvSpPr>
-          <p:cNvPr id="98" name="Diamond 97"/>
+          <p:cNvPr id="97" name="Diamond 96"/>
           <p:cNvSpPr/>
           <p:nvPr/>
         </p:nvSpPr>
@@ -13925,7 +13833,7 @@
       </p:sp>
       <p:sp>
         <p:nvSpPr>
-          <p:cNvPr id="99" name="Diamond 98"/>
+          <p:cNvPr id="98" name="Diamond 97"/>
           <p:cNvSpPr/>
           <p:nvPr/>
         </p:nvSpPr>
@@ -13969,6 +13877,41 @@
           </a:p>
         </p:txBody>
       </p:sp>
+      <p:cxnSp>
+        <p:nvCxnSpPr>
+          <p:cNvPr id="99" name="Connector 98"/>
+          <p:cNvCxnSpPr/>
+          <p:nvPr/>
+        </p:nvCxnSpPr>
+        <p:spPr>
+          <a:xfrm>
+            <a:off x="5770806" y="1161288"/>
+            <a:ext cx="0" cy="4663440"/>
+          </a:xfrm>
+          <a:prstGeom prst="line">
+            <a:avLst/>
+          </a:prstGeom>
+          <a:ln w="22225">
+            <a:solidFill>
+              <a:srgbClr val="2E7D32"/>
+            </a:solidFill>
+          </a:ln>
+        </p:spPr>
+        <p:style>
+          <a:lnRef idx="2">
+            <a:schemeClr val="accent1"/>
+          </a:lnRef>
+          <a:fillRef idx="0">
+            <a:schemeClr val="accent1"/>
+          </a:fillRef>
+          <a:effectRef idx="1">
+            <a:schemeClr val="accent1"/>
+          </a:effectRef>
+          <a:fontRef idx="minor">
+            <a:schemeClr val="tx1"/>
+          </a:fontRef>
+        </p:style>
+      </p:cxnSp>
       <p:cxnSp>
         <p:nvCxnSpPr>
           <p:cNvPr id="100" name="Connector 99"/>
@@ -13977,15 +13920,15 @@
         </p:nvCxnSpPr>
         <p:spPr>
           <a:xfrm>
-            <a:off x="5770806" y="1161288"/>
-            <a:ext cx="0" cy="4663440"/>
+            <a:off x="3886200" y="685800"/>
+            <a:ext cx="0" cy="5138928"/>
           </a:xfrm>
           <a:prstGeom prst="line">
             <a:avLst/>
           </a:prstGeom>
-          <a:ln w="22225">
-            <a:solidFill>
-              <a:srgbClr val="2E7D32"/>
+          <a:ln w="19050">
+            <a:solidFill>
+              <a:srgbClr val="2F5597"/>
             </a:solidFill>
           </a:ln>
         </p:spPr>
@@ -14004,98 +13947,63 @@
           </a:fontRef>
         </p:style>
       </p:cxnSp>
+      <p:sp>
+        <p:nvSpPr>
+          <p:cNvPr id="101" name="Rectangle 100"/>
+          <p:cNvSpPr/>
+          <p:nvPr/>
+        </p:nvSpPr>
+        <p:spPr>
+          <a:xfrm>
+            <a:off x="3886200" y="685800"/>
+            <a:ext cx="566928" cy="256032"/>
+          </a:xfrm>
+          <a:prstGeom prst="rect">
+            <a:avLst/>
+          </a:prstGeom>
+          <a:solidFill>
+            <a:srgbClr val="4472C4"/>
+          </a:solidFill>
+          <a:ln w="9525">
+            <a:solidFill>
+              <a:srgbClr val="2F5597"/>
+            </a:solidFill>
+          </a:ln>
+          <a:effectLst/>
+        </p:spPr>
+        <p:style>
+          <a:lnRef idx="1">
+            <a:schemeClr val="accent1"/>
+          </a:lnRef>
+          <a:fillRef idx="3">
+            <a:schemeClr val="accent1"/>
+          </a:fillRef>
+          <a:effectRef idx="2">
+            <a:schemeClr val="accent1"/>
+          </a:effectRef>
+          <a:fontRef idx="minor">
+            <a:schemeClr val="lt1"/>
+          </a:fontRef>
+        </p:style>
+        <p:txBody>
+          <a:bodyPr rtlCol="0" anchor="ctr" wrap="square" lIns="18000" rIns="18000" tIns="9000" bIns="9000"/>
+          <a:lstStyle/>
+          <a:p>
+            <a:pPr algn="l"/>
+            <a:r>
+              <a:rPr sz="800" b="1">
+                <a:solidFill>
+                  <a:srgbClr val="FFFFFF"/>
+                </a:solidFill>
+              </a:rPr>
+              <a:t>⚑ Старт</a:t>
+            </a:r>
+          </a:p>
+        </p:txBody>
+      </p:sp>
       <p:cxnSp>
         <p:nvCxnSpPr>
-          <p:cNvPr id="101" name="Connector 100"/>
-          <p:cNvCxnSpPr/>
-          <p:nvPr/>
-        </p:nvCxnSpPr>
-        <p:spPr>
-          <a:xfrm>
-            <a:off x="3886200" y="685800"/>
-            <a:ext cx="0" cy="5138928"/>
-          </a:xfrm>
-          <a:prstGeom prst="line">
-            <a:avLst/>
-          </a:prstGeom>
-          <a:ln w="19050">
-            <a:solidFill>
-              <a:srgbClr val="2F5597"/>
-            </a:solidFill>
-          </a:ln>
-        </p:spPr>
-        <p:style>
-          <a:lnRef idx="2">
-            <a:schemeClr val="accent1"/>
-          </a:lnRef>
-          <a:fillRef idx="0">
-            <a:schemeClr val="accent1"/>
-          </a:fillRef>
-          <a:effectRef idx="1">
-            <a:schemeClr val="accent1"/>
-          </a:effectRef>
-          <a:fontRef idx="minor">
-            <a:schemeClr val="tx1"/>
-          </a:fontRef>
-        </p:style>
-      </p:cxnSp>
-      <p:sp>
-        <p:nvSpPr>
-          <p:cNvPr id="102" name="Rectangle 101"/>
-          <p:cNvSpPr/>
-          <p:nvPr/>
-        </p:nvSpPr>
-        <p:spPr>
-          <a:xfrm>
-            <a:off x="3886200" y="685800"/>
-            <a:ext cx="566928" cy="256032"/>
-          </a:xfrm>
-          <a:prstGeom prst="rect">
-            <a:avLst/>
-          </a:prstGeom>
-          <a:solidFill>
-            <a:srgbClr val="4472C4"/>
-          </a:solidFill>
-          <a:ln w="9525">
-            <a:solidFill>
-              <a:srgbClr val="2F5597"/>
-            </a:solidFill>
-          </a:ln>
-          <a:effectLst/>
-        </p:spPr>
-        <p:style>
-          <a:lnRef idx="1">
-            <a:schemeClr val="accent1"/>
-          </a:lnRef>
-          <a:fillRef idx="3">
-            <a:schemeClr val="accent1"/>
-          </a:fillRef>
-          <a:effectRef idx="2">
-            <a:schemeClr val="accent1"/>
-          </a:effectRef>
-          <a:fontRef idx="minor">
-            <a:schemeClr val="lt1"/>
-          </a:fontRef>
-        </p:style>
-        <p:txBody>
-          <a:bodyPr rtlCol="0" anchor="ctr" wrap="square" lIns="18000" rIns="18000" tIns="9000" bIns="9000"/>
-          <a:lstStyle/>
-          <a:p>
-            <a:pPr algn="l"/>
-            <a:r>
-              <a:rPr sz="800" b="1">
-                <a:solidFill>
-                  <a:srgbClr val="FFFFFF"/>
-                </a:solidFill>
-              </a:rPr>
-              <a:t>⚑ Старт</a:t>
-            </a:r>
-          </a:p>
-        </p:txBody>
-      </p:sp>
-      <p:cxnSp>
-        <p:nvCxnSpPr>
-          <p:cNvPr id="103" name="Connector 102"/>
+          <p:cNvPr id="102" name="Connector 101"/>
           <p:cNvCxnSpPr/>
           <p:nvPr/>
         </p:nvCxnSpPr>
@@ -14130,7 +14038,7 @@
       </p:cxnSp>
       <p:sp>
         <p:nvSpPr>
-          <p:cNvPr id="104" name="Rectangle 103"/>
+          <p:cNvPr id="103" name="Rectangle 102"/>
           <p:cNvSpPr/>
           <p:nvPr/>
         </p:nvSpPr>
@@ -14184,7 +14092,7 @@
       </p:sp>
       <p:sp>
         <p:nvSpPr>
-          <p:cNvPr id="105" name="Diamond 104"/>
+          <p:cNvPr id="104" name="Diamond 103"/>
           <p:cNvSpPr/>
           <p:nvPr/>
         </p:nvSpPr>
@@ -14230,7 +14138,7 @@
       </p:sp>
       <p:sp>
         <p:nvSpPr>
-          <p:cNvPr id="106" name="Rectangle 105"/>
+          <p:cNvPr id="105" name="Rectangle 104"/>
           <p:cNvSpPr/>
           <p:nvPr/>
         </p:nvSpPr>
@@ -14280,7 +14188,7 @@
       </p:sp>
       <p:sp>
         <p:nvSpPr>
-          <p:cNvPr id="107" name="Diamond 106"/>
+          <p:cNvPr id="106" name="Diamond 105"/>
           <p:cNvSpPr/>
           <p:nvPr/>
         </p:nvSpPr>
@@ -14326,7 +14234,7 @@
       </p:sp>
       <p:sp>
         <p:nvSpPr>
-          <p:cNvPr id="108" name="Rectangle 107"/>
+          <p:cNvPr id="107" name="Rectangle 106"/>
           <p:cNvSpPr/>
           <p:nvPr/>
         </p:nvSpPr>
@@ -14376,7 +14284,7 @@
       </p:sp>
       <p:sp>
         <p:nvSpPr>
-          <p:cNvPr id="109" name="Rounded Rectangle 108"/>
+          <p:cNvPr id="108" name="Rounded Rectangle 107"/>
           <p:cNvSpPr/>
           <p:nvPr/>
         </p:nvSpPr>
@@ -14422,7 +14330,7 @@
       </p:sp>
       <p:sp>
         <p:nvSpPr>
-          <p:cNvPr id="110" name="Rectangle 109"/>
+          <p:cNvPr id="109" name="Rectangle 108"/>
           <p:cNvSpPr/>
           <p:nvPr/>
         </p:nvSpPr>
@@ -14472,7 +14380,7 @@
       </p:sp>
       <p:sp>
         <p:nvSpPr>
-          <p:cNvPr id="111" name="Rounded Rectangle 110"/>
+          <p:cNvPr id="110" name="Rounded Rectangle 109"/>
           <p:cNvSpPr/>
           <p:nvPr/>
         </p:nvSpPr>
@@ -14518,7 +14426,7 @@
       </p:sp>
       <p:sp>
         <p:nvSpPr>
-          <p:cNvPr id="112" name="Rectangle 111"/>
+          <p:cNvPr id="111" name="Rectangle 110"/>
           <p:cNvSpPr/>
           <p:nvPr/>
         </p:nvSpPr>
@@ -14568,7 +14476,7 @@
       </p:sp>
       <p:sp>
         <p:nvSpPr>
-          <p:cNvPr id="113" name="Rounded Rectangle 112"/>
+          <p:cNvPr id="112" name="Rounded Rectangle 111"/>
           <p:cNvSpPr/>
           <p:nvPr/>
         </p:nvSpPr>
@@ -14614,7 +14522,7 @@
       </p:sp>
       <p:sp>
         <p:nvSpPr>
-          <p:cNvPr id="114" name="Rectangle 113"/>
+          <p:cNvPr id="113" name="Rectangle 112"/>
           <p:cNvSpPr/>
           <p:nvPr/>
         </p:nvSpPr>
@@ -14664,7 +14572,7 @@
       </p:sp>
       <p:sp>
         <p:nvSpPr>
-          <p:cNvPr id="115" name="Rounded Rectangle 114"/>
+          <p:cNvPr id="114" name="Rounded Rectangle 113"/>
           <p:cNvSpPr/>
           <p:nvPr/>
         </p:nvSpPr>
@@ -14710,7 +14618,7 @@
       </p:sp>
       <p:sp>
         <p:nvSpPr>
-          <p:cNvPr id="116" name="Rectangle 115"/>
+          <p:cNvPr id="115" name="Rectangle 114"/>
           <p:cNvSpPr/>
           <p:nvPr/>
         </p:nvSpPr>
@@ -14760,7 +14668,7 @@
       </p:sp>
       <p:sp>
         <p:nvSpPr>
-          <p:cNvPr id="117" name="Rounded Rectangle 116"/>
+          <p:cNvPr id="116" name="Rounded Rectangle 115"/>
           <p:cNvSpPr/>
           <p:nvPr/>
         </p:nvSpPr>
@@ -14806,7 +14714,7 @@
       </p:sp>
       <p:sp>
         <p:nvSpPr>
-          <p:cNvPr id="118" name="Rectangle 117"/>
+          <p:cNvPr id="117" name="Rectangle 116"/>
           <p:cNvSpPr/>
           <p:nvPr/>
         </p:nvSpPr>
@@ -14856,7 +14764,7 @@
       </p:sp>
       <p:sp>
         <p:nvSpPr>
-          <p:cNvPr id="119" name="Pentagon 118"/>
+          <p:cNvPr id="118" name="Pentagon 117"/>
           <p:cNvSpPr/>
           <p:nvPr/>
         </p:nvSpPr>
@@ -14902,7 +14810,7 @@
       </p:sp>
       <p:sp>
         <p:nvSpPr>
-          <p:cNvPr id="120" name="Rectangle 119"/>
+          <p:cNvPr id="119" name="Rectangle 118"/>
           <p:cNvSpPr/>
           <p:nvPr/>
         </p:nvSpPr>
@@ -14952,7 +14860,7 @@
       </p:sp>
       <p:sp>
         <p:nvSpPr>
-          <p:cNvPr id="121" name="Pentagon 120"/>
+          <p:cNvPr id="120" name="Pentagon 119"/>
           <p:cNvSpPr/>
           <p:nvPr/>
         </p:nvSpPr>
@@ -14998,7 +14906,7 @@
       </p:sp>
       <p:sp>
         <p:nvSpPr>
-          <p:cNvPr id="122" name="Rectangle 121"/>
+          <p:cNvPr id="121" name="Rectangle 120"/>
           <p:cNvSpPr/>
           <p:nvPr/>
         </p:nvSpPr>
@@ -19379,98 +19287,6 @@
         </p:nvSpPr>
         <p:spPr>
           <a:xfrm>
-            <a:off x="7043802" y="1243584"/>
-            <a:ext cx="146304" cy="146304"/>
-          </a:xfrm>
-          <a:prstGeom prst="diamond">
-            <a:avLst/>
-          </a:prstGeom>
-          <a:solidFill>
-            <a:srgbClr val="4472C4"/>
-          </a:solidFill>
-          <a:ln w="15875">
-            <a:solidFill>
-              <a:srgbClr val="2F5597"/>
-            </a:solidFill>
-          </a:ln>
-          <a:effectLst/>
-        </p:spPr>
-        <p:style>
-          <a:lnRef idx="1">
-            <a:schemeClr val="accent1"/>
-          </a:lnRef>
-          <a:fillRef idx="3">
-            <a:schemeClr val="accent1"/>
-          </a:fillRef>
-          <a:effectRef idx="2">
-            <a:schemeClr val="accent1"/>
-          </a:effectRef>
-          <a:fontRef idx="minor">
-            <a:schemeClr val="lt1"/>
-          </a:fontRef>
-        </p:style>
-        <p:txBody>
-          <a:bodyPr rtlCol="0" anchor="ctr" wrap="square" lIns="18000" rIns="18000" tIns="9000" bIns="9000"/>
-          <a:lstStyle/>
-          <a:p>
-            <a:pPr algn="ctr"/>
-          </a:p>
-        </p:txBody>
-      </p:sp>
-      <p:sp>
-        <p:nvSpPr>
-          <p:cNvPr id="96" name="Diamond 95"/>
-          <p:cNvSpPr/>
-          <p:nvPr/>
-        </p:nvSpPr>
-        <p:spPr>
-          <a:xfrm>
-            <a:off x="9736097" y="1554480"/>
-            <a:ext cx="146304" cy="146304"/>
-          </a:xfrm>
-          <a:prstGeom prst="diamond">
-            <a:avLst/>
-          </a:prstGeom>
-          <a:solidFill>
-            <a:srgbClr val="C00000"/>
-          </a:solidFill>
-          <a:ln w="15875">
-            <a:solidFill>
-              <a:srgbClr val="7F0000"/>
-            </a:solidFill>
-          </a:ln>
-          <a:effectLst/>
-        </p:spPr>
-        <p:style>
-          <a:lnRef idx="1">
-            <a:schemeClr val="accent1"/>
-          </a:lnRef>
-          <a:fillRef idx="3">
-            <a:schemeClr val="accent1"/>
-          </a:fillRef>
-          <a:effectRef idx="2">
-            <a:schemeClr val="accent1"/>
-          </a:effectRef>
-          <a:fontRef idx="minor">
-            <a:schemeClr val="lt1"/>
-          </a:fontRef>
-        </p:style>
-        <p:txBody>
-          <a:bodyPr rtlCol="0" anchor="ctr" wrap="square" lIns="18000" rIns="18000" tIns="9000" bIns="9000"/>
-          <a:lstStyle/>
-          <a:p>
-            <a:pPr algn="ctr"/>
-          </a:p>
-        </p:txBody>
-      </p:sp>
-      <p:sp>
-        <p:nvSpPr>
-          <p:cNvPr id="97" name="Diamond 96"/>
-          <p:cNvSpPr/>
-          <p:nvPr/>
-        </p:nvSpPr>
-        <p:spPr>
-          <a:xfrm>
             <a:off x="3813048" y="1865376"/>
             <a:ext cx="146304" cy="146304"/>
           </a:xfrm>
@@ -19511,7 +19327,7 @@
       </p:sp>
       <p:sp>
         <p:nvSpPr>
-          <p:cNvPr id="98" name="Diamond 97"/>
+          <p:cNvPr id="96" name="Diamond 95"/>
           <p:cNvSpPr/>
           <p:nvPr/>
         </p:nvSpPr>
@@ -19557,7 +19373,7 @@
       </p:sp>
       <p:sp>
         <p:nvSpPr>
-          <p:cNvPr id="99" name="Diamond 98"/>
+          <p:cNvPr id="97" name="Diamond 96"/>
           <p:cNvSpPr/>
           <p:nvPr/>
         </p:nvSpPr>
@@ -19603,7 +19419,7 @@
       </p:sp>
       <p:sp>
         <p:nvSpPr>
-          <p:cNvPr id="100" name="Diamond 99"/>
+          <p:cNvPr id="98" name="Diamond 97"/>
           <p:cNvSpPr/>
           <p:nvPr/>
         </p:nvSpPr>
@@ -19649,7 +19465,7 @@
       </p:sp>
       <p:sp>
         <p:nvSpPr>
-          <p:cNvPr id="101" name="Diamond 100"/>
+          <p:cNvPr id="99" name="Diamond 98"/>
           <p:cNvSpPr/>
           <p:nvPr/>
         </p:nvSpPr>
@@ -19695,7 +19511,7 @@
       </p:sp>
       <p:sp>
         <p:nvSpPr>
-          <p:cNvPr id="102" name="Diamond 101"/>
+          <p:cNvPr id="100" name="Diamond 99"/>
           <p:cNvSpPr/>
           <p:nvPr/>
         </p:nvSpPr>
@@ -19741,7 +19557,7 @@
       </p:sp>
       <p:cxnSp>
         <p:nvCxnSpPr>
-          <p:cNvPr id="103" name="Connector 102"/>
+          <p:cNvPr id="101" name="Connector 100"/>
           <p:cNvCxnSpPr/>
           <p:nvPr/>
         </p:nvCxnSpPr>
@@ -19774,6 +19590,95 @@
           </a:fontRef>
         </p:style>
       </p:cxnSp>
+      <p:cxnSp>
+        <p:nvCxnSpPr>
+          <p:cNvPr id="102" name="Connector 101"/>
+          <p:cNvCxnSpPr/>
+          <p:nvPr/>
+        </p:nvCxnSpPr>
+        <p:spPr>
+          <a:xfrm>
+            <a:off x="3886200" y="685800"/>
+            <a:ext cx="0" cy="5138928"/>
+          </a:xfrm>
+          <a:prstGeom prst="line">
+            <a:avLst/>
+          </a:prstGeom>
+          <a:ln w="19050">
+            <a:solidFill>
+              <a:srgbClr val="2F5597"/>
+            </a:solidFill>
+          </a:ln>
+        </p:spPr>
+        <p:style>
+          <a:lnRef idx="2">
+            <a:schemeClr val="accent1"/>
+          </a:lnRef>
+          <a:fillRef idx="0">
+            <a:schemeClr val="accent1"/>
+          </a:fillRef>
+          <a:effectRef idx="1">
+            <a:schemeClr val="accent1"/>
+          </a:effectRef>
+          <a:fontRef idx="minor">
+            <a:schemeClr val="tx1"/>
+          </a:fontRef>
+        </p:style>
+      </p:cxnSp>
+      <p:sp>
+        <p:nvSpPr>
+          <p:cNvPr id="103" name="Rectangle 102"/>
+          <p:cNvSpPr/>
+          <p:nvPr/>
+        </p:nvSpPr>
+        <p:spPr>
+          <a:xfrm>
+            <a:off x="3886200" y="685800"/>
+            <a:ext cx="566928" cy="256032"/>
+          </a:xfrm>
+          <a:prstGeom prst="rect">
+            <a:avLst/>
+          </a:prstGeom>
+          <a:solidFill>
+            <a:srgbClr val="4472C4"/>
+          </a:solidFill>
+          <a:ln w="9525">
+            <a:solidFill>
+              <a:srgbClr val="2F5597"/>
+            </a:solidFill>
+          </a:ln>
+          <a:effectLst/>
+        </p:spPr>
+        <p:style>
+          <a:lnRef idx="1">
+            <a:schemeClr val="accent1"/>
+          </a:lnRef>
+          <a:fillRef idx="3">
+            <a:schemeClr val="accent1"/>
+          </a:fillRef>
+          <a:effectRef idx="2">
+            <a:schemeClr val="accent1"/>
+          </a:effectRef>
+          <a:fontRef idx="minor">
+            <a:schemeClr val="lt1"/>
+          </a:fontRef>
+        </p:style>
+        <p:txBody>
+          <a:bodyPr rtlCol="0" anchor="ctr" wrap="square" lIns="18000" rIns="18000" tIns="9000" bIns="9000"/>
+          <a:lstStyle/>
+          <a:p>
+            <a:pPr algn="l"/>
+            <a:r>
+              <a:rPr sz="800" b="1">
+                <a:solidFill>
+                  <a:srgbClr val="FFFFFF"/>
+                </a:solidFill>
+              </a:rPr>
+              <a:t>⚑ Старт</a:t>
+            </a:r>
+          </a:p>
+        </p:txBody>
+      </p:sp>
       <p:cxnSp>
         <p:nvCxnSpPr>
           <p:cNvPr id="104" name="Connector 103"/>
@@ -19782,95 +19687,6 @@
         </p:nvCxnSpPr>
         <p:spPr>
           <a:xfrm>
-            <a:off x="3886200" y="685800"/>
-            <a:ext cx="0" cy="5138928"/>
-          </a:xfrm>
-          <a:prstGeom prst="line">
-            <a:avLst/>
-          </a:prstGeom>
-          <a:ln w="19050">
-            <a:solidFill>
-              <a:srgbClr val="2F5597"/>
-            </a:solidFill>
-          </a:ln>
-        </p:spPr>
-        <p:style>
-          <a:lnRef idx="2">
-            <a:schemeClr val="accent1"/>
-          </a:lnRef>
-          <a:fillRef idx="0">
-            <a:schemeClr val="accent1"/>
-          </a:fillRef>
-          <a:effectRef idx="1">
-            <a:schemeClr val="accent1"/>
-          </a:effectRef>
-          <a:fontRef idx="minor">
-            <a:schemeClr val="tx1"/>
-          </a:fontRef>
-        </p:style>
-      </p:cxnSp>
-      <p:sp>
-        <p:nvSpPr>
-          <p:cNvPr id="105" name="Rectangle 104"/>
-          <p:cNvSpPr/>
-          <p:nvPr/>
-        </p:nvSpPr>
-        <p:spPr>
-          <a:xfrm>
-            <a:off x="3886200" y="685800"/>
-            <a:ext cx="566928" cy="256032"/>
-          </a:xfrm>
-          <a:prstGeom prst="rect">
-            <a:avLst/>
-          </a:prstGeom>
-          <a:solidFill>
-            <a:srgbClr val="4472C4"/>
-          </a:solidFill>
-          <a:ln w="9525">
-            <a:solidFill>
-              <a:srgbClr val="2F5597"/>
-            </a:solidFill>
-          </a:ln>
-          <a:effectLst/>
-        </p:spPr>
-        <p:style>
-          <a:lnRef idx="1">
-            <a:schemeClr val="accent1"/>
-          </a:lnRef>
-          <a:fillRef idx="3">
-            <a:schemeClr val="accent1"/>
-          </a:fillRef>
-          <a:effectRef idx="2">
-            <a:schemeClr val="accent1"/>
-          </a:effectRef>
-          <a:fontRef idx="minor">
-            <a:schemeClr val="lt1"/>
-          </a:fontRef>
-        </p:style>
-        <p:txBody>
-          <a:bodyPr rtlCol="0" anchor="ctr" wrap="square" lIns="18000" rIns="18000" tIns="9000" bIns="9000"/>
-          <a:lstStyle/>
-          <a:p>
-            <a:pPr algn="l"/>
-            <a:r>
-              <a:rPr sz="800" b="1">
-                <a:solidFill>
-                  <a:srgbClr val="FFFFFF"/>
-                </a:solidFill>
-              </a:rPr>
-              <a:t>⚑ Старт</a:t>
-            </a:r>
-          </a:p>
-        </p:txBody>
-      </p:sp>
-      <p:cxnSp>
-        <p:nvCxnSpPr>
-          <p:cNvPr id="106" name="Connector 105"/>
-          <p:cNvCxnSpPr/>
-          <p:nvPr/>
-        </p:nvCxnSpPr>
-        <p:spPr>
-          <a:xfrm>
             <a:off x="11963085" y="685800"/>
             <a:ext cx="0" cy="5138928"/>
           </a:xfrm>
@@ -19900,7 +19716,7 @@
       </p:cxnSp>
       <p:sp>
         <p:nvSpPr>
-          <p:cNvPr id="107" name="Rectangle 106"/>
+          <p:cNvPr id="105" name="Rectangle 104"/>
           <p:cNvSpPr/>
           <p:nvPr/>
         </p:nvSpPr>
@@ -19954,7 +19770,7 @@
       </p:sp>
       <p:sp>
         <p:nvSpPr>
-          <p:cNvPr id="108" name="Diamond 107"/>
+          <p:cNvPr id="106" name="Diamond 105"/>
           <p:cNvSpPr/>
           <p:nvPr/>
         </p:nvSpPr>
@@ -20000,7 +19816,7 @@
       </p:sp>
       <p:sp>
         <p:nvSpPr>
-          <p:cNvPr id="109" name="Rectangle 108"/>
+          <p:cNvPr id="107" name="Rectangle 106"/>
           <p:cNvSpPr/>
           <p:nvPr/>
         </p:nvSpPr>
@@ -20050,7 +19866,7 @@
       </p:sp>
       <p:sp>
         <p:nvSpPr>
-          <p:cNvPr id="110" name="Diamond 109"/>
+          <p:cNvPr id="108" name="Diamond 107"/>
           <p:cNvSpPr/>
           <p:nvPr/>
         </p:nvSpPr>
@@ -20096,7 +19912,7 @@
       </p:sp>
       <p:sp>
         <p:nvSpPr>
-          <p:cNvPr id="111" name="Rectangle 110"/>
+          <p:cNvPr id="109" name="Rectangle 108"/>
           <p:cNvSpPr/>
           <p:nvPr/>
         </p:nvSpPr>
@@ -20146,7 +19962,7 @@
       </p:sp>
       <p:sp>
         <p:nvSpPr>
-          <p:cNvPr id="112" name="Rounded Rectangle 111"/>
+          <p:cNvPr id="110" name="Rounded Rectangle 109"/>
           <p:cNvSpPr/>
           <p:nvPr/>
         </p:nvSpPr>
@@ -20192,7 +20008,7 @@
       </p:sp>
       <p:sp>
         <p:nvSpPr>
-          <p:cNvPr id="113" name="Rectangle 112"/>
+          <p:cNvPr id="111" name="Rectangle 110"/>
           <p:cNvSpPr/>
           <p:nvPr/>
         </p:nvSpPr>
@@ -20242,7 +20058,7 @@
       </p:sp>
       <p:sp>
         <p:nvSpPr>
-          <p:cNvPr id="114" name="Rounded Rectangle 113"/>
+          <p:cNvPr id="112" name="Rounded Rectangle 111"/>
           <p:cNvSpPr/>
           <p:nvPr/>
         </p:nvSpPr>
@@ -20288,7 +20104,7 @@
       </p:sp>
       <p:sp>
         <p:nvSpPr>
-          <p:cNvPr id="115" name="Rectangle 114"/>
+          <p:cNvPr id="113" name="Rectangle 112"/>
           <p:cNvSpPr/>
           <p:nvPr/>
         </p:nvSpPr>
@@ -20338,7 +20154,7 @@
       </p:sp>
       <p:sp>
         <p:nvSpPr>
-          <p:cNvPr id="116" name="Rounded Rectangle 115"/>
+          <p:cNvPr id="114" name="Rounded Rectangle 113"/>
           <p:cNvSpPr/>
           <p:nvPr/>
         </p:nvSpPr>
@@ -20384,7 +20200,7 @@
       </p:sp>
       <p:sp>
         <p:nvSpPr>
-          <p:cNvPr id="117" name="Rectangle 116"/>
+          <p:cNvPr id="115" name="Rectangle 114"/>
           <p:cNvSpPr/>
           <p:nvPr/>
         </p:nvSpPr>
@@ -20434,7 +20250,7 @@
       </p:sp>
       <p:sp>
         <p:nvSpPr>
-          <p:cNvPr id="118" name="Rounded Rectangle 117"/>
+          <p:cNvPr id="116" name="Rounded Rectangle 115"/>
           <p:cNvSpPr/>
           <p:nvPr/>
         </p:nvSpPr>
@@ -20480,7 +20296,7 @@
       </p:sp>
       <p:sp>
         <p:nvSpPr>
-          <p:cNvPr id="119" name="Rectangle 118"/>
+          <p:cNvPr id="117" name="Rectangle 116"/>
           <p:cNvSpPr/>
           <p:nvPr/>
         </p:nvSpPr>
@@ -20530,7 +20346,7 @@
       </p:sp>
       <p:sp>
         <p:nvSpPr>
-          <p:cNvPr id="120" name="Rounded Rectangle 119"/>
+          <p:cNvPr id="118" name="Rounded Rectangle 117"/>
           <p:cNvSpPr/>
           <p:nvPr/>
         </p:nvSpPr>
@@ -20576,7 +20392,7 @@
       </p:sp>
       <p:sp>
         <p:nvSpPr>
-          <p:cNvPr id="121" name="Rectangle 120"/>
+          <p:cNvPr id="119" name="Rectangle 118"/>
           <p:cNvSpPr/>
           <p:nvPr/>
         </p:nvSpPr>
@@ -20626,7 +20442,7 @@
       </p:sp>
       <p:sp>
         <p:nvSpPr>
-          <p:cNvPr id="122" name="Pentagon 121"/>
+          <p:cNvPr id="120" name="Pentagon 119"/>
           <p:cNvSpPr/>
           <p:nvPr/>
         </p:nvSpPr>
@@ -20672,7 +20488,7 @@
       </p:sp>
       <p:sp>
         <p:nvSpPr>
-          <p:cNvPr id="123" name="Rectangle 122"/>
+          <p:cNvPr id="121" name="Rectangle 120"/>
           <p:cNvSpPr/>
           <p:nvPr/>
         </p:nvSpPr>
@@ -20722,7 +20538,7 @@
       </p:sp>
       <p:sp>
         <p:nvSpPr>
-          <p:cNvPr id="124" name="Pentagon 123"/>
+          <p:cNvPr id="122" name="Pentagon 121"/>
           <p:cNvSpPr/>
           <p:nvPr/>
         </p:nvSpPr>
@@ -20768,7 +20584,7 @@
       </p:sp>
       <p:sp>
         <p:nvSpPr>
-          <p:cNvPr id="125" name="Rectangle 124"/>
+          <p:cNvPr id="123" name="Rectangle 122"/>
           <p:cNvSpPr/>
           <p:nvPr/>
         </p:nvSpPr>
@@ -24021,101 +23837,9 @@
           </a:p>
         </p:txBody>
       </p:sp>
-      <p:sp>
-        <p:nvSpPr>
-          <p:cNvPr id="70" name="Diamond 69"/>
-          <p:cNvSpPr/>
-          <p:nvPr/>
-        </p:nvSpPr>
-        <p:spPr>
-          <a:xfrm>
-            <a:off x="3813048" y="2487168"/>
-            <a:ext cx="146304" cy="146304"/>
-          </a:xfrm>
-          <a:prstGeom prst="diamond">
-            <a:avLst/>
-          </a:prstGeom>
-          <a:solidFill>
-            <a:srgbClr val="4472C4"/>
-          </a:solidFill>
-          <a:ln w="15875">
-            <a:solidFill>
-              <a:srgbClr val="2F5597"/>
-            </a:solidFill>
-          </a:ln>
-          <a:effectLst/>
-        </p:spPr>
-        <p:style>
-          <a:lnRef idx="1">
-            <a:schemeClr val="accent1"/>
-          </a:lnRef>
-          <a:fillRef idx="3">
-            <a:schemeClr val="accent1"/>
-          </a:fillRef>
-          <a:effectRef idx="2">
-            <a:schemeClr val="accent1"/>
-          </a:effectRef>
-          <a:fontRef idx="minor">
-            <a:schemeClr val="lt1"/>
-          </a:fontRef>
-        </p:style>
-        <p:txBody>
-          <a:bodyPr rtlCol="0" anchor="ctr" wrap="square" lIns="18000" rIns="18000" tIns="9000" bIns="9000"/>
-          <a:lstStyle/>
-          <a:p>
-            <a:pPr algn="ctr"/>
-          </a:p>
-        </p:txBody>
-      </p:sp>
-      <p:sp>
-        <p:nvSpPr>
-          <p:cNvPr id="71" name="Diamond 70"/>
-          <p:cNvSpPr/>
-          <p:nvPr/>
-        </p:nvSpPr>
-        <p:spPr>
-          <a:xfrm>
-            <a:off x="8659179" y="2176272"/>
-            <a:ext cx="146304" cy="146304"/>
-          </a:xfrm>
-          <a:prstGeom prst="diamond">
-            <a:avLst/>
-          </a:prstGeom>
-          <a:solidFill>
-            <a:srgbClr val="C00000"/>
-          </a:solidFill>
-          <a:ln w="15875">
-            <a:solidFill>
-              <a:srgbClr val="7F0000"/>
-            </a:solidFill>
-          </a:ln>
-          <a:effectLst/>
-        </p:spPr>
-        <p:style>
-          <a:lnRef idx="1">
-            <a:schemeClr val="accent1"/>
-          </a:lnRef>
-          <a:fillRef idx="3">
-            <a:schemeClr val="accent1"/>
-          </a:fillRef>
-          <a:effectRef idx="2">
-            <a:schemeClr val="accent1"/>
-          </a:effectRef>
-          <a:fontRef idx="minor">
-            <a:schemeClr val="lt1"/>
-          </a:fontRef>
-        </p:style>
-        <p:txBody>
-          <a:bodyPr rtlCol="0" anchor="ctr" wrap="square" lIns="18000" rIns="18000" tIns="9000" bIns="9000"/>
-          <a:lstStyle/>
-          <a:p>
-            <a:pPr algn="ctr"/>
-          </a:p>
-        </p:txBody>
-      </p:sp>
       <p:cxnSp>
         <p:nvCxnSpPr>
-          <p:cNvPr id="72" name="Connector 71"/>
+          <p:cNvPr id="70" name="Connector 69"/>
           <p:cNvCxnSpPr/>
           <p:nvPr/>
         </p:nvCxnSpPr>
@@ -24148,6 +23872,95 @@
           </a:fontRef>
         </p:style>
       </p:cxnSp>
+      <p:cxnSp>
+        <p:nvCxnSpPr>
+          <p:cNvPr id="71" name="Connector 70"/>
+          <p:cNvCxnSpPr/>
+          <p:nvPr/>
+        </p:nvCxnSpPr>
+        <p:spPr>
+          <a:xfrm>
+            <a:off x="3886200" y="685800"/>
+            <a:ext cx="0" cy="2651760"/>
+          </a:xfrm>
+          <a:prstGeom prst="line">
+            <a:avLst/>
+          </a:prstGeom>
+          <a:ln w="19050">
+            <a:solidFill>
+              <a:srgbClr val="2F5597"/>
+            </a:solidFill>
+          </a:ln>
+        </p:spPr>
+        <p:style>
+          <a:lnRef idx="2">
+            <a:schemeClr val="accent1"/>
+          </a:lnRef>
+          <a:fillRef idx="0">
+            <a:schemeClr val="accent1"/>
+          </a:fillRef>
+          <a:effectRef idx="1">
+            <a:schemeClr val="accent1"/>
+          </a:effectRef>
+          <a:fontRef idx="minor">
+            <a:schemeClr val="tx1"/>
+          </a:fontRef>
+        </p:style>
+      </p:cxnSp>
+      <p:sp>
+        <p:nvSpPr>
+          <p:cNvPr id="72" name="Rectangle 71"/>
+          <p:cNvSpPr/>
+          <p:nvPr/>
+        </p:nvSpPr>
+        <p:spPr>
+          <a:xfrm>
+            <a:off x="3886200" y="685800"/>
+            <a:ext cx="566928" cy="256032"/>
+          </a:xfrm>
+          <a:prstGeom prst="rect">
+            <a:avLst/>
+          </a:prstGeom>
+          <a:solidFill>
+            <a:srgbClr val="4472C4"/>
+          </a:solidFill>
+          <a:ln w="9525">
+            <a:solidFill>
+              <a:srgbClr val="2F5597"/>
+            </a:solidFill>
+          </a:ln>
+          <a:effectLst/>
+        </p:spPr>
+        <p:style>
+          <a:lnRef idx="1">
+            <a:schemeClr val="accent1"/>
+          </a:lnRef>
+          <a:fillRef idx="3">
+            <a:schemeClr val="accent1"/>
+          </a:fillRef>
+          <a:effectRef idx="2">
+            <a:schemeClr val="accent1"/>
+          </a:effectRef>
+          <a:fontRef idx="minor">
+            <a:schemeClr val="lt1"/>
+          </a:fontRef>
+        </p:style>
+        <p:txBody>
+          <a:bodyPr rtlCol="0" anchor="ctr" wrap="square" lIns="18000" rIns="18000" tIns="9000" bIns="9000"/>
+          <a:lstStyle/>
+          <a:p>
+            <a:pPr algn="l"/>
+            <a:r>
+              <a:rPr sz="800" b="1">
+                <a:solidFill>
+                  <a:srgbClr val="FFFFFF"/>
+                </a:solidFill>
+              </a:rPr>
+              <a:t>⚑ Старт</a:t>
+            </a:r>
+          </a:p>
+        </p:txBody>
+      </p:sp>
       <p:cxnSp>
         <p:nvCxnSpPr>
           <p:cNvPr id="73" name="Connector 72"/>
@@ -24156,95 +23969,6 @@
         </p:nvCxnSpPr>
         <p:spPr>
           <a:xfrm>
-            <a:off x="3886200" y="685800"/>
-            <a:ext cx="0" cy="2651760"/>
-          </a:xfrm>
-          <a:prstGeom prst="line">
-            <a:avLst/>
-          </a:prstGeom>
-          <a:ln w="19050">
-            <a:solidFill>
-              <a:srgbClr val="2F5597"/>
-            </a:solidFill>
-          </a:ln>
-        </p:spPr>
-        <p:style>
-          <a:lnRef idx="2">
-            <a:schemeClr val="accent1"/>
-          </a:lnRef>
-          <a:fillRef idx="0">
-            <a:schemeClr val="accent1"/>
-          </a:fillRef>
-          <a:effectRef idx="1">
-            <a:schemeClr val="accent1"/>
-          </a:effectRef>
-          <a:fontRef idx="minor">
-            <a:schemeClr val="tx1"/>
-          </a:fontRef>
-        </p:style>
-      </p:cxnSp>
-      <p:sp>
-        <p:nvSpPr>
-          <p:cNvPr id="74" name="Rectangle 73"/>
-          <p:cNvSpPr/>
-          <p:nvPr/>
-        </p:nvSpPr>
-        <p:spPr>
-          <a:xfrm>
-            <a:off x="3886200" y="685800"/>
-            <a:ext cx="566928" cy="256032"/>
-          </a:xfrm>
-          <a:prstGeom prst="rect">
-            <a:avLst/>
-          </a:prstGeom>
-          <a:solidFill>
-            <a:srgbClr val="4472C4"/>
-          </a:solidFill>
-          <a:ln w="9525">
-            <a:solidFill>
-              <a:srgbClr val="2F5597"/>
-            </a:solidFill>
-          </a:ln>
-          <a:effectLst/>
-        </p:spPr>
-        <p:style>
-          <a:lnRef idx="1">
-            <a:schemeClr val="accent1"/>
-          </a:lnRef>
-          <a:fillRef idx="3">
-            <a:schemeClr val="accent1"/>
-          </a:fillRef>
-          <a:effectRef idx="2">
-            <a:schemeClr val="accent1"/>
-          </a:effectRef>
-          <a:fontRef idx="minor">
-            <a:schemeClr val="lt1"/>
-          </a:fontRef>
-        </p:style>
-        <p:txBody>
-          <a:bodyPr rtlCol="0" anchor="ctr" wrap="square" lIns="18000" rIns="18000" tIns="9000" bIns="9000"/>
-          <a:lstStyle/>
-          <a:p>
-            <a:pPr algn="l"/>
-            <a:r>
-              <a:rPr sz="800" b="1">
-                <a:solidFill>
-                  <a:srgbClr val="FFFFFF"/>
-                </a:solidFill>
-              </a:rPr>
-              <a:t>⚑ Старт</a:t>
-            </a:r>
-          </a:p>
-        </p:txBody>
-      </p:sp>
-      <p:cxnSp>
-        <p:nvCxnSpPr>
-          <p:cNvPr id="75" name="Connector 74"/>
-          <p:cNvCxnSpPr/>
-          <p:nvPr/>
-        </p:nvCxnSpPr>
-        <p:spPr>
-          <a:xfrm>
             <a:off x="11963085" y="685800"/>
             <a:ext cx="0" cy="2651760"/>
           </a:xfrm>
@@ -24274,7 +23998,7 @@
       </p:cxnSp>
       <p:sp>
         <p:nvSpPr>
-          <p:cNvPr id="76" name="Rectangle 75"/>
+          <p:cNvPr id="74" name="Rectangle 73"/>
           <p:cNvSpPr/>
           <p:nvPr/>
         </p:nvSpPr>
@@ -24328,7 +24052,7 @@
       </p:sp>
       <p:sp>
         <p:nvSpPr>
-          <p:cNvPr id="77" name="Diamond 76"/>
+          <p:cNvPr id="75" name="Diamond 74"/>
           <p:cNvSpPr/>
           <p:nvPr/>
         </p:nvSpPr>
@@ -24374,7 +24098,7 @@
       </p:sp>
       <p:sp>
         <p:nvSpPr>
-          <p:cNvPr id="78" name="Rectangle 77"/>
+          <p:cNvPr id="76" name="Rectangle 75"/>
           <p:cNvSpPr/>
           <p:nvPr/>
         </p:nvSpPr>
@@ -24424,7 +24148,7 @@
       </p:sp>
       <p:sp>
         <p:nvSpPr>
-          <p:cNvPr id="79" name="Diamond 78"/>
+          <p:cNvPr id="77" name="Diamond 76"/>
           <p:cNvSpPr/>
           <p:nvPr/>
         </p:nvSpPr>
@@ -24470,7 +24194,7 @@
       </p:sp>
       <p:sp>
         <p:nvSpPr>
-          <p:cNvPr id="80" name="Rectangle 79"/>
+          <p:cNvPr id="78" name="Rectangle 77"/>
           <p:cNvSpPr/>
           <p:nvPr/>
         </p:nvSpPr>
@@ -24520,7 +24244,7 @@
       </p:sp>
       <p:sp>
         <p:nvSpPr>
-          <p:cNvPr id="81" name="Rounded Rectangle 80"/>
+          <p:cNvPr id="79" name="Rounded Rectangle 78"/>
           <p:cNvSpPr/>
           <p:nvPr/>
         </p:nvSpPr>
@@ -24566,7 +24290,7 @@
       </p:sp>
       <p:sp>
         <p:nvSpPr>
-          <p:cNvPr id="82" name="Rectangle 81"/>
+          <p:cNvPr id="80" name="Rectangle 79"/>
           <p:cNvSpPr/>
           <p:nvPr/>
         </p:nvSpPr>
@@ -24616,7 +24340,7 @@
       </p:sp>
       <p:sp>
         <p:nvSpPr>
-          <p:cNvPr id="83" name="Rounded Rectangle 82"/>
+          <p:cNvPr id="81" name="Rounded Rectangle 80"/>
           <p:cNvSpPr/>
           <p:nvPr/>
         </p:nvSpPr>
@@ -24662,7 +24386,7 @@
       </p:sp>
       <p:sp>
         <p:nvSpPr>
-          <p:cNvPr id="84" name="Rectangle 83"/>
+          <p:cNvPr id="82" name="Rectangle 81"/>
           <p:cNvSpPr/>
           <p:nvPr/>
         </p:nvSpPr>
@@ -24712,7 +24436,7 @@
       </p:sp>
       <p:sp>
         <p:nvSpPr>
-          <p:cNvPr id="85" name="Rounded Rectangle 84"/>
+          <p:cNvPr id="83" name="Rounded Rectangle 82"/>
           <p:cNvSpPr/>
           <p:nvPr/>
         </p:nvSpPr>
@@ -24758,7 +24482,7 @@
       </p:sp>
       <p:sp>
         <p:nvSpPr>
-          <p:cNvPr id="86" name="Rectangle 85"/>
+          <p:cNvPr id="84" name="Rectangle 83"/>
           <p:cNvSpPr/>
           <p:nvPr/>
         </p:nvSpPr>
@@ -24808,7 +24532,7 @@
       </p:sp>
       <p:sp>
         <p:nvSpPr>
-          <p:cNvPr id="87" name="Rounded Rectangle 86"/>
+          <p:cNvPr id="85" name="Rounded Rectangle 84"/>
           <p:cNvSpPr/>
           <p:nvPr/>
         </p:nvSpPr>
@@ -24854,7 +24578,7 @@
       </p:sp>
       <p:sp>
         <p:nvSpPr>
-          <p:cNvPr id="88" name="Rectangle 87"/>
+          <p:cNvPr id="86" name="Rectangle 85"/>
           <p:cNvSpPr/>
           <p:nvPr/>
         </p:nvSpPr>
@@ -24904,7 +24628,7 @@
       </p:sp>
       <p:sp>
         <p:nvSpPr>
-          <p:cNvPr id="89" name="Rounded Rectangle 88"/>
+          <p:cNvPr id="87" name="Rounded Rectangle 86"/>
           <p:cNvSpPr/>
           <p:nvPr/>
         </p:nvSpPr>
@@ -24950,7 +24674,7 @@
       </p:sp>
       <p:sp>
         <p:nvSpPr>
-          <p:cNvPr id="90" name="Rectangle 89"/>
+          <p:cNvPr id="88" name="Rectangle 87"/>
           <p:cNvSpPr/>
           <p:nvPr/>
         </p:nvSpPr>
@@ -25000,7 +24724,7 @@
       </p:sp>
       <p:sp>
         <p:nvSpPr>
-          <p:cNvPr id="91" name="Pentagon 90"/>
+          <p:cNvPr id="89" name="Pentagon 88"/>
           <p:cNvSpPr/>
           <p:nvPr/>
         </p:nvSpPr>
@@ -25046,7 +24770,7 @@
       </p:sp>
       <p:sp>
         <p:nvSpPr>
-          <p:cNvPr id="92" name="Rectangle 91"/>
+          <p:cNvPr id="90" name="Rectangle 89"/>
           <p:cNvSpPr/>
           <p:nvPr/>
         </p:nvSpPr>
@@ -25096,7 +24820,7 @@
       </p:sp>
       <p:sp>
         <p:nvSpPr>
-          <p:cNvPr id="93" name="Pentagon 92"/>
+          <p:cNvPr id="91" name="Pentagon 90"/>
           <p:cNvSpPr/>
           <p:nvPr/>
         </p:nvSpPr>
@@ -25142,7 +24866,7 @@
       </p:sp>
       <p:sp>
         <p:nvSpPr>
-          <p:cNvPr id="94" name="Rectangle 93"/>
+          <p:cNvPr id="92" name="Rectangle 91"/>
           <p:cNvSpPr/>
           <p:nvPr/>
         </p:nvSpPr>
